--- a/docs/CTC_Mobile_Wishlist_Business_Case.pptx
+++ b/docs/CTC_Mobile_Wishlist_Business_Case.pptx
@@ -5205,7 +5205,7 @@
               </a:defRPr>
             </a:pPr>
             <a:r>
-              <a:t>Traditional SDLC vs. EPAM EliteA Agentic AI SDLC</a:t>
+              <a:t>All amounts in CAD  |  Onshore: DM $200/h, BA $160/h, SA $190/h  |  160h/month</a:t>
             </a:r>
           </a:p>
         </p:txBody>
@@ -5367,7 +5367,7 @@
         <p:spPr>
           <a:xfrm>
             <a:off x="457200" y="1691640"/>
-            <a:ext cx="5486400" cy="320040"/>
+            <a:ext cx="5486400" cy="292608"/>
           </a:xfrm>
           <a:prstGeom prst="rect">
             <a:avLst/>
@@ -5409,7 +5409,7 @@
         </p:nvSpPr>
         <p:spPr>
           <a:xfrm>
-            <a:off x="548640" y="1700784"/>
+            <a:off x="548640" y="1691640"/>
             <a:ext cx="1828800" cy="274320"/>
           </a:xfrm>
           <a:prstGeom prst="rect">
@@ -5424,7 +5424,7 @@
           <a:lstStyle/>
           <a:p>
             <a:pPr algn="l">
-              <a:defRPr sz="1000" b="1">
+              <a:defRPr sz="800" b="1">
                 <a:solidFill>
                   <a:srgbClr val="666666"/>
                 </a:solidFill>
@@ -5444,22 +5444,22 @@
         </p:nvSpPr>
         <p:spPr>
           <a:xfrm>
-            <a:off x="2468880" y="1700784"/>
-            <a:ext cx="457200" cy="274320"/>
-          </a:xfrm>
-          <a:prstGeom prst="rect">
-            <a:avLst/>
-          </a:prstGeom>
-          <a:noFill/>
-        </p:spPr>
-        <p:txBody>
-          <a:bodyPr wrap="square">
-            <a:spAutoFit/>
-          </a:bodyPr>
-          <a:lstStyle/>
-          <a:p>
-            <a:pPr algn="l">
-              <a:defRPr sz="1000" b="1">
+            <a:off x="2423160" y="1691640"/>
+            <a:ext cx="320040" cy="274320"/>
+          </a:xfrm>
+          <a:prstGeom prst="rect">
+            <a:avLst/>
+          </a:prstGeom>
+          <a:noFill/>
+        </p:spPr>
+        <p:txBody>
+          <a:bodyPr wrap="square">
+            <a:spAutoFit/>
+          </a:bodyPr>
+          <a:lstStyle/>
+          <a:p>
+            <a:pPr algn="l">
+              <a:defRPr sz="800" b="1">
                 <a:solidFill>
                   <a:srgbClr val="666666"/>
                 </a:solidFill>
@@ -5479,28 +5479,98 @@
         </p:nvSpPr>
         <p:spPr>
           <a:xfrm>
-            <a:off x="3017520" y="1700784"/>
-            <a:ext cx="1188720" cy="274320"/>
-          </a:xfrm>
-          <a:prstGeom prst="rect">
-            <a:avLst/>
-          </a:prstGeom>
-          <a:noFill/>
-        </p:spPr>
-        <p:txBody>
-          <a:bodyPr wrap="square">
-            <a:spAutoFit/>
-          </a:bodyPr>
-          <a:lstStyle/>
-          <a:p>
-            <a:pPr algn="l">
-              <a:defRPr sz="1000" b="1">
+            <a:off x="2788920" y="1691640"/>
+            <a:ext cx="502920" cy="274320"/>
+          </a:xfrm>
+          <a:prstGeom prst="rect">
+            <a:avLst/>
+          </a:prstGeom>
+          <a:noFill/>
+        </p:spPr>
+        <p:txBody>
+          <a:bodyPr wrap="square">
+            <a:spAutoFit/>
+          </a:bodyPr>
+          <a:lstStyle/>
+          <a:p>
+            <a:pPr algn="l">
+              <a:defRPr sz="800" b="1">
                 <a:solidFill>
                   <a:srgbClr val="666666"/>
                 </a:solidFill>
               </a:defRPr>
             </a:pPr>
             <a:r>
+              <a:t>Shore</a:t>
+            </a:r>
+          </a:p>
+        </p:txBody>
+      </p:sp>
+      <p:sp>
+        <p:nvSpPr>
+          <p:cNvPr id="13" name="TextBox 12"/>
+          <p:cNvSpPr txBox="1"/>
+          <p:nvPr/>
+        </p:nvSpPr>
+        <p:spPr>
+          <a:xfrm>
+            <a:off x="3337560" y="1691640"/>
+            <a:ext cx="548640" cy="274320"/>
+          </a:xfrm>
+          <a:prstGeom prst="rect">
+            <a:avLst/>
+          </a:prstGeom>
+          <a:noFill/>
+        </p:spPr>
+        <p:txBody>
+          <a:bodyPr wrap="square">
+            <a:spAutoFit/>
+          </a:bodyPr>
+          <a:lstStyle/>
+          <a:p>
+            <a:pPr algn="l">
+              <a:defRPr sz="800" b="1">
+                <a:solidFill>
+                  <a:srgbClr val="666666"/>
+                </a:solidFill>
+              </a:defRPr>
+            </a:pPr>
+            <a:r>
+              <a:t>Rate/h</a:t>
+            </a:r>
+          </a:p>
+        </p:txBody>
+      </p:sp>
+      <p:sp>
+        <p:nvSpPr>
+          <p:cNvPr id="14" name="TextBox 13"/>
+          <p:cNvSpPr txBox="1"/>
+          <p:nvPr/>
+        </p:nvSpPr>
+        <p:spPr>
+          <a:xfrm>
+            <a:off x="3977639" y="1691640"/>
+            <a:ext cx="731520" cy="274320"/>
+          </a:xfrm>
+          <a:prstGeom prst="rect">
+            <a:avLst/>
+          </a:prstGeom>
+          <a:noFill/>
+        </p:spPr>
+        <p:txBody>
+          <a:bodyPr wrap="square">
+            <a:spAutoFit/>
+          </a:bodyPr>
+          <a:lstStyle/>
+          <a:p>
+            <a:pPr algn="l">
+              <a:defRPr sz="800" b="1">
+                <a:solidFill>
+                  <a:srgbClr val="666666"/>
+                </a:solidFill>
+              </a:defRPr>
+            </a:pPr>
+            <a:r>
               <a:t>Duration</a:t>
             </a:r>
           </a:p>
@@ -5508,98 +5578,141 @@
       </p:sp>
       <p:sp>
         <p:nvSpPr>
-          <p:cNvPr id="13" name="TextBox 12"/>
-          <p:cNvSpPr txBox="1"/>
-          <p:nvPr/>
-        </p:nvSpPr>
-        <p:spPr>
-          <a:xfrm>
-            <a:off x="4389120" y="1700784"/>
-            <a:ext cx="1371600" cy="274320"/>
-          </a:xfrm>
-          <a:prstGeom prst="rect">
-            <a:avLst/>
-          </a:prstGeom>
-          <a:noFill/>
-        </p:spPr>
-        <p:txBody>
-          <a:bodyPr wrap="square">
-            <a:spAutoFit/>
-          </a:bodyPr>
-          <a:lstStyle/>
-          <a:p>
-            <a:pPr algn="l">
-              <a:defRPr sz="1000" b="1">
+          <p:cNvPr id="15" name="TextBox 14"/>
+          <p:cNvSpPr txBox="1"/>
+          <p:nvPr/>
+        </p:nvSpPr>
+        <p:spPr>
+          <a:xfrm>
+            <a:off x="4754880" y="1691640"/>
+            <a:ext cx="1097280" cy="274320"/>
+          </a:xfrm>
+          <a:prstGeom prst="rect">
+            <a:avLst/>
+          </a:prstGeom>
+          <a:noFill/>
+        </p:spPr>
+        <p:txBody>
+          <a:bodyPr wrap="square">
+            <a:spAutoFit/>
+          </a:bodyPr>
+          <a:lstStyle/>
+          <a:p>
+            <a:pPr algn="l">
+              <a:defRPr sz="800" b="1">
                 <a:solidFill>
                   <a:srgbClr val="666666"/>
                 </a:solidFill>
               </a:defRPr>
             </a:pPr>
             <a:r>
-              <a:t>Cost</a:t>
-            </a:r>
-          </a:p>
-        </p:txBody>
-      </p:sp>
-      <p:sp>
-        <p:nvSpPr>
-          <p:cNvPr id="14" name="TextBox 13"/>
-          <p:cNvSpPr txBox="1"/>
-          <p:nvPr/>
-        </p:nvSpPr>
-        <p:spPr>
-          <a:xfrm>
-            <a:off x="548640" y="2057400"/>
-            <a:ext cx="1828800" cy="274320"/>
-          </a:xfrm>
-          <a:prstGeom prst="rect">
-            <a:avLst/>
-          </a:prstGeom>
-          <a:noFill/>
-        </p:spPr>
-        <p:txBody>
-          <a:bodyPr wrap="square">
-            <a:spAutoFit/>
-          </a:bodyPr>
-          <a:lstStyle/>
-          <a:p>
-            <a:pPr algn="l">
-              <a:defRPr sz="1000" b="0">
+              <a:t>Cost CAD</a:t>
+            </a:r>
+          </a:p>
+        </p:txBody>
+      </p:sp>
+      <p:sp>
+        <p:nvSpPr>
+          <p:cNvPr id="16" name="Rectangle 15"/>
+          <p:cNvSpPr/>
+          <p:nvPr/>
+        </p:nvSpPr>
+        <p:spPr>
+          <a:xfrm>
+            <a:off x="457200" y="2011680"/>
+            <a:ext cx="5486400" cy="274320"/>
+          </a:xfrm>
+          <a:prstGeom prst="rect">
+            <a:avLst/>
+          </a:prstGeom>
+          <a:solidFill>
+            <a:srgbClr val="F5F5F5"/>
+          </a:solidFill>
+          <a:ln>
+            <a:noFill/>
+          </a:ln>
+        </p:spPr>
+        <p:style>
+          <a:lnRef idx="1">
+            <a:schemeClr val="accent1"/>
+          </a:lnRef>
+          <a:fillRef idx="3">
+            <a:schemeClr val="accent1"/>
+          </a:fillRef>
+          <a:effectRef idx="2">
+            <a:schemeClr val="accent1"/>
+          </a:effectRef>
+          <a:fontRef idx="minor">
+            <a:schemeClr val="lt1"/>
+          </a:fontRef>
+        </p:style>
+        <p:txBody>
+          <a:bodyPr rtlCol="0" anchor="ctr"/>
+          <a:lstStyle/>
+          <a:p>
+            <a:pPr algn="ctr"/>
+          </a:p>
+        </p:txBody>
+      </p:sp>
+      <p:sp>
+        <p:nvSpPr>
+          <p:cNvPr id="17" name="TextBox 16"/>
+          <p:cNvSpPr txBox="1"/>
+          <p:nvPr/>
+        </p:nvSpPr>
+        <p:spPr>
+          <a:xfrm>
+            <a:off x="548640" y="2011680"/>
+            <a:ext cx="1828800" cy="256032"/>
+          </a:xfrm>
+          <a:prstGeom prst="rect">
+            <a:avLst/>
+          </a:prstGeom>
+          <a:noFill/>
+        </p:spPr>
+        <p:txBody>
+          <a:bodyPr wrap="square">
+            <a:spAutoFit/>
+          </a:bodyPr>
+          <a:lstStyle/>
+          <a:p>
+            <a:pPr algn="l">
+              <a:defRPr sz="900" b="0">
                 <a:solidFill>
                   <a:srgbClr val="333333"/>
                 </a:solidFill>
               </a:defRPr>
             </a:pPr>
             <a:r>
-              <a:t>Project Manager</a:t>
-            </a:r>
-          </a:p>
-        </p:txBody>
-      </p:sp>
-      <p:sp>
-        <p:nvSpPr>
-          <p:cNvPr id="15" name="TextBox 14"/>
-          <p:cNvSpPr txBox="1"/>
-          <p:nvPr/>
-        </p:nvSpPr>
-        <p:spPr>
-          <a:xfrm>
-            <a:off x="2468880" y="2057400"/>
-            <a:ext cx="457200" cy="274320"/>
-          </a:xfrm>
-          <a:prstGeom prst="rect">
-            <a:avLst/>
-          </a:prstGeom>
-          <a:noFill/>
-        </p:spPr>
-        <p:txBody>
-          <a:bodyPr wrap="square">
-            <a:spAutoFit/>
-          </a:bodyPr>
-          <a:lstStyle/>
-          <a:p>
-            <a:pPr algn="l">
-              <a:defRPr sz="1000" b="0">
+              <a:t>Delivery Manager</a:t>
+            </a:r>
+          </a:p>
+        </p:txBody>
+      </p:sp>
+      <p:sp>
+        <p:nvSpPr>
+          <p:cNvPr id="18" name="TextBox 17"/>
+          <p:cNvSpPr txBox="1"/>
+          <p:nvPr/>
+        </p:nvSpPr>
+        <p:spPr>
+          <a:xfrm>
+            <a:off x="2423160" y="2011680"/>
+            <a:ext cx="320040" cy="256032"/>
+          </a:xfrm>
+          <a:prstGeom prst="rect">
+            <a:avLst/>
+          </a:prstGeom>
+          <a:noFill/>
+        </p:spPr>
+        <p:txBody>
+          <a:bodyPr wrap="square">
+            <a:spAutoFit/>
+          </a:bodyPr>
+          <a:lstStyle/>
+          <a:p>
+            <a:pPr algn="l">
+              <a:defRPr sz="900" b="0">
                 <a:solidFill>
                   <a:srgbClr val="333333"/>
                 </a:solidFill>
@@ -5613,104 +5726,470 @@
       </p:sp>
       <p:sp>
         <p:nvSpPr>
-          <p:cNvPr id="16" name="TextBox 15"/>
-          <p:cNvSpPr txBox="1"/>
-          <p:nvPr/>
-        </p:nvSpPr>
-        <p:spPr>
-          <a:xfrm>
-            <a:off x="3017520" y="2057400"/>
-            <a:ext cx="1188720" cy="274320"/>
-          </a:xfrm>
-          <a:prstGeom prst="rect">
-            <a:avLst/>
-          </a:prstGeom>
-          <a:noFill/>
-        </p:spPr>
-        <p:txBody>
-          <a:bodyPr wrap="square">
-            <a:spAutoFit/>
-          </a:bodyPr>
-          <a:lstStyle/>
-          <a:p>
-            <a:pPr algn="l">
-              <a:defRPr sz="1000" b="0">
+          <p:cNvPr id="19" name="TextBox 18"/>
+          <p:cNvSpPr txBox="1"/>
+          <p:nvPr/>
+        </p:nvSpPr>
+        <p:spPr>
+          <a:xfrm>
+            <a:off x="2788920" y="2011680"/>
+            <a:ext cx="502920" cy="256032"/>
+          </a:xfrm>
+          <a:prstGeom prst="rect">
+            <a:avLst/>
+          </a:prstGeom>
+          <a:noFill/>
+        </p:spPr>
+        <p:txBody>
+          <a:bodyPr wrap="square">
+            <a:spAutoFit/>
+          </a:bodyPr>
+          <a:lstStyle/>
+          <a:p>
+            <a:pPr algn="l">
+              <a:defRPr sz="900" b="1">
+                <a:solidFill>
+                  <a:srgbClr val="D52B1E"/>
+                </a:solidFill>
+              </a:defRPr>
+            </a:pPr>
+            <a:r>
+              <a:t>On</a:t>
+            </a:r>
+          </a:p>
+        </p:txBody>
+      </p:sp>
+      <p:sp>
+        <p:nvSpPr>
+          <p:cNvPr id="20" name="TextBox 19"/>
+          <p:cNvSpPr txBox="1"/>
+          <p:nvPr/>
+        </p:nvSpPr>
+        <p:spPr>
+          <a:xfrm>
+            <a:off x="3337560" y="2011680"/>
+            <a:ext cx="548640" cy="256032"/>
+          </a:xfrm>
+          <a:prstGeom prst="rect">
+            <a:avLst/>
+          </a:prstGeom>
+          <a:noFill/>
+        </p:spPr>
+        <p:txBody>
+          <a:bodyPr wrap="square">
+            <a:spAutoFit/>
+          </a:bodyPr>
+          <a:lstStyle/>
+          <a:p>
+            <a:pPr algn="l">
+              <a:defRPr sz="900" b="0">
                 <a:solidFill>
                   <a:srgbClr val="333333"/>
                 </a:solidFill>
               </a:defRPr>
             </a:pPr>
             <a:r>
-              <a:t>6-9 months</a:t>
-            </a:r>
-          </a:p>
-        </p:txBody>
-      </p:sp>
-      <p:sp>
-        <p:nvSpPr>
-          <p:cNvPr id="17" name="TextBox 16"/>
-          <p:cNvSpPr txBox="1"/>
-          <p:nvPr/>
-        </p:nvSpPr>
-        <p:spPr>
-          <a:xfrm>
-            <a:off x="4389120" y="2057400"/>
-            <a:ext cx="1371600" cy="274320"/>
-          </a:xfrm>
-          <a:prstGeom prst="rect">
-            <a:avLst/>
-          </a:prstGeom>
-          <a:noFill/>
-        </p:spPr>
-        <p:txBody>
-          <a:bodyPr wrap="square">
-            <a:spAutoFit/>
-          </a:bodyPr>
-          <a:lstStyle/>
-          <a:p>
-            <a:pPr algn="l">
-              <a:defRPr sz="1000" b="0">
+              <a:t>$200</a:t>
+            </a:r>
+          </a:p>
+        </p:txBody>
+      </p:sp>
+      <p:sp>
+        <p:nvSpPr>
+          <p:cNvPr id="21" name="TextBox 20"/>
+          <p:cNvSpPr txBox="1"/>
+          <p:nvPr/>
+        </p:nvSpPr>
+        <p:spPr>
+          <a:xfrm>
+            <a:off x="3977639" y="2011680"/>
+            <a:ext cx="731520" cy="256032"/>
+          </a:xfrm>
+          <a:prstGeom prst="rect">
+            <a:avLst/>
+          </a:prstGeom>
+          <a:noFill/>
+        </p:spPr>
+        <p:txBody>
+          <a:bodyPr wrap="square">
+            <a:spAutoFit/>
+          </a:bodyPr>
+          <a:lstStyle/>
+          <a:p>
+            <a:pPr algn="l">
+              <a:defRPr sz="900" b="0">
                 <a:solidFill>
                   <a:srgbClr val="333333"/>
                 </a:solidFill>
               </a:defRPr>
             </a:pPr>
             <a:r>
-              <a:t>$180K-250K</a:t>
-            </a:r>
-          </a:p>
-        </p:txBody>
-      </p:sp>
-      <p:sp>
-        <p:nvSpPr>
-          <p:cNvPr id="18" name="TextBox 17"/>
-          <p:cNvSpPr txBox="1"/>
-          <p:nvPr/>
-        </p:nvSpPr>
-        <p:spPr>
-          <a:xfrm>
-            <a:off x="548640" y="2377440"/>
-            <a:ext cx="1828800" cy="274320"/>
-          </a:xfrm>
-          <a:prstGeom prst="rect">
-            <a:avLst/>
-          </a:prstGeom>
-          <a:noFill/>
-        </p:spPr>
-        <p:txBody>
-          <a:bodyPr wrap="square">
-            <a:spAutoFit/>
-          </a:bodyPr>
-          <a:lstStyle/>
-          <a:p>
-            <a:pPr algn="l">
-              <a:defRPr sz="1000" b="0">
+              <a:t>6-9 mo</a:t>
+            </a:r>
+          </a:p>
+        </p:txBody>
+      </p:sp>
+      <p:sp>
+        <p:nvSpPr>
+          <p:cNvPr id="22" name="TextBox 21"/>
+          <p:cNvSpPr txBox="1"/>
+          <p:nvPr/>
+        </p:nvSpPr>
+        <p:spPr>
+          <a:xfrm>
+            <a:off x="4754880" y="2011680"/>
+            <a:ext cx="1097280" cy="256032"/>
+          </a:xfrm>
+          <a:prstGeom prst="rect">
+            <a:avLst/>
+          </a:prstGeom>
+          <a:noFill/>
+        </p:spPr>
+        <p:txBody>
+          <a:bodyPr wrap="square">
+            <a:spAutoFit/>
+          </a:bodyPr>
+          <a:lstStyle/>
+          <a:p>
+            <a:pPr algn="l">
+              <a:defRPr sz="900" b="0">
                 <a:solidFill>
                   <a:srgbClr val="333333"/>
                 </a:solidFill>
               </a:defRPr>
             </a:pPr>
             <a:r>
+              <a:t>$192K-288K</a:t>
+            </a:r>
+          </a:p>
+        </p:txBody>
+      </p:sp>
+      <p:sp>
+        <p:nvSpPr>
+          <p:cNvPr id="23" name="Rectangle 22"/>
+          <p:cNvSpPr/>
+          <p:nvPr/>
+        </p:nvSpPr>
+        <p:spPr>
+          <a:xfrm>
+            <a:off x="457200" y="2286000"/>
+            <a:ext cx="5486400" cy="274320"/>
+          </a:xfrm>
+          <a:prstGeom prst="rect">
+            <a:avLst/>
+          </a:prstGeom>
+          <a:solidFill>
+            <a:srgbClr val="FFFFFF"/>
+          </a:solidFill>
+          <a:ln>
+            <a:noFill/>
+          </a:ln>
+        </p:spPr>
+        <p:style>
+          <a:lnRef idx="1">
+            <a:schemeClr val="accent1"/>
+          </a:lnRef>
+          <a:fillRef idx="3">
+            <a:schemeClr val="accent1"/>
+          </a:fillRef>
+          <a:effectRef idx="2">
+            <a:schemeClr val="accent1"/>
+          </a:effectRef>
+          <a:fontRef idx="minor">
+            <a:schemeClr val="lt1"/>
+          </a:fontRef>
+        </p:style>
+        <p:txBody>
+          <a:bodyPr rtlCol="0" anchor="ctr"/>
+          <a:lstStyle/>
+          <a:p>
+            <a:pPr algn="ctr"/>
+          </a:p>
+        </p:txBody>
+      </p:sp>
+      <p:sp>
+        <p:nvSpPr>
+          <p:cNvPr id="24" name="TextBox 23"/>
+          <p:cNvSpPr txBox="1"/>
+          <p:nvPr/>
+        </p:nvSpPr>
+        <p:spPr>
+          <a:xfrm>
+            <a:off x="548640" y="2286000"/>
+            <a:ext cx="1828800" cy="256032"/>
+          </a:xfrm>
+          <a:prstGeom prst="rect">
+            <a:avLst/>
+          </a:prstGeom>
+          <a:noFill/>
+        </p:spPr>
+        <p:txBody>
+          <a:bodyPr wrap="square">
+            <a:spAutoFit/>
+          </a:bodyPr>
+          <a:lstStyle/>
+          <a:p>
+            <a:pPr algn="l">
+              <a:defRPr sz="900" b="0">
+                <a:solidFill>
+                  <a:srgbClr val="333333"/>
+                </a:solidFill>
+              </a:defRPr>
+            </a:pPr>
+            <a:r>
+              <a:t>Business Analyst</a:t>
+            </a:r>
+          </a:p>
+        </p:txBody>
+      </p:sp>
+      <p:sp>
+        <p:nvSpPr>
+          <p:cNvPr id="25" name="TextBox 24"/>
+          <p:cNvSpPr txBox="1"/>
+          <p:nvPr/>
+        </p:nvSpPr>
+        <p:spPr>
+          <a:xfrm>
+            <a:off x="2423160" y="2286000"/>
+            <a:ext cx="320040" cy="256032"/>
+          </a:xfrm>
+          <a:prstGeom prst="rect">
+            <a:avLst/>
+          </a:prstGeom>
+          <a:noFill/>
+        </p:spPr>
+        <p:txBody>
+          <a:bodyPr wrap="square">
+            <a:spAutoFit/>
+          </a:bodyPr>
+          <a:lstStyle/>
+          <a:p>
+            <a:pPr algn="l">
+              <a:defRPr sz="900" b="0">
+                <a:solidFill>
+                  <a:srgbClr val="333333"/>
+                </a:solidFill>
+              </a:defRPr>
+            </a:pPr>
+            <a:r>
+              <a:t>1</a:t>
+            </a:r>
+          </a:p>
+        </p:txBody>
+      </p:sp>
+      <p:sp>
+        <p:nvSpPr>
+          <p:cNvPr id="26" name="TextBox 25"/>
+          <p:cNvSpPr txBox="1"/>
+          <p:nvPr/>
+        </p:nvSpPr>
+        <p:spPr>
+          <a:xfrm>
+            <a:off x="2788920" y="2286000"/>
+            <a:ext cx="502920" cy="256032"/>
+          </a:xfrm>
+          <a:prstGeom prst="rect">
+            <a:avLst/>
+          </a:prstGeom>
+          <a:noFill/>
+        </p:spPr>
+        <p:txBody>
+          <a:bodyPr wrap="square">
+            <a:spAutoFit/>
+          </a:bodyPr>
+          <a:lstStyle/>
+          <a:p>
+            <a:pPr algn="l">
+              <a:defRPr sz="900" b="1">
+                <a:solidFill>
+                  <a:srgbClr val="D52B1E"/>
+                </a:solidFill>
+              </a:defRPr>
+            </a:pPr>
+            <a:r>
+              <a:t>On</a:t>
+            </a:r>
+          </a:p>
+        </p:txBody>
+      </p:sp>
+      <p:sp>
+        <p:nvSpPr>
+          <p:cNvPr id="27" name="TextBox 26"/>
+          <p:cNvSpPr txBox="1"/>
+          <p:nvPr/>
+        </p:nvSpPr>
+        <p:spPr>
+          <a:xfrm>
+            <a:off x="3337560" y="2286000"/>
+            <a:ext cx="548640" cy="256032"/>
+          </a:xfrm>
+          <a:prstGeom prst="rect">
+            <a:avLst/>
+          </a:prstGeom>
+          <a:noFill/>
+        </p:spPr>
+        <p:txBody>
+          <a:bodyPr wrap="square">
+            <a:spAutoFit/>
+          </a:bodyPr>
+          <a:lstStyle/>
+          <a:p>
+            <a:pPr algn="l">
+              <a:defRPr sz="900" b="0">
+                <a:solidFill>
+                  <a:srgbClr val="333333"/>
+                </a:solidFill>
+              </a:defRPr>
+            </a:pPr>
+            <a:r>
+              <a:t>$160</a:t>
+            </a:r>
+          </a:p>
+        </p:txBody>
+      </p:sp>
+      <p:sp>
+        <p:nvSpPr>
+          <p:cNvPr id="28" name="TextBox 27"/>
+          <p:cNvSpPr txBox="1"/>
+          <p:nvPr/>
+        </p:nvSpPr>
+        <p:spPr>
+          <a:xfrm>
+            <a:off x="3977639" y="2286000"/>
+            <a:ext cx="731520" cy="256032"/>
+          </a:xfrm>
+          <a:prstGeom prst="rect">
+            <a:avLst/>
+          </a:prstGeom>
+          <a:noFill/>
+        </p:spPr>
+        <p:txBody>
+          <a:bodyPr wrap="square">
+            <a:spAutoFit/>
+          </a:bodyPr>
+          <a:lstStyle/>
+          <a:p>
+            <a:pPr algn="l">
+              <a:defRPr sz="900" b="0">
+                <a:solidFill>
+                  <a:srgbClr val="333333"/>
+                </a:solidFill>
+              </a:defRPr>
+            </a:pPr>
+            <a:r>
+              <a:t>2-3 mo</a:t>
+            </a:r>
+          </a:p>
+        </p:txBody>
+      </p:sp>
+      <p:sp>
+        <p:nvSpPr>
+          <p:cNvPr id="29" name="TextBox 28"/>
+          <p:cNvSpPr txBox="1"/>
+          <p:nvPr/>
+        </p:nvSpPr>
+        <p:spPr>
+          <a:xfrm>
+            <a:off x="4754880" y="2286000"/>
+            <a:ext cx="1097280" cy="256032"/>
+          </a:xfrm>
+          <a:prstGeom prst="rect">
+            <a:avLst/>
+          </a:prstGeom>
+          <a:noFill/>
+        </p:spPr>
+        <p:txBody>
+          <a:bodyPr wrap="square">
+            <a:spAutoFit/>
+          </a:bodyPr>
+          <a:lstStyle/>
+          <a:p>
+            <a:pPr algn="l">
+              <a:defRPr sz="900" b="0">
+                <a:solidFill>
+                  <a:srgbClr val="333333"/>
+                </a:solidFill>
+              </a:defRPr>
+            </a:pPr>
+            <a:r>
+              <a:t>$51K-77K</a:t>
+            </a:r>
+          </a:p>
+        </p:txBody>
+      </p:sp>
+      <p:sp>
+        <p:nvSpPr>
+          <p:cNvPr id="30" name="Rectangle 29"/>
+          <p:cNvSpPr/>
+          <p:nvPr/>
+        </p:nvSpPr>
+        <p:spPr>
+          <a:xfrm>
+            <a:off x="457200" y="2560320"/>
+            <a:ext cx="5486400" cy="274320"/>
+          </a:xfrm>
+          <a:prstGeom prst="rect">
+            <a:avLst/>
+          </a:prstGeom>
+          <a:solidFill>
+            <a:srgbClr val="F5F5F5"/>
+          </a:solidFill>
+          <a:ln>
+            <a:noFill/>
+          </a:ln>
+        </p:spPr>
+        <p:style>
+          <a:lnRef idx="1">
+            <a:schemeClr val="accent1"/>
+          </a:lnRef>
+          <a:fillRef idx="3">
+            <a:schemeClr val="accent1"/>
+          </a:fillRef>
+          <a:effectRef idx="2">
+            <a:schemeClr val="accent1"/>
+          </a:effectRef>
+          <a:fontRef idx="minor">
+            <a:schemeClr val="lt1"/>
+          </a:fontRef>
+        </p:style>
+        <p:txBody>
+          <a:bodyPr rtlCol="0" anchor="ctr"/>
+          <a:lstStyle/>
+          <a:p>
+            <a:pPr algn="ctr"/>
+          </a:p>
+        </p:txBody>
+      </p:sp>
+      <p:sp>
+        <p:nvSpPr>
+          <p:cNvPr id="31" name="TextBox 30"/>
+          <p:cNvSpPr txBox="1"/>
+          <p:nvPr/>
+        </p:nvSpPr>
+        <p:spPr>
+          <a:xfrm>
+            <a:off x="548640" y="2560320"/>
+            <a:ext cx="1828800" cy="256032"/>
+          </a:xfrm>
+          <a:prstGeom prst="rect">
+            <a:avLst/>
+          </a:prstGeom>
+          <a:noFill/>
+        </p:spPr>
+        <p:txBody>
+          <a:bodyPr wrap="square">
+            <a:spAutoFit/>
+          </a:bodyPr>
+          <a:lstStyle/>
+          <a:p>
+            <a:pPr algn="l">
+              <a:defRPr sz="900" b="0">
+                <a:solidFill>
+                  <a:srgbClr val="333333"/>
+                </a:solidFill>
+              </a:defRPr>
+            </a:pPr>
+            <a:r>
               <a:t>Solution Architect</a:t>
             </a:r>
           </a:p>
@@ -5718,28 +6197,28 @@
       </p:sp>
       <p:sp>
         <p:nvSpPr>
-          <p:cNvPr id="19" name="TextBox 18"/>
-          <p:cNvSpPr txBox="1"/>
-          <p:nvPr/>
-        </p:nvSpPr>
-        <p:spPr>
-          <a:xfrm>
-            <a:off x="2468880" y="2377440"/>
-            <a:ext cx="457200" cy="274320"/>
-          </a:xfrm>
-          <a:prstGeom prst="rect">
-            <a:avLst/>
-          </a:prstGeom>
-          <a:noFill/>
-        </p:spPr>
-        <p:txBody>
-          <a:bodyPr wrap="square">
-            <a:spAutoFit/>
-          </a:bodyPr>
-          <a:lstStyle/>
-          <a:p>
-            <a:pPr algn="l">
-              <a:defRPr sz="1000" b="0">
+          <p:cNvPr id="32" name="TextBox 31"/>
+          <p:cNvSpPr txBox="1"/>
+          <p:nvPr/>
+        </p:nvSpPr>
+        <p:spPr>
+          <a:xfrm>
+            <a:off x="2423160" y="2560320"/>
+            <a:ext cx="320040" cy="256032"/>
+          </a:xfrm>
+          <a:prstGeom prst="rect">
+            <a:avLst/>
+          </a:prstGeom>
+          <a:noFill/>
+        </p:spPr>
+        <p:txBody>
+          <a:bodyPr wrap="square">
+            <a:spAutoFit/>
+          </a:bodyPr>
+          <a:lstStyle/>
+          <a:p>
+            <a:pPr algn="l">
+              <a:defRPr sz="900" b="0">
                 <a:solidFill>
                   <a:srgbClr val="333333"/>
                 </a:solidFill>
@@ -5753,139 +6232,758 @@
       </p:sp>
       <p:sp>
         <p:nvSpPr>
-          <p:cNvPr id="20" name="TextBox 19"/>
-          <p:cNvSpPr txBox="1"/>
-          <p:nvPr/>
-        </p:nvSpPr>
-        <p:spPr>
-          <a:xfrm>
-            <a:off x="3017520" y="2377440"/>
-            <a:ext cx="1188720" cy="274320"/>
-          </a:xfrm>
-          <a:prstGeom prst="rect">
-            <a:avLst/>
-          </a:prstGeom>
-          <a:noFill/>
-        </p:spPr>
-        <p:txBody>
-          <a:bodyPr wrap="square">
-            <a:spAutoFit/>
-          </a:bodyPr>
-          <a:lstStyle/>
-          <a:p>
-            <a:pPr algn="l">
-              <a:defRPr sz="1000" b="0">
+          <p:cNvPr id="33" name="TextBox 32"/>
+          <p:cNvSpPr txBox="1"/>
+          <p:nvPr/>
+        </p:nvSpPr>
+        <p:spPr>
+          <a:xfrm>
+            <a:off x="2788920" y="2560320"/>
+            <a:ext cx="502920" cy="256032"/>
+          </a:xfrm>
+          <a:prstGeom prst="rect">
+            <a:avLst/>
+          </a:prstGeom>
+          <a:noFill/>
+        </p:spPr>
+        <p:txBody>
+          <a:bodyPr wrap="square">
+            <a:spAutoFit/>
+          </a:bodyPr>
+          <a:lstStyle/>
+          <a:p>
+            <a:pPr algn="l">
+              <a:defRPr sz="900" b="1">
+                <a:solidFill>
+                  <a:srgbClr val="D52B1E"/>
+                </a:solidFill>
+              </a:defRPr>
+            </a:pPr>
+            <a:r>
+              <a:t>On</a:t>
+            </a:r>
+          </a:p>
+        </p:txBody>
+      </p:sp>
+      <p:sp>
+        <p:nvSpPr>
+          <p:cNvPr id="34" name="TextBox 33"/>
+          <p:cNvSpPr txBox="1"/>
+          <p:nvPr/>
+        </p:nvSpPr>
+        <p:spPr>
+          <a:xfrm>
+            <a:off x="3337560" y="2560320"/>
+            <a:ext cx="548640" cy="256032"/>
+          </a:xfrm>
+          <a:prstGeom prst="rect">
+            <a:avLst/>
+          </a:prstGeom>
+          <a:noFill/>
+        </p:spPr>
+        <p:txBody>
+          <a:bodyPr wrap="square">
+            <a:spAutoFit/>
+          </a:bodyPr>
+          <a:lstStyle/>
+          <a:p>
+            <a:pPr algn="l">
+              <a:defRPr sz="900" b="0">
                 <a:solidFill>
                   <a:srgbClr val="333333"/>
                 </a:solidFill>
               </a:defRPr>
             </a:pPr>
             <a:r>
-              <a:t>3 months</a:t>
-            </a:r>
-          </a:p>
-        </p:txBody>
-      </p:sp>
-      <p:sp>
-        <p:nvSpPr>
-          <p:cNvPr id="21" name="TextBox 20"/>
-          <p:cNvSpPr txBox="1"/>
-          <p:nvPr/>
-        </p:nvSpPr>
-        <p:spPr>
-          <a:xfrm>
-            <a:off x="4389120" y="2377440"/>
-            <a:ext cx="1371600" cy="274320"/>
-          </a:xfrm>
-          <a:prstGeom prst="rect">
-            <a:avLst/>
-          </a:prstGeom>
-          <a:noFill/>
-        </p:spPr>
-        <p:txBody>
-          <a:bodyPr wrap="square">
-            <a:spAutoFit/>
-          </a:bodyPr>
-          <a:lstStyle/>
-          <a:p>
-            <a:pPr algn="l">
-              <a:defRPr sz="1000" b="0">
+              <a:t>$190</a:t>
+            </a:r>
+          </a:p>
+        </p:txBody>
+      </p:sp>
+      <p:sp>
+        <p:nvSpPr>
+          <p:cNvPr id="35" name="TextBox 34"/>
+          <p:cNvSpPr txBox="1"/>
+          <p:nvPr/>
+        </p:nvSpPr>
+        <p:spPr>
+          <a:xfrm>
+            <a:off x="3977639" y="2560320"/>
+            <a:ext cx="731520" cy="256032"/>
+          </a:xfrm>
+          <a:prstGeom prst="rect">
+            <a:avLst/>
+          </a:prstGeom>
+          <a:noFill/>
+        </p:spPr>
+        <p:txBody>
+          <a:bodyPr wrap="square">
+            <a:spAutoFit/>
+          </a:bodyPr>
+          <a:lstStyle/>
+          <a:p>
+            <a:pPr algn="l">
+              <a:defRPr sz="900" b="0">
                 <a:solidFill>
                   <a:srgbClr val="333333"/>
                 </a:solidFill>
               </a:defRPr>
             </a:pPr>
             <a:r>
-              <a:t>$90K-120K</a:t>
-            </a:r>
-          </a:p>
-        </p:txBody>
-      </p:sp>
-      <p:sp>
-        <p:nvSpPr>
-          <p:cNvPr id="22" name="TextBox 21"/>
-          <p:cNvSpPr txBox="1"/>
-          <p:nvPr/>
-        </p:nvSpPr>
-        <p:spPr>
-          <a:xfrm>
-            <a:off x="548640" y="2697480"/>
-            <a:ext cx="1828800" cy="274320"/>
-          </a:xfrm>
-          <a:prstGeom prst="rect">
-            <a:avLst/>
-          </a:prstGeom>
-          <a:noFill/>
-        </p:spPr>
-        <p:txBody>
-          <a:bodyPr wrap="square">
-            <a:spAutoFit/>
-          </a:bodyPr>
-          <a:lstStyle/>
-          <a:p>
-            <a:pPr algn="l">
-              <a:defRPr sz="1000" b="0">
+              <a:t>3-4 mo</a:t>
+            </a:r>
+          </a:p>
+        </p:txBody>
+      </p:sp>
+      <p:sp>
+        <p:nvSpPr>
+          <p:cNvPr id="36" name="TextBox 35"/>
+          <p:cNvSpPr txBox="1"/>
+          <p:nvPr/>
+        </p:nvSpPr>
+        <p:spPr>
+          <a:xfrm>
+            <a:off x="4754880" y="2560320"/>
+            <a:ext cx="1097280" cy="256032"/>
+          </a:xfrm>
+          <a:prstGeom prst="rect">
+            <a:avLst/>
+          </a:prstGeom>
+          <a:noFill/>
+        </p:spPr>
+        <p:txBody>
+          <a:bodyPr wrap="square">
+            <a:spAutoFit/>
+          </a:bodyPr>
+          <a:lstStyle/>
+          <a:p>
+            <a:pPr algn="l">
+              <a:defRPr sz="900" b="0">
                 <a:solidFill>
                   <a:srgbClr val="333333"/>
                 </a:solidFill>
               </a:defRPr>
             </a:pPr>
             <a:r>
-              <a:t>UX/UI Designer</a:t>
-            </a:r>
-          </a:p>
-        </p:txBody>
-      </p:sp>
-      <p:sp>
-        <p:nvSpPr>
-          <p:cNvPr id="23" name="TextBox 22"/>
-          <p:cNvSpPr txBox="1"/>
-          <p:nvPr/>
-        </p:nvSpPr>
-        <p:spPr>
-          <a:xfrm>
-            <a:off x="2468880" y="2697480"/>
-            <a:ext cx="457200" cy="274320"/>
-          </a:xfrm>
-          <a:prstGeom prst="rect">
-            <a:avLst/>
-          </a:prstGeom>
-          <a:noFill/>
-        </p:spPr>
-        <p:txBody>
-          <a:bodyPr wrap="square">
-            <a:spAutoFit/>
-          </a:bodyPr>
-          <a:lstStyle/>
-          <a:p>
-            <a:pPr algn="l">
-              <a:defRPr sz="1000" b="0">
+              <a:t>$91K-122K</a:t>
+            </a:r>
+          </a:p>
+        </p:txBody>
+      </p:sp>
+      <p:sp>
+        <p:nvSpPr>
+          <p:cNvPr id="37" name="Rectangle 36"/>
+          <p:cNvSpPr/>
+          <p:nvPr/>
+        </p:nvSpPr>
+        <p:spPr>
+          <a:xfrm>
+            <a:off x="457200" y="2834640"/>
+            <a:ext cx="5486400" cy="274320"/>
+          </a:xfrm>
+          <a:prstGeom prst="rect">
+            <a:avLst/>
+          </a:prstGeom>
+          <a:solidFill>
+            <a:srgbClr val="FFFFFF"/>
+          </a:solidFill>
+          <a:ln>
+            <a:noFill/>
+          </a:ln>
+        </p:spPr>
+        <p:style>
+          <a:lnRef idx="1">
+            <a:schemeClr val="accent1"/>
+          </a:lnRef>
+          <a:fillRef idx="3">
+            <a:schemeClr val="accent1"/>
+          </a:fillRef>
+          <a:effectRef idx="2">
+            <a:schemeClr val="accent1"/>
+          </a:effectRef>
+          <a:fontRef idx="minor">
+            <a:schemeClr val="lt1"/>
+          </a:fontRef>
+        </p:style>
+        <p:txBody>
+          <a:bodyPr rtlCol="0" anchor="ctr"/>
+          <a:lstStyle/>
+          <a:p>
+            <a:pPr algn="ctr"/>
+          </a:p>
+        </p:txBody>
+      </p:sp>
+      <p:sp>
+        <p:nvSpPr>
+          <p:cNvPr id="38" name="TextBox 37"/>
+          <p:cNvSpPr txBox="1"/>
+          <p:nvPr/>
+        </p:nvSpPr>
+        <p:spPr>
+          <a:xfrm>
+            <a:off x="548640" y="2834640"/>
+            <a:ext cx="1828800" cy="256032"/>
+          </a:xfrm>
+          <a:prstGeom prst="rect">
+            <a:avLst/>
+          </a:prstGeom>
+          <a:noFill/>
+        </p:spPr>
+        <p:txBody>
+          <a:bodyPr wrap="square">
+            <a:spAutoFit/>
+          </a:bodyPr>
+          <a:lstStyle/>
+          <a:p>
+            <a:pPr algn="l">
+              <a:defRPr sz="900" b="0">
                 <a:solidFill>
                   <a:srgbClr val="333333"/>
                 </a:solidFill>
               </a:defRPr>
             </a:pPr>
             <a:r>
+              <a:t>Sr Backend Developer</a:t>
+            </a:r>
+          </a:p>
+        </p:txBody>
+      </p:sp>
+      <p:sp>
+        <p:nvSpPr>
+          <p:cNvPr id="39" name="TextBox 38"/>
+          <p:cNvSpPr txBox="1"/>
+          <p:nvPr/>
+        </p:nvSpPr>
+        <p:spPr>
+          <a:xfrm>
+            <a:off x="2423160" y="2834640"/>
+            <a:ext cx="320040" cy="256032"/>
+          </a:xfrm>
+          <a:prstGeom prst="rect">
+            <a:avLst/>
+          </a:prstGeom>
+          <a:noFill/>
+        </p:spPr>
+        <p:txBody>
+          <a:bodyPr wrap="square">
+            <a:spAutoFit/>
+          </a:bodyPr>
+          <a:lstStyle/>
+          <a:p>
+            <a:pPr algn="l">
+              <a:defRPr sz="900" b="0">
+                <a:solidFill>
+                  <a:srgbClr val="333333"/>
+                </a:solidFill>
+              </a:defRPr>
+            </a:pPr>
+            <a:r>
+              <a:t>2</a:t>
+            </a:r>
+          </a:p>
+        </p:txBody>
+      </p:sp>
+      <p:sp>
+        <p:nvSpPr>
+          <p:cNvPr id="40" name="TextBox 39"/>
+          <p:cNvSpPr txBox="1"/>
+          <p:nvPr/>
+        </p:nvSpPr>
+        <p:spPr>
+          <a:xfrm>
+            <a:off x="2788920" y="2834640"/>
+            <a:ext cx="502920" cy="256032"/>
+          </a:xfrm>
+          <a:prstGeom prst="rect">
+            <a:avLst/>
+          </a:prstGeom>
+          <a:noFill/>
+        </p:spPr>
+        <p:txBody>
+          <a:bodyPr wrap="square">
+            <a:spAutoFit/>
+          </a:bodyPr>
+          <a:lstStyle/>
+          <a:p>
+            <a:pPr algn="l">
+              <a:defRPr sz="900" b="0">
+                <a:solidFill>
+                  <a:srgbClr val="1565C0"/>
+                </a:solidFill>
+              </a:defRPr>
+            </a:pPr>
+            <a:r>
+              <a:t>Off</a:t>
+            </a:r>
+          </a:p>
+        </p:txBody>
+      </p:sp>
+      <p:sp>
+        <p:nvSpPr>
+          <p:cNvPr id="41" name="TextBox 40"/>
+          <p:cNvSpPr txBox="1"/>
+          <p:nvPr/>
+        </p:nvSpPr>
+        <p:spPr>
+          <a:xfrm>
+            <a:off x="3337560" y="2834640"/>
+            <a:ext cx="548640" cy="256032"/>
+          </a:xfrm>
+          <a:prstGeom prst="rect">
+            <a:avLst/>
+          </a:prstGeom>
+          <a:noFill/>
+        </p:spPr>
+        <p:txBody>
+          <a:bodyPr wrap="square">
+            <a:spAutoFit/>
+          </a:bodyPr>
+          <a:lstStyle/>
+          <a:p>
+            <a:pPr algn="l">
+              <a:defRPr sz="900" b="0">
+                <a:solidFill>
+                  <a:srgbClr val="333333"/>
+                </a:solidFill>
+              </a:defRPr>
+            </a:pPr>
+            <a:r>
+              <a:t>$130</a:t>
+            </a:r>
+          </a:p>
+        </p:txBody>
+      </p:sp>
+      <p:sp>
+        <p:nvSpPr>
+          <p:cNvPr id="42" name="TextBox 41"/>
+          <p:cNvSpPr txBox="1"/>
+          <p:nvPr/>
+        </p:nvSpPr>
+        <p:spPr>
+          <a:xfrm>
+            <a:off x="3977639" y="2834640"/>
+            <a:ext cx="731520" cy="256032"/>
+          </a:xfrm>
+          <a:prstGeom prst="rect">
+            <a:avLst/>
+          </a:prstGeom>
+          <a:noFill/>
+        </p:spPr>
+        <p:txBody>
+          <a:bodyPr wrap="square">
+            <a:spAutoFit/>
+          </a:bodyPr>
+          <a:lstStyle/>
+          <a:p>
+            <a:pPr algn="l">
+              <a:defRPr sz="900" b="0">
+                <a:solidFill>
+                  <a:srgbClr val="333333"/>
+                </a:solidFill>
+              </a:defRPr>
+            </a:pPr>
+            <a:r>
+              <a:t>5-6 mo</a:t>
+            </a:r>
+          </a:p>
+        </p:txBody>
+      </p:sp>
+      <p:sp>
+        <p:nvSpPr>
+          <p:cNvPr id="43" name="TextBox 42"/>
+          <p:cNvSpPr txBox="1"/>
+          <p:nvPr/>
+        </p:nvSpPr>
+        <p:spPr>
+          <a:xfrm>
+            <a:off x="4754880" y="2834640"/>
+            <a:ext cx="1097280" cy="256032"/>
+          </a:xfrm>
+          <a:prstGeom prst="rect">
+            <a:avLst/>
+          </a:prstGeom>
+          <a:noFill/>
+        </p:spPr>
+        <p:txBody>
+          <a:bodyPr wrap="square">
+            <a:spAutoFit/>
+          </a:bodyPr>
+          <a:lstStyle/>
+          <a:p>
+            <a:pPr algn="l">
+              <a:defRPr sz="900" b="0">
+                <a:solidFill>
+                  <a:srgbClr val="333333"/>
+                </a:solidFill>
+              </a:defRPr>
+            </a:pPr>
+            <a:r>
+              <a:t>$208K-250K</a:t>
+            </a:r>
+          </a:p>
+        </p:txBody>
+      </p:sp>
+      <p:sp>
+        <p:nvSpPr>
+          <p:cNvPr id="44" name="Rectangle 43"/>
+          <p:cNvSpPr/>
+          <p:nvPr/>
+        </p:nvSpPr>
+        <p:spPr>
+          <a:xfrm>
+            <a:off x="457200" y="3108960"/>
+            <a:ext cx="5486400" cy="274320"/>
+          </a:xfrm>
+          <a:prstGeom prst="rect">
+            <a:avLst/>
+          </a:prstGeom>
+          <a:solidFill>
+            <a:srgbClr val="F5F5F5"/>
+          </a:solidFill>
+          <a:ln>
+            <a:noFill/>
+          </a:ln>
+        </p:spPr>
+        <p:style>
+          <a:lnRef idx="1">
+            <a:schemeClr val="accent1"/>
+          </a:lnRef>
+          <a:fillRef idx="3">
+            <a:schemeClr val="accent1"/>
+          </a:fillRef>
+          <a:effectRef idx="2">
+            <a:schemeClr val="accent1"/>
+          </a:effectRef>
+          <a:fontRef idx="minor">
+            <a:schemeClr val="lt1"/>
+          </a:fontRef>
+        </p:style>
+        <p:txBody>
+          <a:bodyPr rtlCol="0" anchor="ctr"/>
+          <a:lstStyle/>
+          <a:p>
+            <a:pPr algn="ctr"/>
+          </a:p>
+        </p:txBody>
+      </p:sp>
+      <p:sp>
+        <p:nvSpPr>
+          <p:cNvPr id="45" name="TextBox 44"/>
+          <p:cNvSpPr txBox="1"/>
+          <p:nvPr/>
+        </p:nvSpPr>
+        <p:spPr>
+          <a:xfrm>
+            <a:off x="548640" y="3108960"/>
+            <a:ext cx="1828800" cy="256032"/>
+          </a:xfrm>
+          <a:prstGeom prst="rect">
+            <a:avLst/>
+          </a:prstGeom>
+          <a:noFill/>
+        </p:spPr>
+        <p:txBody>
+          <a:bodyPr wrap="square">
+            <a:spAutoFit/>
+          </a:bodyPr>
+          <a:lstStyle/>
+          <a:p>
+            <a:pPr algn="l">
+              <a:defRPr sz="900" b="0">
+                <a:solidFill>
+                  <a:srgbClr val="333333"/>
+                </a:solidFill>
+              </a:defRPr>
+            </a:pPr>
+            <a:r>
+              <a:t>Sr Mobile Developer</a:t>
+            </a:r>
+          </a:p>
+        </p:txBody>
+      </p:sp>
+      <p:sp>
+        <p:nvSpPr>
+          <p:cNvPr id="46" name="TextBox 45"/>
+          <p:cNvSpPr txBox="1"/>
+          <p:nvPr/>
+        </p:nvSpPr>
+        <p:spPr>
+          <a:xfrm>
+            <a:off x="2423160" y="3108960"/>
+            <a:ext cx="320040" cy="256032"/>
+          </a:xfrm>
+          <a:prstGeom prst="rect">
+            <a:avLst/>
+          </a:prstGeom>
+          <a:noFill/>
+        </p:spPr>
+        <p:txBody>
+          <a:bodyPr wrap="square">
+            <a:spAutoFit/>
+          </a:bodyPr>
+          <a:lstStyle/>
+          <a:p>
+            <a:pPr algn="l">
+              <a:defRPr sz="900" b="0">
+                <a:solidFill>
+                  <a:srgbClr val="333333"/>
+                </a:solidFill>
+              </a:defRPr>
+            </a:pPr>
+            <a:r>
+              <a:t>2</a:t>
+            </a:r>
+          </a:p>
+        </p:txBody>
+      </p:sp>
+      <p:sp>
+        <p:nvSpPr>
+          <p:cNvPr id="47" name="TextBox 46"/>
+          <p:cNvSpPr txBox="1"/>
+          <p:nvPr/>
+        </p:nvSpPr>
+        <p:spPr>
+          <a:xfrm>
+            <a:off x="2788920" y="3108960"/>
+            <a:ext cx="502920" cy="256032"/>
+          </a:xfrm>
+          <a:prstGeom prst="rect">
+            <a:avLst/>
+          </a:prstGeom>
+          <a:noFill/>
+        </p:spPr>
+        <p:txBody>
+          <a:bodyPr wrap="square">
+            <a:spAutoFit/>
+          </a:bodyPr>
+          <a:lstStyle/>
+          <a:p>
+            <a:pPr algn="l">
+              <a:defRPr sz="900" b="0">
+                <a:solidFill>
+                  <a:srgbClr val="1565C0"/>
+                </a:solidFill>
+              </a:defRPr>
+            </a:pPr>
+            <a:r>
+              <a:t>Off</a:t>
+            </a:r>
+          </a:p>
+        </p:txBody>
+      </p:sp>
+      <p:sp>
+        <p:nvSpPr>
+          <p:cNvPr id="48" name="TextBox 47"/>
+          <p:cNvSpPr txBox="1"/>
+          <p:nvPr/>
+        </p:nvSpPr>
+        <p:spPr>
+          <a:xfrm>
+            <a:off x="3337560" y="3108960"/>
+            <a:ext cx="548640" cy="256032"/>
+          </a:xfrm>
+          <a:prstGeom prst="rect">
+            <a:avLst/>
+          </a:prstGeom>
+          <a:noFill/>
+        </p:spPr>
+        <p:txBody>
+          <a:bodyPr wrap="square">
+            <a:spAutoFit/>
+          </a:bodyPr>
+          <a:lstStyle/>
+          <a:p>
+            <a:pPr algn="l">
+              <a:defRPr sz="900" b="0">
+                <a:solidFill>
+                  <a:srgbClr val="333333"/>
+                </a:solidFill>
+              </a:defRPr>
+            </a:pPr>
+            <a:r>
+              <a:t>$130</a:t>
+            </a:r>
+          </a:p>
+        </p:txBody>
+      </p:sp>
+      <p:sp>
+        <p:nvSpPr>
+          <p:cNvPr id="49" name="TextBox 48"/>
+          <p:cNvSpPr txBox="1"/>
+          <p:nvPr/>
+        </p:nvSpPr>
+        <p:spPr>
+          <a:xfrm>
+            <a:off x="3977639" y="3108960"/>
+            <a:ext cx="731520" cy="256032"/>
+          </a:xfrm>
+          <a:prstGeom prst="rect">
+            <a:avLst/>
+          </a:prstGeom>
+          <a:noFill/>
+        </p:spPr>
+        <p:txBody>
+          <a:bodyPr wrap="square">
+            <a:spAutoFit/>
+          </a:bodyPr>
+          <a:lstStyle/>
+          <a:p>
+            <a:pPr algn="l">
+              <a:defRPr sz="900" b="0">
+                <a:solidFill>
+                  <a:srgbClr val="333333"/>
+                </a:solidFill>
+              </a:defRPr>
+            </a:pPr>
+            <a:r>
+              <a:t>5-6 mo</a:t>
+            </a:r>
+          </a:p>
+        </p:txBody>
+      </p:sp>
+      <p:sp>
+        <p:nvSpPr>
+          <p:cNvPr id="50" name="TextBox 49"/>
+          <p:cNvSpPr txBox="1"/>
+          <p:nvPr/>
+        </p:nvSpPr>
+        <p:spPr>
+          <a:xfrm>
+            <a:off x="4754880" y="3108960"/>
+            <a:ext cx="1097280" cy="256032"/>
+          </a:xfrm>
+          <a:prstGeom prst="rect">
+            <a:avLst/>
+          </a:prstGeom>
+          <a:noFill/>
+        </p:spPr>
+        <p:txBody>
+          <a:bodyPr wrap="square">
+            <a:spAutoFit/>
+          </a:bodyPr>
+          <a:lstStyle/>
+          <a:p>
+            <a:pPr algn="l">
+              <a:defRPr sz="900" b="0">
+                <a:solidFill>
+                  <a:srgbClr val="333333"/>
+                </a:solidFill>
+              </a:defRPr>
+            </a:pPr>
+            <a:r>
+              <a:t>$208K-250K</a:t>
+            </a:r>
+          </a:p>
+        </p:txBody>
+      </p:sp>
+      <p:sp>
+        <p:nvSpPr>
+          <p:cNvPr id="51" name="Rectangle 50"/>
+          <p:cNvSpPr/>
+          <p:nvPr/>
+        </p:nvSpPr>
+        <p:spPr>
+          <a:xfrm>
+            <a:off x="457200" y="3383280"/>
+            <a:ext cx="5486400" cy="274320"/>
+          </a:xfrm>
+          <a:prstGeom prst="rect">
+            <a:avLst/>
+          </a:prstGeom>
+          <a:solidFill>
+            <a:srgbClr val="FFFFFF"/>
+          </a:solidFill>
+          <a:ln>
+            <a:noFill/>
+          </a:ln>
+        </p:spPr>
+        <p:style>
+          <a:lnRef idx="1">
+            <a:schemeClr val="accent1"/>
+          </a:lnRef>
+          <a:fillRef idx="3">
+            <a:schemeClr val="accent1"/>
+          </a:fillRef>
+          <a:effectRef idx="2">
+            <a:schemeClr val="accent1"/>
+          </a:effectRef>
+          <a:fontRef idx="minor">
+            <a:schemeClr val="lt1"/>
+          </a:fontRef>
+        </p:style>
+        <p:txBody>
+          <a:bodyPr rtlCol="0" anchor="ctr"/>
+          <a:lstStyle/>
+          <a:p>
+            <a:pPr algn="ctr"/>
+          </a:p>
+        </p:txBody>
+      </p:sp>
+      <p:sp>
+        <p:nvSpPr>
+          <p:cNvPr id="52" name="TextBox 51"/>
+          <p:cNvSpPr txBox="1"/>
+          <p:nvPr/>
+        </p:nvSpPr>
+        <p:spPr>
+          <a:xfrm>
+            <a:off x="548640" y="3383280"/>
+            <a:ext cx="1828800" cy="256032"/>
+          </a:xfrm>
+          <a:prstGeom prst="rect">
+            <a:avLst/>
+          </a:prstGeom>
+          <a:noFill/>
+        </p:spPr>
+        <p:txBody>
+          <a:bodyPr wrap="square">
+            <a:spAutoFit/>
+          </a:bodyPr>
+          <a:lstStyle/>
+          <a:p>
+            <a:pPr algn="l">
+              <a:defRPr sz="900" b="0">
+                <a:solidFill>
+                  <a:srgbClr val="333333"/>
+                </a:solidFill>
+              </a:defRPr>
+            </a:pPr>
+            <a:r>
+              <a:t>Functional Tester</a:t>
+            </a:r>
+          </a:p>
+        </p:txBody>
+      </p:sp>
+      <p:sp>
+        <p:nvSpPr>
+          <p:cNvPr id="53" name="TextBox 52"/>
+          <p:cNvSpPr txBox="1"/>
+          <p:nvPr/>
+        </p:nvSpPr>
+        <p:spPr>
+          <a:xfrm>
+            <a:off x="2423160" y="3383280"/>
+            <a:ext cx="320040" cy="256032"/>
+          </a:xfrm>
+          <a:prstGeom prst="rect">
+            <a:avLst/>
+          </a:prstGeom>
+          <a:noFill/>
+        </p:spPr>
+        <p:txBody>
+          <a:bodyPr wrap="square">
+            <a:spAutoFit/>
+          </a:bodyPr>
+          <a:lstStyle/>
+          <a:p>
+            <a:pPr algn="l">
+              <a:defRPr sz="900" b="0">
+                <a:solidFill>
+                  <a:srgbClr val="333333"/>
+                </a:solidFill>
+              </a:defRPr>
+            </a:pPr>
+            <a:r>
               <a:t>1</a:t>
             </a:r>
           </a:p>
@@ -5893,784 +6991,660 @@
       </p:sp>
       <p:sp>
         <p:nvSpPr>
-          <p:cNvPr id="24" name="TextBox 23"/>
-          <p:cNvSpPr txBox="1"/>
-          <p:nvPr/>
-        </p:nvSpPr>
-        <p:spPr>
-          <a:xfrm>
-            <a:off x="3017520" y="2697480"/>
-            <a:ext cx="1188720" cy="274320"/>
-          </a:xfrm>
-          <a:prstGeom prst="rect">
-            <a:avLst/>
-          </a:prstGeom>
-          <a:noFill/>
-        </p:spPr>
-        <p:txBody>
-          <a:bodyPr wrap="square">
-            <a:spAutoFit/>
-          </a:bodyPr>
-          <a:lstStyle/>
-          <a:p>
-            <a:pPr algn="l">
-              <a:defRPr sz="1000" b="0">
+          <p:cNvPr id="54" name="TextBox 53"/>
+          <p:cNvSpPr txBox="1"/>
+          <p:nvPr/>
+        </p:nvSpPr>
+        <p:spPr>
+          <a:xfrm>
+            <a:off x="2788920" y="3383280"/>
+            <a:ext cx="502920" cy="256032"/>
+          </a:xfrm>
+          <a:prstGeom prst="rect">
+            <a:avLst/>
+          </a:prstGeom>
+          <a:noFill/>
+        </p:spPr>
+        <p:txBody>
+          <a:bodyPr wrap="square">
+            <a:spAutoFit/>
+          </a:bodyPr>
+          <a:lstStyle/>
+          <a:p>
+            <a:pPr algn="l">
+              <a:defRPr sz="900" b="0">
+                <a:solidFill>
+                  <a:srgbClr val="1565C0"/>
+                </a:solidFill>
+              </a:defRPr>
+            </a:pPr>
+            <a:r>
+              <a:t>Off</a:t>
+            </a:r>
+          </a:p>
+        </p:txBody>
+      </p:sp>
+      <p:sp>
+        <p:nvSpPr>
+          <p:cNvPr id="55" name="TextBox 54"/>
+          <p:cNvSpPr txBox="1"/>
+          <p:nvPr/>
+        </p:nvSpPr>
+        <p:spPr>
+          <a:xfrm>
+            <a:off x="3337560" y="3383280"/>
+            <a:ext cx="548640" cy="256032"/>
+          </a:xfrm>
+          <a:prstGeom prst="rect">
+            <a:avLst/>
+          </a:prstGeom>
+          <a:noFill/>
+        </p:spPr>
+        <p:txBody>
+          <a:bodyPr wrap="square">
+            <a:spAutoFit/>
+          </a:bodyPr>
+          <a:lstStyle/>
+          <a:p>
+            <a:pPr algn="l">
+              <a:defRPr sz="900" b="0">
                 <a:solidFill>
                   <a:srgbClr val="333333"/>
                 </a:solidFill>
               </a:defRPr>
             </a:pPr>
             <a:r>
-              <a:t>3 months</a:t>
-            </a:r>
-          </a:p>
-        </p:txBody>
-      </p:sp>
-      <p:sp>
-        <p:nvSpPr>
-          <p:cNvPr id="25" name="TextBox 24"/>
-          <p:cNvSpPr txBox="1"/>
-          <p:nvPr/>
-        </p:nvSpPr>
-        <p:spPr>
-          <a:xfrm>
-            <a:off x="4389120" y="2697480"/>
-            <a:ext cx="1371600" cy="274320"/>
-          </a:xfrm>
-          <a:prstGeom prst="rect">
-            <a:avLst/>
-          </a:prstGeom>
-          <a:noFill/>
-        </p:spPr>
-        <p:txBody>
-          <a:bodyPr wrap="square">
-            <a:spAutoFit/>
-          </a:bodyPr>
-          <a:lstStyle/>
-          <a:p>
-            <a:pPr algn="l">
-              <a:defRPr sz="1000" b="0">
+              <a:t>$95</a:t>
+            </a:r>
+          </a:p>
+        </p:txBody>
+      </p:sp>
+      <p:sp>
+        <p:nvSpPr>
+          <p:cNvPr id="56" name="TextBox 55"/>
+          <p:cNvSpPr txBox="1"/>
+          <p:nvPr/>
+        </p:nvSpPr>
+        <p:spPr>
+          <a:xfrm>
+            <a:off x="3977639" y="3383280"/>
+            <a:ext cx="731520" cy="256032"/>
+          </a:xfrm>
+          <a:prstGeom prst="rect">
+            <a:avLst/>
+          </a:prstGeom>
+          <a:noFill/>
+        </p:spPr>
+        <p:txBody>
+          <a:bodyPr wrap="square">
+            <a:spAutoFit/>
+          </a:bodyPr>
+          <a:lstStyle/>
+          <a:p>
+            <a:pPr algn="l">
+              <a:defRPr sz="900" b="0">
                 <a:solidFill>
                   <a:srgbClr val="333333"/>
                 </a:solidFill>
               </a:defRPr>
             </a:pPr>
             <a:r>
-              <a:t>$60K-80K</a:t>
-            </a:r>
-          </a:p>
-        </p:txBody>
-      </p:sp>
-      <p:sp>
-        <p:nvSpPr>
-          <p:cNvPr id="26" name="TextBox 25"/>
-          <p:cNvSpPr txBox="1"/>
-          <p:nvPr/>
-        </p:nvSpPr>
-        <p:spPr>
-          <a:xfrm>
-            <a:off x="548640" y="3017520"/>
-            <a:ext cx="1828800" cy="274320"/>
-          </a:xfrm>
-          <a:prstGeom prst="rect">
-            <a:avLst/>
-          </a:prstGeom>
-          <a:noFill/>
-        </p:spPr>
-        <p:txBody>
-          <a:bodyPr wrap="square">
-            <a:spAutoFit/>
-          </a:bodyPr>
-          <a:lstStyle/>
-          <a:p>
-            <a:pPr algn="l">
-              <a:defRPr sz="1000" b="0">
+              <a:t>3-4 mo</a:t>
+            </a:r>
+          </a:p>
+        </p:txBody>
+      </p:sp>
+      <p:sp>
+        <p:nvSpPr>
+          <p:cNvPr id="57" name="TextBox 56"/>
+          <p:cNvSpPr txBox="1"/>
+          <p:nvPr/>
+        </p:nvSpPr>
+        <p:spPr>
+          <a:xfrm>
+            <a:off x="4754880" y="3383280"/>
+            <a:ext cx="1097280" cy="256032"/>
+          </a:xfrm>
+          <a:prstGeom prst="rect">
+            <a:avLst/>
+          </a:prstGeom>
+          <a:noFill/>
+        </p:spPr>
+        <p:txBody>
+          <a:bodyPr wrap="square">
+            <a:spAutoFit/>
+          </a:bodyPr>
+          <a:lstStyle/>
+          <a:p>
+            <a:pPr algn="l">
+              <a:defRPr sz="900" b="0">
                 <a:solidFill>
                   <a:srgbClr val="333333"/>
                 </a:solidFill>
               </a:defRPr>
             </a:pPr>
             <a:r>
-              <a:t>Senior Backend Developer</a:t>
-            </a:r>
-          </a:p>
-        </p:txBody>
-      </p:sp>
-      <p:sp>
-        <p:nvSpPr>
-          <p:cNvPr id="27" name="TextBox 26"/>
-          <p:cNvSpPr txBox="1"/>
-          <p:nvPr/>
-        </p:nvSpPr>
-        <p:spPr>
-          <a:xfrm>
-            <a:off x="2468880" y="3017520"/>
-            <a:ext cx="457200" cy="274320"/>
-          </a:xfrm>
-          <a:prstGeom prst="rect">
-            <a:avLst/>
-          </a:prstGeom>
-          <a:noFill/>
-        </p:spPr>
-        <p:txBody>
-          <a:bodyPr wrap="square">
-            <a:spAutoFit/>
-          </a:bodyPr>
-          <a:lstStyle/>
-          <a:p>
-            <a:pPr algn="l">
-              <a:defRPr sz="1000" b="0">
+              <a:t>$46K-61K</a:t>
+            </a:r>
+          </a:p>
+        </p:txBody>
+      </p:sp>
+      <p:sp>
+        <p:nvSpPr>
+          <p:cNvPr id="58" name="Rectangle 57"/>
+          <p:cNvSpPr/>
+          <p:nvPr/>
+        </p:nvSpPr>
+        <p:spPr>
+          <a:xfrm>
+            <a:off x="457200" y="3657600"/>
+            <a:ext cx="5486400" cy="274320"/>
+          </a:xfrm>
+          <a:prstGeom prst="rect">
+            <a:avLst/>
+          </a:prstGeom>
+          <a:solidFill>
+            <a:srgbClr val="F5F5F5"/>
+          </a:solidFill>
+          <a:ln>
+            <a:noFill/>
+          </a:ln>
+        </p:spPr>
+        <p:style>
+          <a:lnRef idx="1">
+            <a:schemeClr val="accent1"/>
+          </a:lnRef>
+          <a:fillRef idx="3">
+            <a:schemeClr val="accent1"/>
+          </a:fillRef>
+          <a:effectRef idx="2">
+            <a:schemeClr val="accent1"/>
+          </a:effectRef>
+          <a:fontRef idx="minor">
+            <a:schemeClr val="lt1"/>
+          </a:fontRef>
+        </p:style>
+        <p:txBody>
+          <a:bodyPr rtlCol="0" anchor="ctr"/>
+          <a:lstStyle/>
+          <a:p>
+            <a:pPr algn="ctr"/>
+          </a:p>
+        </p:txBody>
+      </p:sp>
+      <p:sp>
+        <p:nvSpPr>
+          <p:cNvPr id="59" name="TextBox 58"/>
+          <p:cNvSpPr txBox="1"/>
+          <p:nvPr/>
+        </p:nvSpPr>
+        <p:spPr>
+          <a:xfrm>
+            <a:off x="548640" y="3657600"/>
+            <a:ext cx="1828800" cy="256032"/>
+          </a:xfrm>
+          <a:prstGeom prst="rect">
+            <a:avLst/>
+          </a:prstGeom>
+          <a:noFill/>
+        </p:spPr>
+        <p:txBody>
+          <a:bodyPr wrap="square">
+            <a:spAutoFit/>
+          </a:bodyPr>
+          <a:lstStyle/>
+          <a:p>
+            <a:pPr algn="l">
+              <a:defRPr sz="900" b="0">
                 <a:solidFill>
                   <a:srgbClr val="333333"/>
                 </a:solidFill>
               </a:defRPr>
             </a:pPr>
             <a:r>
-              <a:t>2</a:t>
-            </a:r>
-          </a:p>
-        </p:txBody>
-      </p:sp>
-      <p:sp>
-        <p:nvSpPr>
-          <p:cNvPr id="28" name="TextBox 27"/>
-          <p:cNvSpPr txBox="1"/>
-          <p:nvPr/>
-        </p:nvSpPr>
-        <p:spPr>
-          <a:xfrm>
-            <a:off x="3017520" y="3017520"/>
-            <a:ext cx="1188720" cy="274320"/>
-          </a:xfrm>
-          <a:prstGeom prst="rect">
-            <a:avLst/>
-          </a:prstGeom>
-          <a:noFill/>
-        </p:spPr>
-        <p:txBody>
-          <a:bodyPr wrap="square">
-            <a:spAutoFit/>
-          </a:bodyPr>
-          <a:lstStyle/>
-          <a:p>
-            <a:pPr algn="l">
-              <a:defRPr sz="1000" b="0">
+              <a:t>Automation Tester</a:t>
+            </a:r>
+          </a:p>
+        </p:txBody>
+      </p:sp>
+      <p:sp>
+        <p:nvSpPr>
+          <p:cNvPr id="60" name="TextBox 59"/>
+          <p:cNvSpPr txBox="1"/>
+          <p:nvPr/>
+        </p:nvSpPr>
+        <p:spPr>
+          <a:xfrm>
+            <a:off x="2423160" y="3657600"/>
+            <a:ext cx="320040" cy="256032"/>
+          </a:xfrm>
+          <a:prstGeom prst="rect">
+            <a:avLst/>
+          </a:prstGeom>
+          <a:noFill/>
+        </p:spPr>
+        <p:txBody>
+          <a:bodyPr wrap="square">
+            <a:spAutoFit/>
+          </a:bodyPr>
+          <a:lstStyle/>
+          <a:p>
+            <a:pPr algn="l">
+              <a:defRPr sz="900" b="0">
                 <a:solidFill>
                   <a:srgbClr val="333333"/>
                 </a:solidFill>
               </a:defRPr>
             </a:pPr>
             <a:r>
-              <a:t>5-6 months</a:t>
-            </a:r>
-          </a:p>
-        </p:txBody>
-      </p:sp>
-      <p:sp>
-        <p:nvSpPr>
-          <p:cNvPr id="29" name="TextBox 28"/>
-          <p:cNvSpPr txBox="1"/>
-          <p:nvPr/>
-        </p:nvSpPr>
-        <p:spPr>
-          <a:xfrm>
-            <a:off x="4389120" y="3017520"/>
-            <a:ext cx="1371600" cy="274320"/>
-          </a:xfrm>
-          <a:prstGeom prst="rect">
-            <a:avLst/>
-          </a:prstGeom>
-          <a:noFill/>
-        </p:spPr>
-        <p:txBody>
-          <a:bodyPr wrap="square">
-            <a:spAutoFit/>
-          </a:bodyPr>
-          <a:lstStyle/>
-          <a:p>
-            <a:pPr algn="l">
-              <a:defRPr sz="1000" b="0">
+              <a:t>1</a:t>
+            </a:r>
+          </a:p>
+        </p:txBody>
+      </p:sp>
+      <p:sp>
+        <p:nvSpPr>
+          <p:cNvPr id="61" name="TextBox 60"/>
+          <p:cNvSpPr txBox="1"/>
+          <p:nvPr/>
+        </p:nvSpPr>
+        <p:spPr>
+          <a:xfrm>
+            <a:off x="2788920" y="3657600"/>
+            <a:ext cx="502920" cy="256032"/>
+          </a:xfrm>
+          <a:prstGeom prst="rect">
+            <a:avLst/>
+          </a:prstGeom>
+          <a:noFill/>
+        </p:spPr>
+        <p:txBody>
+          <a:bodyPr wrap="square">
+            <a:spAutoFit/>
+          </a:bodyPr>
+          <a:lstStyle/>
+          <a:p>
+            <a:pPr algn="l">
+              <a:defRPr sz="900" b="0">
+                <a:solidFill>
+                  <a:srgbClr val="1565C0"/>
+                </a:solidFill>
+              </a:defRPr>
+            </a:pPr>
+            <a:r>
+              <a:t>Off</a:t>
+            </a:r>
+          </a:p>
+        </p:txBody>
+      </p:sp>
+      <p:sp>
+        <p:nvSpPr>
+          <p:cNvPr id="62" name="TextBox 61"/>
+          <p:cNvSpPr txBox="1"/>
+          <p:nvPr/>
+        </p:nvSpPr>
+        <p:spPr>
+          <a:xfrm>
+            <a:off x="3337560" y="3657600"/>
+            <a:ext cx="548640" cy="256032"/>
+          </a:xfrm>
+          <a:prstGeom prst="rect">
+            <a:avLst/>
+          </a:prstGeom>
+          <a:noFill/>
+        </p:spPr>
+        <p:txBody>
+          <a:bodyPr wrap="square">
+            <a:spAutoFit/>
+          </a:bodyPr>
+          <a:lstStyle/>
+          <a:p>
+            <a:pPr algn="l">
+              <a:defRPr sz="900" b="0">
                 <a:solidFill>
                   <a:srgbClr val="333333"/>
                 </a:solidFill>
               </a:defRPr>
             </a:pPr>
             <a:r>
-              <a:t>$300K-400K</a:t>
-            </a:r>
-          </a:p>
-        </p:txBody>
-      </p:sp>
-      <p:sp>
-        <p:nvSpPr>
-          <p:cNvPr id="30" name="TextBox 29"/>
-          <p:cNvSpPr txBox="1"/>
-          <p:nvPr/>
-        </p:nvSpPr>
-        <p:spPr>
-          <a:xfrm>
-            <a:off x="548640" y="3337560"/>
-            <a:ext cx="1828800" cy="274320"/>
-          </a:xfrm>
-          <a:prstGeom prst="rect">
-            <a:avLst/>
-          </a:prstGeom>
-          <a:noFill/>
-        </p:spPr>
-        <p:txBody>
-          <a:bodyPr wrap="square">
-            <a:spAutoFit/>
-          </a:bodyPr>
-          <a:lstStyle/>
-          <a:p>
-            <a:pPr algn="l">
-              <a:defRPr sz="1000" b="0">
+              <a:t>$110</a:t>
+            </a:r>
+          </a:p>
+        </p:txBody>
+      </p:sp>
+      <p:sp>
+        <p:nvSpPr>
+          <p:cNvPr id="63" name="TextBox 62"/>
+          <p:cNvSpPr txBox="1"/>
+          <p:nvPr/>
+        </p:nvSpPr>
+        <p:spPr>
+          <a:xfrm>
+            <a:off x="3977639" y="3657600"/>
+            <a:ext cx="731520" cy="256032"/>
+          </a:xfrm>
+          <a:prstGeom prst="rect">
+            <a:avLst/>
+          </a:prstGeom>
+          <a:noFill/>
+        </p:spPr>
+        <p:txBody>
+          <a:bodyPr wrap="square">
+            <a:spAutoFit/>
+          </a:bodyPr>
+          <a:lstStyle/>
+          <a:p>
+            <a:pPr algn="l">
+              <a:defRPr sz="900" b="0">
                 <a:solidFill>
                   <a:srgbClr val="333333"/>
                 </a:solidFill>
               </a:defRPr>
             </a:pPr>
             <a:r>
-              <a:t>Senior Mobile Developer</a:t>
-            </a:r>
-          </a:p>
-        </p:txBody>
-      </p:sp>
-      <p:sp>
-        <p:nvSpPr>
-          <p:cNvPr id="31" name="TextBox 30"/>
-          <p:cNvSpPr txBox="1"/>
-          <p:nvPr/>
-        </p:nvSpPr>
-        <p:spPr>
-          <a:xfrm>
-            <a:off x="2468880" y="3337560"/>
-            <a:ext cx="457200" cy="274320"/>
-          </a:xfrm>
-          <a:prstGeom prst="rect">
-            <a:avLst/>
-          </a:prstGeom>
-          <a:noFill/>
-        </p:spPr>
-        <p:txBody>
-          <a:bodyPr wrap="square">
-            <a:spAutoFit/>
-          </a:bodyPr>
-          <a:lstStyle/>
-          <a:p>
-            <a:pPr algn="l">
-              <a:defRPr sz="1000" b="0">
+              <a:t>3-4 mo</a:t>
+            </a:r>
+          </a:p>
+        </p:txBody>
+      </p:sp>
+      <p:sp>
+        <p:nvSpPr>
+          <p:cNvPr id="64" name="TextBox 63"/>
+          <p:cNvSpPr txBox="1"/>
+          <p:nvPr/>
+        </p:nvSpPr>
+        <p:spPr>
+          <a:xfrm>
+            <a:off x="4754880" y="3657600"/>
+            <a:ext cx="1097280" cy="256032"/>
+          </a:xfrm>
+          <a:prstGeom prst="rect">
+            <a:avLst/>
+          </a:prstGeom>
+          <a:noFill/>
+        </p:spPr>
+        <p:txBody>
+          <a:bodyPr wrap="square">
+            <a:spAutoFit/>
+          </a:bodyPr>
+          <a:lstStyle/>
+          <a:p>
+            <a:pPr algn="l">
+              <a:defRPr sz="900" b="0">
                 <a:solidFill>
                   <a:srgbClr val="333333"/>
                 </a:solidFill>
               </a:defRPr>
             </a:pPr>
             <a:r>
-              <a:t>2</a:t>
-            </a:r>
-          </a:p>
-        </p:txBody>
-      </p:sp>
-      <p:sp>
-        <p:nvSpPr>
-          <p:cNvPr id="32" name="TextBox 31"/>
-          <p:cNvSpPr txBox="1"/>
-          <p:nvPr/>
-        </p:nvSpPr>
-        <p:spPr>
-          <a:xfrm>
-            <a:off x="3017520" y="3337560"/>
-            <a:ext cx="1188720" cy="274320"/>
-          </a:xfrm>
-          <a:prstGeom prst="rect">
-            <a:avLst/>
-          </a:prstGeom>
-          <a:noFill/>
-        </p:spPr>
-        <p:txBody>
-          <a:bodyPr wrap="square">
-            <a:spAutoFit/>
-          </a:bodyPr>
-          <a:lstStyle/>
-          <a:p>
-            <a:pPr algn="l">
-              <a:defRPr sz="1000" b="0">
+              <a:t>$53K-70K</a:t>
+            </a:r>
+          </a:p>
+        </p:txBody>
+      </p:sp>
+      <p:sp>
+        <p:nvSpPr>
+          <p:cNvPr id="65" name="Rectangle 64"/>
+          <p:cNvSpPr/>
+          <p:nvPr/>
+        </p:nvSpPr>
+        <p:spPr>
+          <a:xfrm>
+            <a:off x="457200" y="3931920"/>
+            <a:ext cx="5486400" cy="274320"/>
+          </a:xfrm>
+          <a:prstGeom prst="rect">
+            <a:avLst/>
+          </a:prstGeom>
+          <a:solidFill>
+            <a:srgbClr val="FFFFFF"/>
+          </a:solidFill>
+          <a:ln>
+            <a:noFill/>
+          </a:ln>
+        </p:spPr>
+        <p:style>
+          <a:lnRef idx="1">
+            <a:schemeClr val="accent1"/>
+          </a:lnRef>
+          <a:fillRef idx="3">
+            <a:schemeClr val="accent1"/>
+          </a:fillRef>
+          <a:effectRef idx="2">
+            <a:schemeClr val="accent1"/>
+          </a:effectRef>
+          <a:fontRef idx="minor">
+            <a:schemeClr val="lt1"/>
+          </a:fontRef>
+        </p:style>
+        <p:txBody>
+          <a:bodyPr rtlCol="0" anchor="ctr"/>
+          <a:lstStyle/>
+          <a:p>
+            <a:pPr algn="ctr"/>
+          </a:p>
+        </p:txBody>
+      </p:sp>
+      <p:sp>
+        <p:nvSpPr>
+          <p:cNvPr id="66" name="TextBox 65"/>
+          <p:cNvSpPr txBox="1"/>
+          <p:nvPr/>
+        </p:nvSpPr>
+        <p:spPr>
+          <a:xfrm>
+            <a:off x="548640" y="3931920"/>
+            <a:ext cx="1828800" cy="256032"/>
+          </a:xfrm>
+          <a:prstGeom prst="rect">
+            <a:avLst/>
+          </a:prstGeom>
+          <a:noFill/>
+        </p:spPr>
+        <p:txBody>
+          <a:bodyPr wrap="square">
+            <a:spAutoFit/>
+          </a:bodyPr>
+          <a:lstStyle/>
+          <a:p>
+            <a:pPr algn="l">
+              <a:defRPr sz="900" b="0">
                 <a:solidFill>
                   <a:srgbClr val="333333"/>
                 </a:solidFill>
               </a:defRPr>
             </a:pPr>
             <a:r>
-              <a:t>5-6 months</a:t>
-            </a:r>
-          </a:p>
-        </p:txBody>
-      </p:sp>
-      <p:sp>
-        <p:nvSpPr>
-          <p:cNvPr id="33" name="TextBox 32"/>
-          <p:cNvSpPr txBox="1"/>
-          <p:nvPr/>
-        </p:nvSpPr>
-        <p:spPr>
-          <a:xfrm>
-            <a:off x="4389120" y="3337560"/>
-            <a:ext cx="1371600" cy="274320"/>
-          </a:xfrm>
-          <a:prstGeom prst="rect">
-            <a:avLst/>
-          </a:prstGeom>
-          <a:noFill/>
-        </p:spPr>
-        <p:txBody>
-          <a:bodyPr wrap="square">
-            <a:spAutoFit/>
-          </a:bodyPr>
-          <a:lstStyle/>
-          <a:p>
-            <a:pPr algn="l">
-              <a:defRPr sz="1000" b="0">
+              <a:t>DevOps / SRE</a:t>
+            </a:r>
+          </a:p>
+        </p:txBody>
+      </p:sp>
+      <p:sp>
+        <p:nvSpPr>
+          <p:cNvPr id="67" name="TextBox 66"/>
+          <p:cNvSpPr txBox="1"/>
+          <p:nvPr/>
+        </p:nvSpPr>
+        <p:spPr>
+          <a:xfrm>
+            <a:off x="2423160" y="3931920"/>
+            <a:ext cx="320040" cy="256032"/>
+          </a:xfrm>
+          <a:prstGeom prst="rect">
+            <a:avLst/>
+          </a:prstGeom>
+          <a:noFill/>
+        </p:spPr>
+        <p:txBody>
+          <a:bodyPr wrap="square">
+            <a:spAutoFit/>
+          </a:bodyPr>
+          <a:lstStyle/>
+          <a:p>
+            <a:pPr algn="l">
+              <a:defRPr sz="900" b="0">
                 <a:solidFill>
                   <a:srgbClr val="333333"/>
                 </a:solidFill>
               </a:defRPr>
             </a:pPr>
             <a:r>
-              <a:t>$280K-380K</a:t>
-            </a:r>
-          </a:p>
-        </p:txBody>
-      </p:sp>
-      <p:sp>
-        <p:nvSpPr>
-          <p:cNvPr id="34" name="TextBox 33"/>
-          <p:cNvSpPr txBox="1"/>
-          <p:nvPr/>
-        </p:nvSpPr>
-        <p:spPr>
-          <a:xfrm>
-            <a:off x="548640" y="3657600"/>
-            <a:ext cx="1828800" cy="274320"/>
-          </a:xfrm>
-          <a:prstGeom prst="rect">
-            <a:avLst/>
-          </a:prstGeom>
-          <a:noFill/>
-        </p:spPr>
-        <p:txBody>
-          <a:bodyPr wrap="square">
-            <a:spAutoFit/>
-          </a:bodyPr>
-          <a:lstStyle/>
-          <a:p>
-            <a:pPr algn="l">
-              <a:defRPr sz="1000" b="0">
+              <a:t>1</a:t>
+            </a:r>
+          </a:p>
+        </p:txBody>
+      </p:sp>
+      <p:sp>
+        <p:nvSpPr>
+          <p:cNvPr id="68" name="TextBox 67"/>
+          <p:cNvSpPr txBox="1"/>
+          <p:nvPr/>
+        </p:nvSpPr>
+        <p:spPr>
+          <a:xfrm>
+            <a:off x="2788920" y="3931920"/>
+            <a:ext cx="502920" cy="256032"/>
+          </a:xfrm>
+          <a:prstGeom prst="rect">
+            <a:avLst/>
+          </a:prstGeom>
+          <a:noFill/>
+        </p:spPr>
+        <p:txBody>
+          <a:bodyPr wrap="square">
+            <a:spAutoFit/>
+          </a:bodyPr>
+          <a:lstStyle/>
+          <a:p>
+            <a:pPr algn="l">
+              <a:defRPr sz="900" b="0">
+                <a:solidFill>
+                  <a:srgbClr val="1565C0"/>
+                </a:solidFill>
+              </a:defRPr>
+            </a:pPr>
+            <a:r>
+              <a:t>Off</a:t>
+            </a:r>
+          </a:p>
+        </p:txBody>
+      </p:sp>
+      <p:sp>
+        <p:nvSpPr>
+          <p:cNvPr id="69" name="TextBox 68"/>
+          <p:cNvSpPr txBox="1"/>
+          <p:nvPr/>
+        </p:nvSpPr>
+        <p:spPr>
+          <a:xfrm>
+            <a:off x="3337560" y="3931920"/>
+            <a:ext cx="548640" cy="256032"/>
+          </a:xfrm>
+          <a:prstGeom prst="rect">
+            <a:avLst/>
+          </a:prstGeom>
+          <a:noFill/>
+        </p:spPr>
+        <p:txBody>
+          <a:bodyPr wrap="square">
+            <a:spAutoFit/>
+          </a:bodyPr>
+          <a:lstStyle/>
+          <a:p>
+            <a:pPr algn="l">
+              <a:defRPr sz="900" b="0">
                 <a:solidFill>
                   <a:srgbClr val="333333"/>
                 </a:solidFill>
               </a:defRPr>
             </a:pPr>
             <a:r>
-              <a:t>QA Engineer</a:t>
-            </a:r>
-          </a:p>
-        </p:txBody>
-      </p:sp>
-      <p:sp>
-        <p:nvSpPr>
-          <p:cNvPr id="35" name="TextBox 34"/>
-          <p:cNvSpPr txBox="1"/>
-          <p:nvPr/>
-        </p:nvSpPr>
-        <p:spPr>
-          <a:xfrm>
-            <a:off x="2468880" y="3657600"/>
-            <a:ext cx="457200" cy="274320"/>
-          </a:xfrm>
-          <a:prstGeom prst="rect">
-            <a:avLst/>
-          </a:prstGeom>
-          <a:noFill/>
-        </p:spPr>
-        <p:txBody>
-          <a:bodyPr wrap="square">
-            <a:spAutoFit/>
-          </a:bodyPr>
-          <a:lstStyle/>
-          <a:p>
-            <a:pPr algn="l">
-              <a:defRPr sz="1000" b="0">
+              <a:t>$140</a:t>
+            </a:r>
+          </a:p>
+        </p:txBody>
+      </p:sp>
+      <p:sp>
+        <p:nvSpPr>
+          <p:cNvPr id="70" name="TextBox 69"/>
+          <p:cNvSpPr txBox="1"/>
+          <p:nvPr/>
+        </p:nvSpPr>
+        <p:spPr>
+          <a:xfrm>
+            <a:off x="3977639" y="3931920"/>
+            <a:ext cx="731520" cy="256032"/>
+          </a:xfrm>
+          <a:prstGeom prst="rect">
+            <a:avLst/>
+          </a:prstGeom>
+          <a:noFill/>
+        </p:spPr>
+        <p:txBody>
+          <a:bodyPr wrap="square">
+            <a:spAutoFit/>
+          </a:bodyPr>
+          <a:lstStyle/>
+          <a:p>
+            <a:pPr algn="l">
+              <a:defRPr sz="900" b="0">
                 <a:solidFill>
                   <a:srgbClr val="333333"/>
                 </a:solidFill>
               </a:defRPr>
             </a:pPr>
             <a:r>
-              <a:t>2</a:t>
-            </a:r>
-          </a:p>
-        </p:txBody>
-      </p:sp>
-      <p:sp>
-        <p:nvSpPr>
-          <p:cNvPr id="36" name="TextBox 35"/>
-          <p:cNvSpPr txBox="1"/>
-          <p:nvPr/>
-        </p:nvSpPr>
-        <p:spPr>
-          <a:xfrm>
-            <a:off x="3017520" y="3657600"/>
-            <a:ext cx="1188720" cy="274320"/>
-          </a:xfrm>
-          <a:prstGeom prst="rect">
-            <a:avLst/>
-          </a:prstGeom>
-          <a:noFill/>
-        </p:spPr>
-        <p:txBody>
-          <a:bodyPr wrap="square">
-            <a:spAutoFit/>
-          </a:bodyPr>
-          <a:lstStyle/>
-          <a:p>
-            <a:pPr algn="l">
-              <a:defRPr sz="1000" b="0">
+              <a:t>2.5-3 mo</a:t>
+            </a:r>
+          </a:p>
+        </p:txBody>
+      </p:sp>
+      <p:sp>
+        <p:nvSpPr>
+          <p:cNvPr id="71" name="TextBox 70"/>
+          <p:cNvSpPr txBox="1"/>
+          <p:nvPr/>
+        </p:nvSpPr>
+        <p:spPr>
+          <a:xfrm>
+            <a:off x="4754880" y="3931920"/>
+            <a:ext cx="1097280" cy="256032"/>
+          </a:xfrm>
+          <a:prstGeom prst="rect">
+            <a:avLst/>
+          </a:prstGeom>
+          <a:noFill/>
+        </p:spPr>
+        <p:txBody>
+          <a:bodyPr wrap="square">
+            <a:spAutoFit/>
+          </a:bodyPr>
+          <a:lstStyle/>
+          <a:p>
+            <a:pPr algn="l">
+              <a:defRPr sz="900" b="0">
                 <a:solidFill>
                   <a:srgbClr val="333333"/>
                 </a:solidFill>
               </a:defRPr>
             </a:pPr>
             <a:r>
-              <a:t>4 months</a:t>
-            </a:r>
-          </a:p>
-        </p:txBody>
-      </p:sp>
-      <p:sp>
-        <p:nvSpPr>
-          <p:cNvPr id="37" name="TextBox 36"/>
-          <p:cNvSpPr txBox="1"/>
-          <p:nvPr/>
-        </p:nvSpPr>
-        <p:spPr>
-          <a:xfrm>
-            <a:off x="4389120" y="3657600"/>
-            <a:ext cx="1371600" cy="274320"/>
-          </a:xfrm>
-          <a:prstGeom prst="rect">
-            <a:avLst/>
-          </a:prstGeom>
-          <a:noFill/>
-        </p:spPr>
-        <p:txBody>
-          <a:bodyPr wrap="square">
-            <a:spAutoFit/>
-          </a:bodyPr>
-          <a:lstStyle/>
-          <a:p>
-            <a:pPr algn="l">
-              <a:defRPr sz="1000" b="0">
-                <a:solidFill>
-                  <a:srgbClr val="333333"/>
-                </a:solidFill>
-              </a:defRPr>
-            </a:pPr>
-            <a:r>
-              <a:t>$160K-200K</a:t>
-            </a:r>
-          </a:p>
-        </p:txBody>
-      </p:sp>
-      <p:sp>
-        <p:nvSpPr>
-          <p:cNvPr id="38" name="TextBox 37"/>
-          <p:cNvSpPr txBox="1"/>
-          <p:nvPr/>
-        </p:nvSpPr>
-        <p:spPr>
-          <a:xfrm>
-            <a:off x="548640" y="3977639"/>
-            <a:ext cx="1828800" cy="274320"/>
-          </a:xfrm>
-          <a:prstGeom prst="rect">
-            <a:avLst/>
-          </a:prstGeom>
-          <a:noFill/>
-        </p:spPr>
-        <p:txBody>
-          <a:bodyPr wrap="square">
-            <a:spAutoFit/>
-          </a:bodyPr>
-          <a:lstStyle/>
-          <a:p>
-            <a:pPr algn="l">
-              <a:defRPr sz="1000" b="0">
-                <a:solidFill>
-                  <a:srgbClr val="333333"/>
-                </a:solidFill>
-              </a:defRPr>
-            </a:pPr>
-            <a:r>
-              <a:t>DevOps Engineer</a:t>
-            </a:r>
-          </a:p>
-        </p:txBody>
-      </p:sp>
-      <p:sp>
-        <p:nvSpPr>
-          <p:cNvPr id="39" name="TextBox 38"/>
-          <p:cNvSpPr txBox="1"/>
-          <p:nvPr/>
-        </p:nvSpPr>
-        <p:spPr>
-          <a:xfrm>
-            <a:off x="2468880" y="3977639"/>
-            <a:ext cx="457200" cy="274320"/>
-          </a:xfrm>
-          <a:prstGeom prst="rect">
-            <a:avLst/>
-          </a:prstGeom>
-          <a:noFill/>
-        </p:spPr>
-        <p:txBody>
-          <a:bodyPr wrap="square">
-            <a:spAutoFit/>
-          </a:bodyPr>
-          <a:lstStyle/>
-          <a:p>
-            <a:pPr algn="l">
-              <a:defRPr sz="1000" b="0">
-                <a:solidFill>
-                  <a:srgbClr val="333333"/>
-                </a:solidFill>
-              </a:defRPr>
-            </a:pPr>
-            <a:r>
-              <a:t>1</a:t>
-            </a:r>
-          </a:p>
-        </p:txBody>
-      </p:sp>
-      <p:sp>
-        <p:nvSpPr>
-          <p:cNvPr id="40" name="TextBox 39"/>
-          <p:cNvSpPr txBox="1"/>
-          <p:nvPr/>
-        </p:nvSpPr>
-        <p:spPr>
-          <a:xfrm>
-            <a:off x="3017520" y="3977639"/>
-            <a:ext cx="1188720" cy="274320"/>
-          </a:xfrm>
-          <a:prstGeom prst="rect">
-            <a:avLst/>
-          </a:prstGeom>
-          <a:noFill/>
-        </p:spPr>
-        <p:txBody>
-          <a:bodyPr wrap="square">
-            <a:spAutoFit/>
-          </a:bodyPr>
-          <a:lstStyle/>
-          <a:p>
-            <a:pPr algn="l">
-              <a:defRPr sz="1000" b="0">
-                <a:solidFill>
-                  <a:srgbClr val="333333"/>
-                </a:solidFill>
-              </a:defRPr>
-            </a:pPr>
-            <a:r>
-              <a:t>3 months</a:t>
-            </a:r>
-          </a:p>
-        </p:txBody>
-      </p:sp>
-      <p:sp>
-        <p:nvSpPr>
-          <p:cNvPr id="41" name="TextBox 40"/>
-          <p:cNvSpPr txBox="1"/>
-          <p:nvPr/>
-        </p:nvSpPr>
-        <p:spPr>
-          <a:xfrm>
-            <a:off x="4389120" y="3977639"/>
-            <a:ext cx="1371600" cy="274320"/>
-          </a:xfrm>
-          <a:prstGeom prst="rect">
-            <a:avLst/>
-          </a:prstGeom>
-          <a:noFill/>
-        </p:spPr>
-        <p:txBody>
-          <a:bodyPr wrap="square">
-            <a:spAutoFit/>
-          </a:bodyPr>
-          <a:lstStyle/>
-          <a:p>
-            <a:pPr algn="l">
-              <a:defRPr sz="1000" b="0">
-                <a:solidFill>
-                  <a:srgbClr val="333333"/>
-                </a:solidFill>
-              </a:defRPr>
-            </a:pPr>
-            <a:r>
-              <a:t>$80K-110K</a:t>
-            </a:r>
-          </a:p>
-        </p:txBody>
-      </p:sp>
-      <p:sp>
-        <p:nvSpPr>
-          <p:cNvPr id="42" name="TextBox 41"/>
-          <p:cNvSpPr txBox="1"/>
-          <p:nvPr/>
-        </p:nvSpPr>
-        <p:spPr>
-          <a:xfrm>
-            <a:off x="548640" y="4297679"/>
-            <a:ext cx="1828800" cy="274320"/>
-          </a:xfrm>
-          <a:prstGeom prst="rect">
-            <a:avLst/>
-          </a:prstGeom>
-          <a:noFill/>
-        </p:spPr>
-        <p:txBody>
-          <a:bodyPr wrap="square">
-            <a:spAutoFit/>
-          </a:bodyPr>
-          <a:lstStyle/>
-          <a:p>
-            <a:pPr algn="l">
-              <a:defRPr sz="1000" b="0">
-                <a:solidFill>
-                  <a:srgbClr val="333333"/>
-                </a:solidFill>
-              </a:defRPr>
-            </a:pPr>
-            <a:r>
-              <a:t>Business Analyst</a:t>
-            </a:r>
-          </a:p>
-        </p:txBody>
-      </p:sp>
-      <p:sp>
-        <p:nvSpPr>
-          <p:cNvPr id="43" name="TextBox 42"/>
-          <p:cNvSpPr txBox="1"/>
-          <p:nvPr/>
-        </p:nvSpPr>
-        <p:spPr>
-          <a:xfrm>
-            <a:off x="2468880" y="4297679"/>
-            <a:ext cx="457200" cy="274320"/>
-          </a:xfrm>
-          <a:prstGeom prst="rect">
-            <a:avLst/>
-          </a:prstGeom>
-          <a:noFill/>
-        </p:spPr>
-        <p:txBody>
-          <a:bodyPr wrap="square">
-            <a:spAutoFit/>
-          </a:bodyPr>
-          <a:lstStyle/>
-          <a:p>
-            <a:pPr algn="l">
-              <a:defRPr sz="1000" b="0">
-                <a:solidFill>
-                  <a:srgbClr val="333333"/>
-                </a:solidFill>
-              </a:defRPr>
-            </a:pPr>
-            <a:r>
-              <a:t>1</a:t>
-            </a:r>
-          </a:p>
-        </p:txBody>
-      </p:sp>
-      <p:sp>
-        <p:nvSpPr>
-          <p:cNvPr id="44" name="TextBox 43"/>
-          <p:cNvSpPr txBox="1"/>
-          <p:nvPr/>
-        </p:nvSpPr>
-        <p:spPr>
-          <a:xfrm>
-            <a:off x="3017520" y="4297679"/>
-            <a:ext cx="1188720" cy="274320"/>
-          </a:xfrm>
-          <a:prstGeom prst="rect">
-            <a:avLst/>
-          </a:prstGeom>
-          <a:noFill/>
-        </p:spPr>
-        <p:txBody>
-          <a:bodyPr wrap="square">
-            <a:spAutoFit/>
-          </a:bodyPr>
-          <a:lstStyle/>
-          <a:p>
-            <a:pPr algn="l">
-              <a:defRPr sz="1000" b="0">
-                <a:solidFill>
-                  <a:srgbClr val="333333"/>
-                </a:solidFill>
-              </a:defRPr>
-            </a:pPr>
-            <a:r>
-              <a:t>2 months</a:t>
-            </a:r>
-          </a:p>
-        </p:txBody>
-      </p:sp>
-      <p:sp>
-        <p:nvSpPr>
-          <p:cNvPr id="45" name="TextBox 44"/>
-          <p:cNvSpPr txBox="1"/>
-          <p:nvPr/>
-        </p:nvSpPr>
-        <p:spPr>
-          <a:xfrm>
-            <a:off x="4389120" y="4297679"/>
-            <a:ext cx="1371600" cy="274320"/>
-          </a:xfrm>
-          <a:prstGeom prst="rect">
-            <a:avLst/>
-          </a:prstGeom>
-          <a:noFill/>
-        </p:spPr>
-        <p:txBody>
-          <a:bodyPr wrap="square">
-            <a:spAutoFit/>
-          </a:bodyPr>
-          <a:lstStyle/>
-          <a:p>
-            <a:pPr algn="l">
-              <a:defRPr sz="1000" b="0">
-                <a:solidFill>
-                  <a:srgbClr val="333333"/>
-                </a:solidFill>
-              </a:defRPr>
-            </a:pPr>
-            <a:r>
-              <a:t>$40K-55K</a:t>
-            </a:r>
-          </a:p>
-        </p:txBody>
-      </p:sp>
-      <p:sp>
-        <p:nvSpPr>
-          <p:cNvPr id="46" name="Rectangle 45"/>
+              <a:t>$56K-67K</a:t>
+            </a:r>
+          </a:p>
+        </p:txBody>
+      </p:sp>
+      <p:sp>
+        <p:nvSpPr>
+          <p:cNvPr id="72" name="Rectangle 71"/>
           <p:cNvSpPr/>
           <p:nvPr/>
         </p:nvSpPr>
         <p:spPr>
           <a:xfrm>
-            <a:off x="457200" y="4663440"/>
-            <a:ext cx="5486400" cy="411480"/>
+            <a:off x="457200" y="4251960"/>
+            <a:ext cx="5486400" cy="365760"/>
           </a:xfrm>
           <a:prstGeom prst="rect">
             <a:avLst/>
@@ -6706,63 +7680,98 @@
       </p:sp>
       <p:sp>
         <p:nvSpPr>
-          <p:cNvPr id="47" name="TextBox 46"/>
-          <p:cNvSpPr txBox="1"/>
-          <p:nvPr/>
-        </p:nvSpPr>
-        <p:spPr>
-          <a:xfrm>
-            <a:off x="548640" y="4681728"/>
-            <a:ext cx="1828800" cy="365760"/>
-          </a:xfrm>
-          <a:prstGeom prst="rect">
-            <a:avLst/>
-          </a:prstGeom>
-          <a:noFill/>
-        </p:spPr>
-        <p:txBody>
-          <a:bodyPr wrap="square">
-            <a:spAutoFit/>
-          </a:bodyPr>
-          <a:lstStyle/>
-          <a:p>
-            <a:pPr algn="l">
-              <a:defRPr sz="1200" b="1">
+          <p:cNvPr id="73" name="TextBox 72"/>
+          <p:cNvSpPr txBox="1"/>
+          <p:nvPr/>
+        </p:nvSpPr>
+        <p:spPr>
+          <a:xfrm>
+            <a:off x="548640" y="4270248"/>
+            <a:ext cx="1645920" cy="320040"/>
+          </a:xfrm>
+          <a:prstGeom prst="rect">
+            <a:avLst/>
+          </a:prstGeom>
+          <a:noFill/>
+        </p:spPr>
+        <p:txBody>
+          <a:bodyPr wrap="square">
+            <a:spAutoFit/>
+          </a:bodyPr>
+          <a:lstStyle/>
+          <a:p>
+            <a:pPr algn="l">
+              <a:defRPr sz="1100" b="1">
                 <a:solidFill>
                   <a:srgbClr val="FFFFFF"/>
                 </a:solidFill>
               </a:defRPr>
             </a:pPr>
             <a:r>
-              <a:t>Total: 11 FTEs</a:t>
-            </a:r>
-          </a:p>
-        </p:txBody>
-      </p:sp>
-      <p:sp>
-        <p:nvSpPr>
-          <p:cNvPr id="48" name="TextBox 47"/>
-          <p:cNvSpPr txBox="1"/>
-          <p:nvPr/>
-        </p:nvSpPr>
-        <p:spPr>
-          <a:xfrm>
-            <a:off x="3017520" y="4681728"/>
-            <a:ext cx="1188720" cy="365760"/>
-          </a:xfrm>
-          <a:prstGeom prst="rect">
-            <a:avLst/>
-          </a:prstGeom>
-          <a:noFill/>
-        </p:spPr>
-        <p:txBody>
-          <a:bodyPr wrap="square">
-            <a:spAutoFit/>
-          </a:bodyPr>
-          <a:lstStyle/>
-          <a:p>
-            <a:pPr algn="l">
-              <a:defRPr sz="1200" b="1">
+              <a:t>Total: 10 FTEs</a:t>
+            </a:r>
+          </a:p>
+        </p:txBody>
+      </p:sp>
+      <p:sp>
+        <p:nvSpPr>
+          <p:cNvPr id="74" name="TextBox 73"/>
+          <p:cNvSpPr txBox="1"/>
+          <p:nvPr/>
+        </p:nvSpPr>
+        <p:spPr>
+          <a:xfrm>
+            <a:off x="2468880" y="4270248"/>
+            <a:ext cx="1371600" cy="320040"/>
+          </a:xfrm>
+          <a:prstGeom prst="rect">
+            <a:avLst/>
+          </a:prstGeom>
+          <a:noFill/>
+        </p:spPr>
+        <p:txBody>
+          <a:bodyPr wrap="square">
+            <a:spAutoFit/>
+          </a:bodyPr>
+          <a:lstStyle/>
+          <a:p>
+            <a:pPr algn="l">
+              <a:defRPr sz="900" b="0">
+                <a:solidFill>
+                  <a:srgbClr val="CCCCCC"/>
+                </a:solidFill>
+              </a:defRPr>
+            </a:pPr>
+            <a:r>
+              <a:t>3 onshore + 7 offshore</a:t>
+            </a:r>
+          </a:p>
+        </p:txBody>
+      </p:sp>
+      <p:sp>
+        <p:nvSpPr>
+          <p:cNvPr id="75" name="TextBox 74"/>
+          <p:cNvSpPr txBox="1"/>
+          <p:nvPr/>
+        </p:nvSpPr>
+        <p:spPr>
+          <a:xfrm>
+            <a:off x="3977639" y="4270248"/>
+            <a:ext cx="731520" cy="320040"/>
+          </a:xfrm>
+          <a:prstGeom prst="rect">
+            <a:avLst/>
+          </a:prstGeom>
+          <a:noFill/>
+        </p:spPr>
+        <p:txBody>
+          <a:bodyPr wrap="square">
+            <a:spAutoFit/>
+          </a:bodyPr>
+          <a:lstStyle/>
+          <a:p>
+            <a:pPr algn="l">
+              <a:defRPr sz="1100" b="1">
                 <a:solidFill>
                   <a:srgbClr val="FFFFFF"/>
                 </a:solidFill>
@@ -6776,84 +7785,84 @@
       </p:sp>
       <p:sp>
         <p:nvSpPr>
-          <p:cNvPr id="49" name="TextBox 48"/>
-          <p:cNvSpPr txBox="1"/>
-          <p:nvPr/>
-        </p:nvSpPr>
-        <p:spPr>
-          <a:xfrm>
-            <a:off x="4389120" y="4681728"/>
-            <a:ext cx="1371600" cy="365760"/>
-          </a:xfrm>
-          <a:prstGeom prst="rect">
-            <a:avLst/>
-          </a:prstGeom>
-          <a:noFill/>
-        </p:spPr>
-        <p:txBody>
-          <a:bodyPr wrap="square">
-            <a:spAutoFit/>
-          </a:bodyPr>
-          <a:lstStyle/>
-          <a:p>
-            <a:pPr algn="l">
-              <a:defRPr sz="1200" b="1">
+          <p:cNvPr id="76" name="TextBox 75"/>
+          <p:cNvSpPr txBox="1"/>
+          <p:nvPr/>
+        </p:nvSpPr>
+        <p:spPr>
+          <a:xfrm>
+            <a:off x="4754880" y="4270248"/>
+            <a:ext cx="1097280" cy="320040"/>
+          </a:xfrm>
+          <a:prstGeom prst="rect">
+            <a:avLst/>
+          </a:prstGeom>
+          <a:noFill/>
+        </p:spPr>
+        <p:txBody>
+          <a:bodyPr wrap="square">
+            <a:spAutoFit/>
+          </a:bodyPr>
+          <a:lstStyle/>
+          <a:p>
+            <a:pPr algn="l">
+              <a:defRPr sz="1100" b="1">
                 <a:solidFill>
                   <a:srgbClr val="FFFFFF"/>
                 </a:solidFill>
               </a:defRPr>
             </a:pPr>
             <a:r>
-              <a:t>$1.4M-2.2M</a:t>
-            </a:r>
-          </a:p>
-        </p:txBody>
-      </p:sp>
-      <p:sp>
-        <p:nvSpPr>
-          <p:cNvPr id="50" name="TextBox 49"/>
-          <p:cNvSpPr txBox="1"/>
-          <p:nvPr/>
-        </p:nvSpPr>
-        <p:spPr>
-          <a:xfrm>
-            <a:off x="548640" y="5212080"/>
-            <a:ext cx="5029200" cy="274320"/>
-          </a:xfrm>
-          <a:prstGeom prst="rect">
-            <a:avLst/>
-          </a:prstGeom>
-          <a:noFill/>
-        </p:spPr>
-        <p:txBody>
-          <a:bodyPr wrap="square">
-            <a:spAutoFit/>
-          </a:bodyPr>
-          <a:lstStyle/>
-          <a:p>
-            <a:pPr algn="l">
-              <a:defRPr sz="1000" b="0">
+              <a:t>$905K-1.18M</a:t>
+            </a:r>
+          </a:p>
+        </p:txBody>
+      </p:sp>
+      <p:sp>
+        <p:nvSpPr>
+          <p:cNvPr id="77" name="TextBox 76"/>
+          <p:cNvSpPr txBox="1"/>
+          <p:nvPr/>
+        </p:nvSpPr>
+        <p:spPr>
+          <a:xfrm>
+            <a:off x="548640" y="4754880"/>
+            <a:ext cx="5029200" cy="228600"/>
+          </a:xfrm>
+          <a:prstGeom prst="rect">
+            <a:avLst/>
+          </a:prstGeom>
+          <a:noFill/>
+        </p:spPr>
+        <p:txBody>
+          <a:bodyPr wrap="square">
+            <a:spAutoFit/>
+          </a:bodyPr>
+          <a:lstStyle/>
+          <a:p>
+            <a:pPr algn="l">
+              <a:defRPr sz="900" b="0">
                 <a:solidFill>
                   <a:srgbClr val="666666"/>
                 </a:solidFill>
               </a:defRPr>
             </a:pPr>
             <a:r>
-              <a:t>Sequential timeline — each phase waits for the previous:</a:t>
-            </a:r>
-          </a:p>
-        </p:txBody>
-      </p:sp>
-      <p:sp>
-        <p:nvSpPr>
-          <p:cNvPr id="51" name="Rectangle 50"/>
+              <a:t>Sequential — each phase waits for the previous:</a:t>
+            </a:r>
+          </a:p>
+        </p:txBody>
+      </p:sp>
+      <p:sp>
+        <p:nvSpPr>
+          <p:cNvPr id="78" name="Rectangle 77"/>
           <p:cNvSpPr/>
           <p:nvPr/>
         </p:nvSpPr>
         <p:spPr>
           <a:xfrm>
-            <a:off x="548640" y="5532120"/>
-            <a:ext cx="914400" cy="320040"/>
+            <a:off x="548640" y="5029200"/>
+            <a:ext cx="914400" cy="274320"/>
           </a:xfrm>
           <a:prstGeom prst="rect">
             <a:avLst/>
@@ -6889,14 +7898,14 @@
       </p:sp>
       <p:sp>
         <p:nvSpPr>
-          <p:cNvPr id="52" name="TextBox 51"/>
-          <p:cNvSpPr txBox="1"/>
-          <p:nvPr/>
-        </p:nvSpPr>
-        <p:spPr>
-          <a:xfrm>
-            <a:off x="548640" y="5541264"/>
-            <a:ext cx="914400" cy="301752"/>
+          <p:cNvPr id="79" name="TextBox 78"/>
+          <p:cNvSpPr txBox="1"/>
+          <p:nvPr/>
+        </p:nvSpPr>
+        <p:spPr>
+          <a:xfrm>
+            <a:off x="548640" y="5029200"/>
+            <a:ext cx="914400" cy="274320"/>
           </a:xfrm>
           <a:prstGeom prst="rect">
             <a:avLst/>
@@ -6910,7 +7919,7 @@
           <a:lstStyle/>
           <a:p>
             <a:pPr algn="ctr">
-              <a:defRPr sz="900" b="1">
+              <a:defRPr sz="800" b="1">
                 <a:solidFill>
                   <a:srgbClr val="FFFFFF"/>
                 </a:solidFill>
@@ -6924,14 +7933,14 @@
       </p:sp>
       <p:sp>
         <p:nvSpPr>
-          <p:cNvPr id="53" name="Rectangle 52"/>
+          <p:cNvPr id="80" name="Rectangle 79"/>
           <p:cNvSpPr/>
           <p:nvPr/>
         </p:nvSpPr>
         <p:spPr>
           <a:xfrm>
-            <a:off x="1508760" y="5532120"/>
-            <a:ext cx="2011680" cy="320040"/>
+            <a:off x="1499616" y="5029200"/>
+            <a:ext cx="1828800" cy="274320"/>
           </a:xfrm>
           <a:prstGeom prst="rect">
             <a:avLst/>
@@ -6967,14 +7976,14 @@
       </p:sp>
       <p:sp>
         <p:nvSpPr>
-          <p:cNvPr id="54" name="TextBox 53"/>
-          <p:cNvSpPr txBox="1"/>
-          <p:nvPr/>
-        </p:nvSpPr>
-        <p:spPr>
-          <a:xfrm>
-            <a:off x="1508760" y="5541264"/>
-            <a:ext cx="2011680" cy="301752"/>
+          <p:cNvPr id="81" name="TextBox 80"/>
+          <p:cNvSpPr txBox="1"/>
+          <p:nvPr/>
+        </p:nvSpPr>
+        <p:spPr>
+          <a:xfrm>
+            <a:off x="1499616" y="5029200"/>
+            <a:ext cx="1828800" cy="274320"/>
           </a:xfrm>
           <a:prstGeom prst="rect">
             <a:avLst/>
@@ -6988,7 +7997,7 @@
           <a:lstStyle/>
           <a:p>
             <a:pPr algn="ctr">
-              <a:defRPr sz="900" b="1">
+              <a:defRPr sz="800" b="1">
                 <a:solidFill>
                   <a:srgbClr val="FFFFFF"/>
                 </a:solidFill>
@@ -7002,14 +8011,14 @@
       </p:sp>
       <p:sp>
         <p:nvSpPr>
-          <p:cNvPr id="55" name="Rectangle 54"/>
+          <p:cNvPr id="82" name="Rectangle 81"/>
           <p:cNvSpPr/>
           <p:nvPr/>
         </p:nvSpPr>
         <p:spPr>
           <a:xfrm>
-            <a:off x="3566160" y="5532120"/>
-            <a:ext cx="2011680" cy="320040"/>
+            <a:off x="3364992" y="5029200"/>
+            <a:ext cx="1828800" cy="274320"/>
           </a:xfrm>
           <a:prstGeom prst="rect">
             <a:avLst/>
@@ -7045,14 +8054,14 @@
       </p:sp>
       <p:sp>
         <p:nvSpPr>
-          <p:cNvPr id="56" name="TextBox 55"/>
-          <p:cNvSpPr txBox="1"/>
-          <p:nvPr/>
-        </p:nvSpPr>
-        <p:spPr>
-          <a:xfrm>
-            <a:off x="3566160" y="5541264"/>
-            <a:ext cx="2011680" cy="301752"/>
+          <p:cNvPr id="83" name="TextBox 82"/>
+          <p:cNvSpPr txBox="1"/>
+          <p:nvPr/>
+        </p:nvSpPr>
+        <p:spPr>
+          <a:xfrm>
+            <a:off x="3364992" y="5029200"/>
+            <a:ext cx="1828800" cy="274320"/>
           </a:xfrm>
           <a:prstGeom prst="rect">
             <a:avLst/>
@@ -7066,7 +8075,7 @@
           <a:lstStyle/>
           <a:p>
             <a:pPr algn="ctr">
-              <a:defRPr sz="900" b="1">
+              <a:defRPr sz="800" b="1">
                 <a:solidFill>
                   <a:srgbClr val="FFFFFF"/>
                 </a:solidFill>
@@ -7080,14 +8089,14 @@
       </p:sp>
       <p:sp>
         <p:nvSpPr>
-          <p:cNvPr id="57" name="Rectangle 56"/>
+          <p:cNvPr id="84" name="Rectangle 83"/>
           <p:cNvSpPr/>
           <p:nvPr/>
         </p:nvSpPr>
         <p:spPr>
           <a:xfrm>
-            <a:off x="5623560" y="5532120"/>
-            <a:ext cx="1097280" cy="320040"/>
+            <a:off x="5230368" y="5029200"/>
+            <a:ext cx="1005840" cy="274320"/>
           </a:xfrm>
           <a:prstGeom prst="rect">
             <a:avLst/>
@@ -7123,14 +8132,14 @@
       </p:sp>
       <p:sp>
         <p:nvSpPr>
-          <p:cNvPr id="58" name="TextBox 57"/>
-          <p:cNvSpPr txBox="1"/>
-          <p:nvPr/>
-        </p:nvSpPr>
-        <p:spPr>
-          <a:xfrm>
-            <a:off x="5623560" y="5541264"/>
-            <a:ext cx="1097280" cy="301752"/>
+          <p:cNvPr id="85" name="TextBox 84"/>
+          <p:cNvSpPr txBox="1"/>
+          <p:nvPr/>
+        </p:nvSpPr>
+        <p:spPr>
+          <a:xfrm>
+            <a:off x="5230368" y="5029200"/>
+            <a:ext cx="1005840" cy="274320"/>
           </a:xfrm>
           <a:prstGeom prst="rect">
             <a:avLst/>
@@ -7144,7 +8153,7 @@
           <a:lstStyle/>
           <a:p>
             <a:pPr algn="ctr">
-              <a:defRPr sz="900" b="1">
+              <a:defRPr sz="800" b="1">
                 <a:solidFill>
                   <a:srgbClr val="FFFFFF"/>
                 </a:solidFill>
@@ -7158,14 +8167,14 @@
       </p:sp>
       <p:sp>
         <p:nvSpPr>
-          <p:cNvPr id="59" name="Rectangle 58"/>
+          <p:cNvPr id="86" name="Rectangle 85"/>
           <p:cNvSpPr/>
           <p:nvPr/>
         </p:nvSpPr>
         <p:spPr>
           <a:xfrm>
-            <a:off x="6766560" y="5532120"/>
-            <a:ext cx="640080" cy="320040"/>
+            <a:off x="6272784" y="5029200"/>
+            <a:ext cx="594360" cy="274320"/>
           </a:xfrm>
           <a:prstGeom prst="rect">
             <a:avLst/>
@@ -7201,14 +8210,14 @@
       </p:sp>
       <p:sp>
         <p:nvSpPr>
-          <p:cNvPr id="60" name="TextBox 59"/>
-          <p:cNvSpPr txBox="1"/>
-          <p:nvPr/>
-        </p:nvSpPr>
-        <p:spPr>
-          <a:xfrm>
-            <a:off x="6766560" y="5541264"/>
-            <a:ext cx="640080" cy="301752"/>
+          <p:cNvPr id="87" name="TextBox 86"/>
+          <p:cNvSpPr txBox="1"/>
+          <p:nvPr/>
+        </p:nvSpPr>
+        <p:spPr>
+          <a:xfrm>
+            <a:off x="6272784" y="5029200"/>
+            <a:ext cx="594360" cy="274320"/>
           </a:xfrm>
           <a:prstGeom prst="rect">
             <a:avLst/>
@@ -7222,7 +8231,7 @@
           <a:lstStyle/>
           <a:p>
             <a:pPr algn="ctr">
-              <a:defRPr sz="900" b="1">
+              <a:defRPr sz="800" b="1">
                 <a:solidFill>
                   <a:srgbClr val="FFFFFF"/>
                 </a:solidFill>
@@ -7236,7 +8245,7 @@
       </p:sp>
       <p:sp>
         <p:nvSpPr>
-          <p:cNvPr id="61" name="Rectangle 60"/>
+          <p:cNvPr id="88" name="Rectangle 87"/>
           <p:cNvSpPr/>
           <p:nvPr/>
         </p:nvSpPr>
@@ -7279,7 +8288,7 @@
       </p:sp>
       <p:sp>
         <p:nvSpPr>
-          <p:cNvPr id="62" name="TextBox 61"/>
+          <p:cNvPr id="89" name="TextBox 88"/>
           <p:cNvSpPr txBox="1"/>
           <p:nvPr/>
         </p:nvSpPr>
@@ -7314,14 +8323,14 @@
       </p:sp>
       <p:sp>
         <p:nvSpPr>
-          <p:cNvPr id="63" name="Rectangle 62"/>
+          <p:cNvPr id="90" name="Rectangle 89"/>
           <p:cNvSpPr/>
           <p:nvPr/>
         </p:nvSpPr>
         <p:spPr>
           <a:xfrm>
             <a:off x="6217920" y="1691640"/>
-            <a:ext cx="5486400" cy="320040"/>
+            <a:ext cx="5486400" cy="292608"/>
           </a:xfrm>
           <a:prstGeom prst="rect">
             <a:avLst/>
@@ -7357,28 +8366,28 @@
       </p:sp>
       <p:sp>
         <p:nvSpPr>
-          <p:cNvPr id="64" name="TextBox 63"/>
-          <p:cNvSpPr txBox="1"/>
-          <p:nvPr/>
-        </p:nvSpPr>
-        <p:spPr>
-          <a:xfrm>
-            <a:off x="6309360" y="1700784"/>
-            <a:ext cx="2011680" cy="274320"/>
-          </a:xfrm>
-          <a:prstGeom prst="rect">
-            <a:avLst/>
-          </a:prstGeom>
-          <a:noFill/>
-        </p:spPr>
-        <p:txBody>
-          <a:bodyPr wrap="square">
-            <a:spAutoFit/>
-          </a:bodyPr>
-          <a:lstStyle/>
-          <a:p>
-            <a:pPr algn="l">
-              <a:defRPr sz="1000" b="1">
+          <p:cNvPr id="91" name="TextBox 90"/>
+          <p:cNvSpPr txBox="1"/>
+          <p:nvPr/>
+        </p:nvSpPr>
+        <p:spPr>
+          <a:xfrm>
+            <a:off x="6309360" y="1691640"/>
+            <a:ext cx="1828800" cy="274320"/>
+          </a:xfrm>
+          <a:prstGeom prst="rect">
+            <a:avLst/>
+          </a:prstGeom>
+          <a:noFill/>
+        </p:spPr>
+        <p:txBody>
+          <a:bodyPr wrap="square">
+            <a:spAutoFit/>
+          </a:bodyPr>
+          <a:lstStyle/>
+          <a:p>
+            <a:pPr algn="l">
+              <a:defRPr sz="800" b="1">
                 <a:solidFill>
                   <a:srgbClr val="666666"/>
                 </a:solidFill>
@@ -7392,13 +8401,153 @@
       </p:sp>
       <p:sp>
         <p:nvSpPr>
-          <p:cNvPr id="65" name="TextBox 64"/>
-          <p:cNvSpPr txBox="1"/>
-          <p:nvPr/>
-        </p:nvSpPr>
-        <p:spPr>
-          <a:xfrm>
-            <a:off x="8412480" y="1700784"/>
+          <p:cNvPr id="92" name="TextBox 91"/>
+          <p:cNvSpPr txBox="1"/>
+          <p:nvPr/>
+        </p:nvSpPr>
+        <p:spPr>
+          <a:xfrm>
+            <a:off x="8183879" y="1691640"/>
+            <a:ext cx="731520" cy="274320"/>
+          </a:xfrm>
+          <a:prstGeom prst="rect">
+            <a:avLst/>
+          </a:prstGeom>
+          <a:noFill/>
+        </p:spPr>
+        <p:txBody>
+          <a:bodyPr wrap="square">
+            <a:spAutoFit/>
+          </a:bodyPr>
+          <a:lstStyle/>
+          <a:p>
+            <a:pPr algn="l">
+              <a:defRPr sz="800" b="1">
+                <a:solidFill>
+                  <a:srgbClr val="666666"/>
+                </a:solidFill>
+              </a:defRPr>
+            </a:pPr>
+            <a:r>
+              <a:t>HC</a:t>
+            </a:r>
+          </a:p>
+        </p:txBody>
+      </p:sp>
+      <p:sp>
+        <p:nvSpPr>
+          <p:cNvPr id="93" name="TextBox 92"/>
+          <p:cNvSpPr txBox="1"/>
+          <p:nvPr/>
+        </p:nvSpPr>
+        <p:spPr>
+          <a:xfrm>
+            <a:off x="8961120" y="1691640"/>
+            <a:ext cx="457200" cy="274320"/>
+          </a:xfrm>
+          <a:prstGeom prst="rect">
+            <a:avLst/>
+          </a:prstGeom>
+          <a:noFill/>
+        </p:spPr>
+        <p:txBody>
+          <a:bodyPr wrap="square">
+            <a:spAutoFit/>
+          </a:bodyPr>
+          <a:lstStyle/>
+          <a:p>
+            <a:pPr algn="l">
+              <a:defRPr sz="800" b="1">
+                <a:solidFill>
+                  <a:srgbClr val="666666"/>
+                </a:solidFill>
+              </a:defRPr>
+            </a:pPr>
+            <a:r>
+              <a:t>Shore</a:t>
+            </a:r>
+          </a:p>
+        </p:txBody>
+      </p:sp>
+      <p:sp>
+        <p:nvSpPr>
+          <p:cNvPr id="94" name="TextBox 93"/>
+          <p:cNvSpPr txBox="1"/>
+          <p:nvPr/>
+        </p:nvSpPr>
+        <p:spPr>
+          <a:xfrm>
+            <a:off x="9464040" y="1691640"/>
+            <a:ext cx="502920" cy="274320"/>
+          </a:xfrm>
+          <a:prstGeom prst="rect">
+            <a:avLst/>
+          </a:prstGeom>
+          <a:noFill/>
+        </p:spPr>
+        <p:txBody>
+          <a:bodyPr wrap="square">
+            <a:spAutoFit/>
+          </a:bodyPr>
+          <a:lstStyle/>
+          <a:p>
+            <a:pPr algn="l">
+              <a:defRPr sz="800" b="1">
+                <a:solidFill>
+                  <a:srgbClr val="666666"/>
+                </a:solidFill>
+              </a:defRPr>
+            </a:pPr>
+            <a:r>
+              <a:t>Rate/h</a:t>
+            </a:r>
+          </a:p>
+        </p:txBody>
+      </p:sp>
+      <p:sp>
+        <p:nvSpPr>
+          <p:cNvPr id="95" name="TextBox 94"/>
+          <p:cNvSpPr txBox="1"/>
+          <p:nvPr/>
+        </p:nvSpPr>
+        <p:spPr>
+          <a:xfrm>
+            <a:off x="10012680" y="1691640"/>
+            <a:ext cx="685800" cy="274320"/>
+          </a:xfrm>
+          <a:prstGeom prst="rect">
+            <a:avLst/>
+          </a:prstGeom>
+          <a:noFill/>
+        </p:spPr>
+        <p:txBody>
+          <a:bodyPr wrap="square">
+            <a:spAutoFit/>
+          </a:bodyPr>
+          <a:lstStyle/>
+          <a:p>
+            <a:pPr algn="l">
+              <a:defRPr sz="800" b="1">
+                <a:solidFill>
+                  <a:srgbClr val="666666"/>
+                </a:solidFill>
+              </a:defRPr>
+            </a:pPr>
+            <a:r>
+              <a:t>Duration</a:t>
+            </a:r>
+          </a:p>
+        </p:txBody>
+      </p:sp>
+      <p:sp>
+        <p:nvSpPr>
+          <p:cNvPr id="96" name="TextBox 95"/>
+          <p:cNvSpPr txBox="1"/>
+          <p:nvPr/>
+        </p:nvSpPr>
+        <p:spPr>
+          <a:xfrm>
+            <a:off x="10744200" y="1691640"/>
             <a:ext cx="914400" cy="274320"/>
           </a:xfrm>
           <a:prstGeom prst="rect">
@@ -7413,147 +8562,120 @@
           <a:lstStyle/>
           <a:p>
             <a:pPr algn="l">
-              <a:defRPr sz="1000" b="1">
+              <a:defRPr sz="800" b="1">
                 <a:solidFill>
                   <a:srgbClr val="666666"/>
                 </a:solidFill>
               </a:defRPr>
             </a:pPr>
             <a:r>
-              <a:t>HC</a:t>
-            </a:r>
-          </a:p>
-        </p:txBody>
-      </p:sp>
-      <p:sp>
-        <p:nvSpPr>
-          <p:cNvPr id="66" name="TextBox 65"/>
-          <p:cNvSpPr txBox="1"/>
-          <p:nvPr/>
-        </p:nvSpPr>
-        <p:spPr>
-          <a:xfrm>
-            <a:off x="9418320" y="1700784"/>
-            <a:ext cx="1005840" cy="274320"/>
-          </a:xfrm>
-          <a:prstGeom prst="rect">
-            <a:avLst/>
-          </a:prstGeom>
-          <a:noFill/>
-        </p:spPr>
-        <p:txBody>
-          <a:bodyPr wrap="square">
-            <a:spAutoFit/>
-          </a:bodyPr>
-          <a:lstStyle/>
-          <a:p>
-            <a:pPr algn="l">
-              <a:defRPr sz="1000" b="1">
-                <a:solidFill>
-                  <a:srgbClr val="666666"/>
-                </a:solidFill>
-              </a:defRPr>
-            </a:pPr>
-            <a:r>
-              <a:t>Duration</a:t>
-            </a:r>
-          </a:p>
-        </p:txBody>
-      </p:sp>
-      <p:sp>
-        <p:nvSpPr>
-          <p:cNvPr id="67" name="TextBox 66"/>
-          <p:cNvSpPr txBox="1"/>
-          <p:nvPr/>
-        </p:nvSpPr>
-        <p:spPr>
-          <a:xfrm>
-            <a:off x="10515600" y="1700784"/>
-            <a:ext cx="1097280" cy="274320"/>
-          </a:xfrm>
-          <a:prstGeom prst="rect">
-            <a:avLst/>
-          </a:prstGeom>
-          <a:noFill/>
-        </p:spPr>
-        <p:txBody>
-          <a:bodyPr wrap="square">
-            <a:spAutoFit/>
-          </a:bodyPr>
-          <a:lstStyle/>
-          <a:p>
-            <a:pPr algn="l">
-              <a:defRPr sz="1000" b="1">
-                <a:solidFill>
-                  <a:srgbClr val="666666"/>
-                </a:solidFill>
-              </a:defRPr>
-            </a:pPr>
-            <a:r>
-              <a:t>Cost</a:t>
-            </a:r>
-          </a:p>
-        </p:txBody>
-      </p:sp>
-      <p:sp>
-        <p:nvSpPr>
-          <p:cNvPr id="68" name="TextBox 67"/>
-          <p:cNvSpPr txBox="1"/>
-          <p:nvPr/>
-        </p:nvSpPr>
-        <p:spPr>
-          <a:xfrm>
-            <a:off x="6309360" y="2057400"/>
-            <a:ext cx="2011680" cy="274320"/>
-          </a:xfrm>
-          <a:prstGeom prst="rect">
-            <a:avLst/>
-          </a:prstGeom>
-          <a:noFill/>
-        </p:spPr>
-        <p:txBody>
-          <a:bodyPr wrap="square">
-            <a:spAutoFit/>
-          </a:bodyPr>
-          <a:lstStyle/>
-          <a:p>
-            <a:pPr algn="l">
-              <a:defRPr sz="1000" b="0">
+              <a:t>Cost CAD</a:t>
+            </a:r>
+          </a:p>
+        </p:txBody>
+      </p:sp>
+      <p:sp>
+        <p:nvSpPr>
+          <p:cNvPr id="97" name="Rectangle 96"/>
+          <p:cNvSpPr/>
+          <p:nvPr/>
+        </p:nvSpPr>
+        <p:spPr>
+          <a:xfrm>
+            <a:off x="6217920" y="2011680"/>
+            <a:ext cx="5486400" cy="246888"/>
+          </a:xfrm>
+          <a:prstGeom prst="rect">
+            <a:avLst/>
+          </a:prstGeom>
+          <a:solidFill>
+            <a:srgbClr val="F5F5F5"/>
+          </a:solidFill>
+          <a:ln>
+            <a:noFill/>
+          </a:ln>
+        </p:spPr>
+        <p:style>
+          <a:lnRef idx="1">
+            <a:schemeClr val="accent1"/>
+          </a:lnRef>
+          <a:fillRef idx="3">
+            <a:schemeClr val="accent1"/>
+          </a:fillRef>
+          <a:effectRef idx="2">
+            <a:schemeClr val="accent1"/>
+          </a:effectRef>
+          <a:fontRef idx="minor">
+            <a:schemeClr val="lt1"/>
+          </a:fontRef>
+        </p:style>
+        <p:txBody>
+          <a:bodyPr rtlCol="0" anchor="ctr"/>
+          <a:lstStyle/>
+          <a:p>
+            <a:pPr algn="ctr"/>
+          </a:p>
+        </p:txBody>
+      </p:sp>
+      <p:sp>
+        <p:nvSpPr>
+          <p:cNvPr id="98" name="TextBox 97"/>
+          <p:cNvSpPr txBox="1"/>
+          <p:nvPr/>
+        </p:nvSpPr>
+        <p:spPr>
+          <a:xfrm>
+            <a:off x="6309360" y="2011680"/>
+            <a:ext cx="1828800" cy="237744"/>
+          </a:xfrm>
+          <a:prstGeom prst="rect">
+            <a:avLst/>
+          </a:prstGeom>
+          <a:noFill/>
+        </p:spPr>
+        <p:txBody>
+          <a:bodyPr wrap="square">
+            <a:spAutoFit/>
+          </a:bodyPr>
+          <a:lstStyle/>
+          <a:p>
+            <a:pPr algn="l">
+              <a:defRPr sz="800" b="0">
                 <a:solidFill>
                   <a:srgbClr val="333333"/>
                 </a:solidFill>
               </a:defRPr>
             </a:pPr>
             <a:r>
-              <a:t>Tech Lead / Architect</a:t>
-            </a:r>
-          </a:p>
-        </p:txBody>
-      </p:sp>
-      <p:sp>
-        <p:nvSpPr>
-          <p:cNvPr id="69" name="TextBox 68"/>
-          <p:cNvSpPr txBox="1"/>
-          <p:nvPr/>
-        </p:nvSpPr>
-        <p:spPr>
-          <a:xfrm>
-            <a:off x="8412480" y="2057400"/>
-            <a:ext cx="914400" cy="274320"/>
-          </a:xfrm>
-          <a:prstGeom prst="rect">
-            <a:avLst/>
-          </a:prstGeom>
-          <a:noFill/>
-        </p:spPr>
-        <p:txBody>
-          <a:bodyPr wrap="square">
-            <a:spAutoFit/>
-          </a:bodyPr>
-          <a:lstStyle/>
-          <a:p>
-            <a:pPr algn="l">
-              <a:defRPr sz="1000" b="0">
+              <a:t>Delivery Manager</a:t>
+            </a:r>
+          </a:p>
+        </p:txBody>
+      </p:sp>
+      <p:sp>
+        <p:nvSpPr>
+          <p:cNvPr id="99" name="TextBox 98"/>
+          <p:cNvSpPr txBox="1"/>
+          <p:nvPr/>
+        </p:nvSpPr>
+        <p:spPr>
+          <a:xfrm>
+            <a:off x="8183879" y="2011680"/>
+            <a:ext cx="731520" cy="237744"/>
+          </a:xfrm>
+          <a:prstGeom prst="rect">
+            <a:avLst/>
+          </a:prstGeom>
+          <a:noFill/>
+        </p:spPr>
+        <p:txBody>
+          <a:bodyPr wrap="square">
+            <a:spAutoFit/>
+          </a:bodyPr>
+          <a:lstStyle/>
+          <a:p>
+            <a:pPr algn="l">
+              <a:defRPr sz="800" b="0">
                 <a:solidFill>
                   <a:srgbClr val="333333"/>
                 </a:solidFill>
@@ -7567,139 +8689,505 @@
       </p:sp>
       <p:sp>
         <p:nvSpPr>
-          <p:cNvPr id="70" name="TextBox 69"/>
-          <p:cNvSpPr txBox="1"/>
-          <p:nvPr/>
-        </p:nvSpPr>
-        <p:spPr>
-          <a:xfrm>
-            <a:off x="9418320" y="2057400"/>
-            <a:ext cx="1005840" cy="274320"/>
-          </a:xfrm>
-          <a:prstGeom prst="rect">
-            <a:avLst/>
-          </a:prstGeom>
-          <a:noFill/>
-        </p:spPr>
-        <p:txBody>
-          <a:bodyPr wrap="square">
-            <a:spAutoFit/>
-          </a:bodyPr>
-          <a:lstStyle/>
-          <a:p>
-            <a:pPr algn="l">
-              <a:defRPr sz="1000" b="0">
+          <p:cNvPr id="100" name="TextBox 99"/>
+          <p:cNvSpPr txBox="1"/>
+          <p:nvPr/>
+        </p:nvSpPr>
+        <p:spPr>
+          <a:xfrm>
+            <a:off x="8961120" y="2011680"/>
+            <a:ext cx="457200" cy="237744"/>
+          </a:xfrm>
+          <a:prstGeom prst="rect">
+            <a:avLst/>
+          </a:prstGeom>
+          <a:noFill/>
+        </p:spPr>
+        <p:txBody>
+          <a:bodyPr wrap="square">
+            <a:spAutoFit/>
+          </a:bodyPr>
+          <a:lstStyle/>
+          <a:p>
+            <a:pPr algn="l">
+              <a:defRPr sz="800" b="0">
+                <a:solidFill>
+                  <a:srgbClr val="D52B1E"/>
+                </a:solidFill>
+              </a:defRPr>
+            </a:pPr>
+            <a:r>
+              <a:t>On</a:t>
+            </a:r>
+          </a:p>
+        </p:txBody>
+      </p:sp>
+      <p:sp>
+        <p:nvSpPr>
+          <p:cNvPr id="101" name="TextBox 100"/>
+          <p:cNvSpPr txBox="1"/>
+          <p:nvPr/>
+        </p:nvSpPr>
+        <p:spPr>
+          <a:xfrm>
+            <a:off x="9464040" y="2011680"/>
+            <a:ext cx="502920" cy="237744"/>
+          </a:xfrm>
+          <a:prstGeom prst="rect">
+            <a:avLst/>
+          </a:prstGeom>
+          <a:noFill/>
+        </p:spPr>
+        <p:txBody>
+          <a:bodyPr wrap="square">
+            <a:spAutoFit/>
+          </a:bodyPr>
+          <a:lstStyle/>
+          <a:p>
+            <a:pPr algn="l">
+              <a:defRPr sz="800" b="0">
                 <a:solidFill>
                   <a:srgbClr val="333333"/>
                 </a:solidFill>
               </a:defRPr>
             </a:pPr>
             <a:r>
-              <a:t>8-13 weeks</a:t>
-            </a:r>
-          </a:p>
-        </p:txBody>
-      </p:sp>
-      <p:sp>
-        <p:nvSpPr>
-          <p:cNvPr id="71" name="TextBox 70"/>
-          <p:cNvSpPr txBox="1"/>
-          <p:nvPr/>
-        </p:nvSpPr>
-        <p:spPr>
-          <a:xfrm>
-            <a:off x="10515600" y="2057400"/>
-            <a:ext cx="1097280" cy="274320"/>
-          </a:xfrm>
-          <a:prstGeom prst="rect">
-            <a:avLst/>
-          </a:prstGeom>
-          <a:noFill/>
-        </p:spPr>
-        <p:txBody>
-          <a:bodyPr wrap="square">
-            <a:spAutoFit/>
-          </a:bodyPr>
-          <a:lstStyle/>
-          <a:p>
-            <a:pPr algn="l">
-              <a:defRPr sz="1000" b="0">
+              <a:t>$200</a:t>
+            </a:r>
+          </a:p>
+        </p:txBody>
+      </p:sp>
+      <p:sp>
+        <p:nvSpPr>
+          <p:cNvPr id="102" name="TextBox 101"/>
+          <p:cNvSpPr txBox="1"/>
+          <p:nvPr/>
+        </p:nvSpPr>
+        <p:spPr>
+          <a:xfrm>
+            <a:off x="10012680" y="2011680"/>
+            <a:ext cx="685800" cy="237744"/>
+          </a:xfrm>
+          <a:prstGeom prst="rect">
+            <a:avLst/>
+          </a:prstGeom>
+          <a:noFill/>
+        </p:spPr>
+        <p:txBody>
+          <a:bodyPr wrap="square">
+            <a:spAutoFit/>
+          </a:bodyPr>
+          <a:lstStyle/>
+          <a:p>
+            <a:pPr algn="l">
+              <a:defRPr sz="800" b="0">
                 <a:solidFill>
                   <a:srgbClr val="333333"/>
                 </a:solidFill>
               </a:defRPr>
             </a:pPr>
             <a:r>
-              <a:t>$100K-150K</a:t>
-            </a:r>
-          </a:p>
-        </p:txBody>
-      </p:sp>
-      <p:sp>
-        <p:nvSpPr>
-          <p:cNvPr id="72" name="TextBox 71"/>
-          <p:cNvSpPr txBox="1"/>
-          <p:nvPr/>
-        </p:nvSpPr>
-        <p:spPr>
-          <a:xfrm>
-            <a:off x="6309360" y="2377440"/>
-            <a:ext cx="2011680" cy="274320"/>
-          </a:xfrm>
-          <a:prstGeom prst="rect">
-            <a:avLst/>
-          </a:prstGeom>
-          <a:noFill/>
-        </p:spPr>
-        <p:txBody>
-          <a:bodyPr wrap="square">
-            <a:spAutoFit/>
-          </a:bodyPr>
-          <a:lstStyle/>
-          <a:p>
-            <a:pPr algn="l">
-              <a:defRPr sz="1000" b="0">
+              <a:t>15 wks</a:t>
+            </a:r>
+          </a:p>
+        </p:txBody>
+      </p:sp>
+      <p:sp>
+        <p:nvSpPr>
+          <p:cNvPr id="103" name="TextBox 102"/>
+          <p:cNvSpPr txBox="1"/>
+          <p:nvPr/>
+        </p:nvSpPr>
+        <p:spPr>
+          <a:xfrm>
+            <a:off x="10744200" y="2011680"/>
+            <a:ext cx="914400" cy="237744"/>
+          </a:xfrm>
+          <a:prstGeom prst="rect">
+            <a:avLst/>
+          </a:prstGeom>
+          <a:noFill/>
+        </p:spPr>
+        <p:txBody>
+          <a:bodyPr wrap="square">
+            <a:spAutoFit/>
+          </a:bodyPr>
+          <a:lstStyle/>
+          <a:p>
+            <a:pPr algn="l">
+              <a:defRPr sz="800" b="0">
                 <a:solidFill>
                   <a:srgbClr val="333333"/>
                 </a:solidFill>
               </a:defRPr>
             </a:pPr>
             <a:r>
-              <a:t>Senior Full-Stack Engineer</a:t>
-            </a:r>
-          </a:p>
-        </p:txBody>
-      </p:sp>
-      <p:sp>
-        <p:nvSpPr>
-          <p:cNvPr id="73" name="TextBox 72"/>
-          <p:cNvSpPr txBox="1"/>
-          <p:nvPr/>
-        </p:nvSpPr>
-        <p:spPr>
-          <a:xfrm>
-            <a:off x="8412480" y="2377440"/>
-            <a:ext cx="914400" cy="274320"/>
-          </a:xfrm>
-          <a:prstGeom prst="rect">
-            <a:avLst/>
-          </a:prstGeom>
-          <a:noFill/>
-        </p:spPr>
-        <p:txBody>
-          <a:bodyPr wrap="square">
-            <a:spAutoFit/>
-          </a:bodyPr>
-          <a:lstStyle/>
-          <a:p>
-            <a:pPr algn="l">
-              <a:defRPr sz="1000" b="0">
+              <a:t>$120K</a:t>
+            </a:r>
+          </a:p>
+        </p:txBody>
+      </p:sp>
+      <p:sp>
+        <p:nvSpPr>
+          <p:cNvPr id="104" name="Rectangle 103"/>
+          <p:cNvSpPr/>
+          <p:nvPr/>
+        </p:nvSpPr>
+        <p:spPr>
+          <a:xfrm>
+            <a:off x="6217920" y="2258568"/>
+            <a:ext cx="5486400" cy="246888"/>
+          </a:xfrm>
+          <a:prstGeom prst="rect">
+            <a:avLst/>
+          </a:prstGeom>
+          <a:solidFill>
+            <a:srgbClr val="FFFFFF"/>
+          </a:solidFill>
+          <a:ln>
+            <a:noFill/>
+          </a:ln>
+        </p:spPr>
+        <p:style>
+          <a:lnRef idx="1">
+            <a:schemeClr val="accent1"/>
+          </a:lnRef>
+          <a:fillRef idx="3">
+            <a:schemeClr val="accent1"/>
+          </a:fillRef>
+          <a:effectRef idx="2">
+            <a:schemeClr val="accent1"/>
+          </a:effectRef>
+          <a:fontRef idx="minor">
+            <a:schemeClr val="lt1"/>
+          </a:fontRef>
+        </p:style>
+        <p:txBody>
+          <a:bodyPr rtlCol="0" anchor="ctr"/>
+          <a:lstStyle/>
+          <a:p>
+            <a:pPr algn="ctr"/>
+          </a:p>
+        </p:txBody>
+      </p:sp>
+      <p:sp>
+        <p:nvSpPr>
+          <p:cNvPr id="105" name="TextBox 104"/>
+          <p:cNvSpPr txBox="1"/>
+          <p:nvPr/>
+        </p:nvSpPr>
+        <p:spPr>
+          <a:xfrm>
+            <a:off x="6309360" y="2258568"/>
+            <a:ext cx="1828800" cy="237744"/>
+          </a:xfrm>
+          <a:prstGeom prst="rect">
+            <a:avLst/>
+          </a:prstGeom>
+          <a:noFill/>
+        </p:spPr>
+        <p:txBody>
+          <a:bodyPr wrap="square">
+            <a:spAutoFit/>
+          </a:bodyPr>
+          <a:lstStyle/>
+          <a:p>
+            <a:pPr algn="l">
+              <a:defRPr sz="800" b="0">
                 <a:solidFill>
                   <a:srgbClr val="333333"/>
                 </a:solidFill>
               </a:defRPr>
             </a:pPr>
             <a:r>
+              <a:t>Business Analyst</a:t>
+            </a:r>
+          </a:p>
+        </p:txBody>
+      </p:sp>
+      <p:sp>
+        <p:nvSpPr>
+          <p:cNvPr id="106" name="TextBox 105"/>
+          <p:cNvSpPr txBox="1"/>
+          <p:nvPr/>
+        </p:nvSpPr>
+        <p:spPr>
+          <a:xfrm>
+            <a:off x="8183879" y="2258568"/>
+            <a:ext cx="731520" cy="237744"/>
+          </a:xfrm>
+          <a:prstGeom prst="rect">
+            <a:avLst/>
+          </a:prstGeom>
+          <a:noFill/>
+        </p:spPr>
+        <p:txBody>
+          <a:bodyPr wrap="square">
+            <a:spAutoFit/>
+          </a:bodyPr>
+          <a:lstStyle/>
+          <a:p>
+            <a:pPr algn="l">
+              <a:defRPr sz="800" b="0">
+                <a:solidFill>
+                  <a:srgbClr val="333333"/>
+                </a:solidFill>
+              </a:defRPr>
+            </a:pPr>
+            <a:r>
+              <a:t>1 (PT)</a:t>
+            </a:r>
+          </a:p>
+        </p:txBody>
+      </p:sp>
+      <p:sp>
+        <p:nvSpPr>
+          <p:cNvPr id="107" name="TextBox 106"/>
+          <p:cNvSpPr txBox="1"/>
+          <p:nvPr/>
+        </p:nvSpPr>
+        <p:spPr>
+          <a:xfrm>
+            <a:off x="8961120" y="2258568"/>
+            <a:ext cx="457200" cy="237744"/>
+          </a:xfrm>
+          <a:prstGeom prst="rect">
+            <a:avLst/>
+          </a:prstGeom>
+          <a:noFill/>
+        </p:spPr>
+        <p:txBody>
+          <a:bodyPr wrap="square">
+            <a:spAutoFit/>
+          </a:bodyPr>
+          <a:lstStyle/>
+          <a:p>
+            <a:pPr algn="l">
+              <a:defRPr sz="800" b="0">
+                <a:solidFill>
+                  <a:srgbClr val="D52B1E"/>
+                </a:solidFill>
+              </a:defRPr>
+            </a:pPr>
+            <a:r>
+              <a:t>On</a:t>
+            </a:r>
+          </a:p>
+        </p:txBody>
+      </p:sp>
+      <p:sp>
+        <p:nvSpPr>
+          <p:cNvPr id="108" name="TextBox 107"/>
+          <p:cNvSpPr txBox="1"/>
+          <p:nvPr/>
+        </p:nvSpPr>
+        <p:spPr>
+          <a:xfrm>
+            <a:off x="9464040" y="2258568"/>
+            <a:ext cx="502920" cy="237744"/>
+          </a:xfrm>
+          <a:prstGeom prst="rect">
+            <a:avLst/>
+          </a:prstGeom>
+          <a:noFill/>
+        </p:spPr>
+        <p:txBody>
+          <a:bodyPr wrap="square">
+            <a:spAutoFit/>
+          </a:bodyPr>
+          <a:lstStyle/>
+          <a:p>
+            <a:pPr algn="l">
+              <a:defRPr sz="800" b="0">
+                <a:solidFill>
+                  <a:srgbClr val="333333"/>
+                </a:solidFill>
+              </a:defRPr>
+            </a:pPr>
+            <a:r>
+              <a:t>$160</a:t>
+            </a:r>
+          </a:p>
+        </p:txBody>
+      </p:sp>
+      <p:sp>
+        <p:nvSpPr>
+          <p:cNvPr id="109" name="TextBox 108"/>
+          <p:cNvSpPr txBox="1"/>
+          <p:nvPr/>
+        </p:nvSpPr>
+        <p:spPr>
+          <a:xfrm>
+            <a:off x="10012680" y="2258568"/>
+            <a:ext cx="685800" cy="237744"/>
+          </a:xfrm>
+          <a:prstGeom prst="rect">
+            <a:avLst/>
+          </a:prstGeom>
+          <a:noFill/>
+        </p:spPr>
+        <p:txBody>
+          <a:bodyPr wrap="square">
+            <a:spAutoFit/>
+          </a:bodyPr>
+          <a:lstStyle/>
+          <a:p>
+            <a:pPr algn="l">
+              <a:defRPr sz="800" b="0">
+                <a:solidFill>
+                  <a:srgbClr val="333333"/>
+                </a:solidFill>
+              </a:defRPr>
+            </a:pPr>
+            <a:r>
+              <a:t>4 wks</a:t>
+            </a:r>
+          </a:p>
+        </p:txBody>
+      </p:sp>
+      <p:sp>
+        <p:nvSpPr>
+          <p:cNvPr id="110" name="TextBox 109"/>
+          <p:cNvSpPr txBox="1"/>
+          <p:nvPr/>
+        </p:nvSpPr>
+        <p:spPr>
+          <a:xfrm>
+            <a:off x="10744200" y="2258568"/>
+            <a:ext cx="914400" cy="237744"/>
+          </a:xfrm>
+          <a:prstGeom prst="rect">
+            <a:avLst/>
+          </a:prstGeom>
+          <a:noFill/>
+        </p:spPr>
+        <p:txBody>
+          <a:bodyPr wrap="square">
+            <a:spAutoFit/>
+          </a:bodyPr>
+          <a:lstStyle/>
+          <a:p>
+            <a:pPr algn="l">
+              <a:defRPr sz="800" b="0">
+                <a:solidFill>
+                  <a:srgbClr val="333333"/>
+                </a:solidFill>
+              </a:defRPr>
+            </a:pPr>
+            <a:r>
+              <a:t>$26K</a:t>
+            </a:r>
+          </a:p>
+        </p:txBody>
+      </p:sp>
+      <p:sp>
+        <p:nvSpPr>
+          <p:cNvPr id="111" name="Rectangle 110"/>
+          <p:cNvSpPr/>
+          <p:nvPr/>
+        </p:nvSpPr>
+        <p:spPr>
+          <a:xfrm>
+            <a:off x="6217920" y="2505456"/>
+            <a:ext cx="5486400" cy="246888"/>
+          </a:xfrm>
+          <a:prstGeom prst="rect">
+            <a:avLst/>
+          </a:prstGeom>
+          <a:solidFill>
+            <a:srgbClr val="F5F5F5"/>
+          </a:solidFill>
+          <a:ln>
+            <a:noFill/>
+          </a:ln>
+        </p:spPr>
+        <p:style>
+          <a:lnRef idx="1">
+            <a:schemeClr val="accent1"/>
+          </a:lnRef>
+          <a:fillRef idx="3">
+            <a:schemeClr val="accent1"/>
+          </a:fillRef>
+          <a:effectRef idx="2">
+            <a:schemeClr val="accent1"/>
+          </a:effectRef>
+          <a:fontRef idx="minor">
+            <a:schemeClr val="lt1"/>
+          </a:fontRef>
+        </p:style>
+        <p:txBody>
+          <a:bodyPr rtlCol="0" anchor="ctr"/>
+          <a:lstStyle/>
+          <a:p>
+            <a:pPr algn="ctr"/>
+          </a:p>
+        </p:txBody>
+      </p:sp>
+      <p:sp>
+        <p:nvSpPr>
+          <p:cNvPr id="112" name="TextBox 111"/>
+          <p:cNvSpPr txBox="1"/>
+          <p:nvPr/>
+        </p:nvSpPr>
+        <p:spPr>
+          <a:xfrm>
+            <a:off x="6309360" y="2505456"/>
+            <a:ext cx="1828800" cy="237744"/>
+          </a:xfrm>
+          <a:prstGeom prst="rect">
+            <a:avLst/>
+          </a:prstGeom>
+          <a:noFill/>
+        </p:spPr>
+        <p:txBody>
+          <a:bodyPr wrap="square">
+            <a:spAutoFit/>
+          </a:bodyPr>
+          <a:lstStyle/>
+          <a:p>
+            <a:pPr algn="l">
+              <a:defRPr sz="800" b="0">
+                <a:solidFill>
+                  <a:srgbClr val="333333"/>
+                </a:solidFill>
+              </a:defRPr>
+            </a:pPr>
+            <a:r>
+              <a:t>Solution Architect</a:t>
+            </a:r>
+          </a:p>
+        </p:txBody>
+      </p:sp>
+      <p:sp>
+        <p:nvSpPr>
+          <p:cNvPr id="113" name="TextBox 112"/>
+          <p:cNvSpPr txBox="1"/>
+          <p:nvPr/>
+        </p:nvSpPr>
+        <p:spPr>
+          <a:xfrm>
+            <a:off x="8183879" y="2505456"/>
+            <a:ext cx="731520" cy="237744"/>
+          </a:xfrm>
+          <a:prstGeom prst="rect">
+            <a:avLst/>
+          </a:prstGeom>
+          <a:noFill/>
+        </p:spPr>
+        <p:txBody>
+          <a:bodyPr wrap="square">
+            <a:spAutoFit/>
+          </a:bodyPr>
+          <a:lstStyle/>
+          <a:p>
+            <a:pPr algn="l">
+              <a:defRPr sz="800" b="0">
+                <a:solidFill>
+                  <a:srgbClr val="333333"/>
+                </a:solidFill>
+              </a:defRPr>
+            </a:pPr>
+            <a:r>
               <a:t>1</a:t>
             </a:r>
           </a:p>
@@ -7707,664 +9195,1229 @@
       </p:sp>
       <p:sp>
         <p:nvSpPr>
-          <p:cNvPr id="74" name="TextBox 73"/>
-          <p:cNvSpPr txBox="1"/>
-          <p:nvPr/>
-        </p:nvSpPr>
-        <p:spPr>
-          <a:xfrm>
-            <a:off x="9418320" y="2377440"/>
-            <a:ext cx="1005840" cy="274320"/>
-          </a:xfrm>
-          <a:prstGeom prst="rect">
-            <a:avLst/>
-          </a:prstGeom>
-          <a:noFill/>
-        </p:spPr>
-        <p:txBody>
-          <a:bodyPr wrap="square">
-            <a:spAutoFit/>
-          </a:bodyPr>
-          <a:lstStyle/>
-          <a:p>
-            <a:pPr algn="l">
-              <a:defRPr sz="1000" b="0">
+          <p:cNvPr id="114" name="TextBox 113"/>
+          <p:cNvSpPr txBox="1"/>
+          <p:nvPr/>
+        </p:nvSpPr>
+        <p:spPr>
+          <a:xfrm>
+            <a:off x="8961120" y="2505456"/>
+            <a:ext cx="457200" cy="237744"/>
+          </a:xfrm>
+          <a:prstGeom prst="rect">
+            <a:avLst/>
+          </a:prstGeom>
+          <a:noFill/>
+        </p:spPr>
+        <p:txBody>
+          <a:bodyPr wrap="square">
+            <a:spAutoFit/>
+          </a:bodyPr>
+          <a:lstStyle/>
+          <a:p>
+            <a:pPr algn="l">
+              <a:defRPr sz="800" b="0">
+                <a:solidFill>
+                  <a:srgbClr val="D52B1E"/>
+                </a:solidFill>
+              </a:defRPr>
+            </a:pPr>
+            <a:r>
+              <a:t>On</a:t>
+            </a:r>
+          </a:p>
+        </p:txBody>
+      </p:sp>
+      <p:sp>
+        <p:nvSpPr>
+          <p:cNvPr id="115" name="TextBox 114"/>
+          <p:cNvSpPr txBox="1"/>
+          <p:nvPr/>
+        </p:nvSpPr>
+        <p:spPr>
+          <a:xfrm>
+            <a:off x="9464040" y="2505456"/>
+            <a:ext cx="502920" cy="237744"/>
+          </a:xfrm>
+          <a:prstGeom prst="rect">
+            <a:avLst/>
+          </a:prstGeom>
+          <a:noFill/>
+        </p:spPr>
+        <p:txBody>
+          <a:bodyPr wrap="square">
+            <a:spAutoFit/>
+          </a:bodyPr>
+          <a:lstStyle/>
+          <a:p>
+            <a:pPr algn="l">
+              <a:defRPr sz="800" b="0">
                 <a:solidFill>
                   <a:srgbClr val="333333"/>
                 </a:solidFill>
               </a:defRPr>
             </a:pPr>
             <a:r>
-              <a:t>8-13 weeks</a:t>
-            </a:r>
-          </a:p>
-        </p:txBody>
-      </p:sp>
-      <p:sp>
-        <p:nvSpPr>
-          <p:cNvPr id="75" name="TextBox 74"/>
-          <p:cNvSpPr txBox="1"/>
-          <p:nvPr/>
-        </p:nvSpPr>
-        <p:spPr>
-          <a:xfrm>
-            <a:off x="10515600" y="2377440"/>
-            <a:ext cx="1097280" cy="274320"/>
-          </a:xfrm>
-          <a:prstGeom prst="rect">
-            <a:avLst/>
-          </a:prstGeom>
-          <a:noFill/>
-        </p:spPr>
-        <p:txBody>
-          <a:bodyPr wrap="square">
-            <a:spAutoFit/>
-          </a:bodyPr>
-          <a:lstStyle/>
-          <a:p>
-            <a:pPr algn="l">
-              <a:defRPr sz="1000" b="0">
+              <a:t>$190</a:t>
+            </a:r>
+          </a:p>
+        </p:txBody>
+      </p:sp>
+      <p:sp>
+        <p:nvSpPr>
+          <p:cNvPr id="116" name="TextBox 115"/>
+          <p:cNvSpPr txBox="1"/>
+          <p:nvPr/>
+        </p:nvSpPr>
+        <p:spPr>
+          <a:xfrm>
+            <a:off x="10012680" y="2505456"/>
+            <a:ext cx="685800" cy="237744"/>
+          </a:xfrm>
+          <a:prstGeom prst="rect">
+            <a:avLst/>
+          </a:prstGeom>
+          <a:noFill/>
+        </p:spPr>
+        <p:txBody>
+          <a:bodyPr wrap="square">
+            <a:spAutoFit/>
+          </a:bodyPr>
+          <a:lstStyle/>
+          <a:p>
+            <a:pPr algn="l">
+              <a:defRPr sz="800" b="0">
                 <a:solidFill>
                   <a:srgbClr val="333333"/>
                 </a:solidFill>
               </a:defRPr>
             </a:pPr>
             <a:r>
-              <a:t>$90K-130K</a:t>
-            </a:r>
-          </a:p>
-        </p:txBody>
-      </p:sp>
-      <p:sp>
-        <p:nvSpPr>
-          <p:cNvPr id="76" name="TextBox 75"/>
-          <p:cNvSpPr txBox="1"/>
-          <p:nvPr/>
-        </p:nvSpPr>
-        <p:spPr>
-          <a:xfrm>
-            <a:off x="6309360" y="2697480"/>
-            <a:ext cx="2011680" cy="274320"/>
-          </a:xfrm>
-          <a:prstGeom prst="rect">
-            <a:avLst/>
-          </a:prstGeom>
-          <a:noFill/>
-        </p:spPr>
-        <p:txBody>
-          <a:bodyPr wrap="square">
-            <a:spAutoFit/>
-          </a:bodyPr>
-          <a:lstStyle/>
-          <a:p>
-            <a:pPr algn="l">
-              <a:defRPr sz="1000" b="0">
+              <a:t>6 wks</a:t>
+            </a:r>
+          </a:p>
+        </p:txBody>
+      </p:sp>
+      <p:sp>
+        <p:nvSpPr>
+          <p:cNvPr id="117" name="TextBox 116"/>
+          <p:cNvSpPr txBox="1"/>
+          <p:nvPr/>
+        </p:nvSpPr>
+        <p:spPr>
+          <a:xfrm>
+            <a:off x="10744200" y="2505456"/>
+            <a:ext cx="914400" cy="237744"/>
+          </a:xfrm>
+          <a:prstGeom prst="rect">
+            <a:avLst/>
+          </a:prstGeom>
+          <a:noFill/>
+        </p:spPr>
+        <p:txBody>
+          <a:bodyPr wrap="square">
+            <a:spAutoFit/>
+          </a:bodyPr>
+          <a:lstStyle/>
+          <a:p>
+            <a:pPr algn="l">
+              <a:defRPr sz="800" b="0">
+                <a:solidFill>
+                  <a:srgbClr val="333333"/>
+                </a:solidFill>
+              </a:defRPr>
+            </a:pPr>
+            <a:r>
+              <a:t>$46K</a:t>
+            </a:r>
+          </a:p>
+        </p:txBody>
+      </p:sp>
+      <p:sp>
+        <p:nvSpPr>
+          <p:cNvPr id="118" name="Rectangle 117"/>
+          <p:cNvSpPr/>
+          <p:nvPr/>
+        </p:nvSpPr>
+        <p:spPr>
+          <a:xfrm>
+            <a:off x="6217920" y="2752344"/>
+            <a:ext cx="5486400" cy="246888"/>
+          </a:xfrm>
+          <a:prstGeom prst="rect">
+            <a:avLst/>
+          </a:prstGeom>
+          <a:solidFill>
+            <a:srgbClr val="FFFFFF"/>
+          </a:solidFill>
+          <a:ln>
+            <a:noFill/>
+          </a:ln>
+        </p:spPr>
+        <p:style>
+          <a:lnRef idx="1">
+            <a:schemeClr val="accent1"/>
+          </a:lnRef>
+          <a:fillRef idx="3">
+            <a:schemeClr val="accent1"/>
+          </a:fillRef>
+          <a:effectRef idx="2">
+            <a:schemeClr val="accent1"/>
+          </a:effectRef>
+          <a:fontRef idx="minor">
+            <a:schemeClr val="lt1"/>
+          </a:fontRef>
+        </p:style>
+        <p:txBody>
+          <a:bodyPr rtlCol="0" anchor="ctr"/>
+          <a:lstStyle/>
+          <a:p>
+            <a:pPr algn="ctr"/>
+          </a:p>
+        </p:txBody>
+      </p:sp>
+      <p:sp>
+        <p:nvSpPr>
+          <p:cNvPr id="119" name="TextBox 118"/>
+          <p:cNvSpPr txBox="1"/>
+          <p:nvPr/>
+        </p:nvSpPr>
+        <p:spPr>
+          <a:xfrm>
+            <a:off x="6309360" y="2752344"/>
+            <a:ext cx="1828800" cy="237744"/>
+          </a:xfrm>
+          <a:prstGeom prst="rect">
+            <a:avLst/>
+          </a:prstGeom>
+          <a:noFill/>
+        </p:spPr>
+        <p:txBody>
+          <a:bodyPr wrap="square">
+            <a:spAutoFit/>
+          </a:bodyPr>
+          <a:lstStyle/>
+          <a:p>
+            <a:pPr algn="l">
+              <a:defRPr sz="800" b="0">
+                <a:solidFill>
+                  <a:srgbClr val="333333"/>
+                </a:solidFill>
+              </a:defRPr>
+            </a:pPr>
+            <a:r>
+              <a:t>Sr Full-Stack Engineer</a:t>
+            </a:r>
+          </a:p>
+        </p:txBody>
+      </p:sp>
+      <p:sp>
+        <p:nvSpPr>
+          <p:cNvPr id="120" name="TextBox 119"/>
+          <p:cNvSpPr txBox="1"/>
+          <p:nvPr/>
+        </p:nvSpPr>
+        <p:spPr>
+          <a:xfrm>
+            <a:off x="8183879" y="2752344"/>
+            <a:ext cx="731520" cy="237744"/>
+          </a:xfrm>
+          <a:prstGeom prst="rect">
+            <a:avLst/>
+          </a:prstGeom>
+          <a:noFill/>
+        </p:spPr>
+        <p:txBody>
+          <a:bodyPr wrap="square">
+            <a:spAutoFit/>
+          </a:bodyPr>
+          <a:lstStyle/>
+          <a:p>
+            <a:pPr algn="l">
+              <a:defRPr sz="800" b="0">
+                <a:solidFill>
+                  <a:srgbClr val="333333"/>
+                </a:solidFill>
+              </a:defRPr>
+            </a:pPr>
+            <a:r>
+              <a:t>1</a:t>
+            </a:r>
+          </a:p>
+        </p:txBody>
+      </p:sp>
+      <p:sp>
+        <p:nvSpPr>
+          <p:cNvPr id="121" name="TextBox 120"/>
+          <p:cNvSpPr txBox="1"/>
+          <p:nvPr/>
+        </p:nvSpPr>
+        <p:spPr>
+          <a:xfrm>
+            <a:off x="8961120" y="2752344"/>
+            <a:ext cx="457200" cy="237744"/>
+          </a:xfrm>
+          <a:prstGeom prst="rect">
+            <a:avLst/>
+          </a:prstGeom>
+          <a:noFill/>
+        </p:spPr>
+        <p:txBody>
+          <a:bodyPr wrap="square">
+            <a:spAutoFit/>
+          </a:bodyPr>
+          <a:lstStyle/>
+          <a:p>
+            <a:pPr algn="l">
+              <a:defRPr sz="800" b="0">
+                <a:solidFill>
+                  <a:srgbClr val="1565C0"/>
+                </a:solidFill>
+              </a:defRPr>
+            </a:pPr>
+            <a:r>
+              <a:t>Off</a:t>
+            </a:r>
+          </a:p>
+        </p:txBody>
+      </p:sp>
+      <p:sp>
+        <p:nvSpPr>
+          <p:cNvPr id="122" name="TextBox 121"/>
+          <p:cNvSpPr txBox="1"/>
+          <p:nvPr/>
+        </p:nvSpPr>
+        <p:spPr>
+          <a:xfrm>
+            <a:off x="9464040" y="2752344"/>
+            <a:ext cx="502920" cy="237744"/>
+          </a:xfrm>
+          <a:prstGeom prst="rect">
+            <a:avLst/>
+          </a:prstGeom>
+          <a:noFill/>
+        </p:spPr>
+        <p:txBody>
+          <a:bodyPr wrap="square">
+            <a:spAutoFit/>
+          </a:bodyPr>
+          <a:lstStyle/>
+          <a:p>
+            <a:pPr algn="l">
+              <a:defRPr sz="800" b="0">
+                <a:solidFill>
+                  <a:srgbClr val="333333"/>
+                </a:solidFill>
+              </a:defRPr>
+            </a:pPr>
+            <a:r>
+              <a:t>$130</a:t>
+            </a:r>
+          </a:p>
+        </p:txBody>
+      </p:sp>
+      <p:sp>
+        <p:nvSpPr>
+          <p:cNvPr id="123" name="TextBox 122"/>
+          <p:cNvSpPr txBox="1"/>
+          <p:nvPr/>
+        </p:nvSpPr>
+        <p:spPr>
+          <a:xfrm>
+            <a:off x="10012680" y="2752344"/>
+            <a:ext cx="685800" cy="237744"/>
+          </a:xfrm>
+          <a:prstGeom prst="rect">
+            <a:avLst/>
+          </a:prstGeom>
+          <a:noFill/>
+        </p:spPr>
+        <p:txBody>
+          <a:bodyPr wrap="square">
+            <a:spAutoFit/>
+          </a:bodyPr>
+          <a:lstStyle/>
+          <a:p>
+            <a:pPr algn="l">
+              <a:defRPr sz="800" b="0">
+                <a:solidFill>
+                  <a:srgbClr val="333333"/>
+                </a:solidFill>
+              </a:defRPr>
+            </a:pPr>
+            <a:r>
+              <a:t>12 wks</a:t>
+            </a:r>
+          </a:p>
+        </p:txBody>
+      </p:sp>
+      <p:sp>
+        <p:nvSpPr>
+          <p:cNvPr id="124" name="TextBox 123"/>
+          <p:cNvSpPr txBox="1"/>
+          <p:nvPr/>
+        </p:nvSpPr>
+        <p:spPr>
+          <a:xfrm>
+            <a:off x="10744200" y="2752344"/>
+            <a:ext cx="914400" cy="237744"/>
+          </a:xfrm>
+          <a:prstGeom prst="rect">
+            <a:avLst/>
+          </a:prstGeom>
+          <a:noFill/>
+        </p:spPr>
+        <p:txBody>
+          <a:bodyPr wrap="square">
+            <a:spAutoFit/>
+          </a:bodyPr>
+          <a:lstStyle/>
+          <a:p>
+            <a:pPr algn="l">
+              <a:defRPr sz="800" b="0">
+                <a:solidFill>
+                  <a:srgbClr val="333333"/>
+                </a:solidFill>
+              </a:defRPr>
+            </a:pPr>
+            <a:r>
+              <a:t>$62K</a:t>
+            </a:r>
+          </a:p>
+        </p:txBody>
+      </p:sp>
+      <p:sp>
+        <p:nvSpPr>
+          <p:cNvPr id="125" name="Rectangle 124"/>
+          <p:cNvSpPr/>
+          <p:nvPr/>
+        </p:nvSpPr>
+        <p:spPr>
+          <a:xfrm>
+            <a:off x="6217920" y="2999232"/>
+            <a:ext cx="5486400" cy="246888"/>
+          </a:xfrm>
+          <a:prstGeom prst="rect">
+            <a:avLst/>
+          </a:prstGeom>
+          <a:solidFill>
+            <a:srgbClr val="F5F5F5"/>
+          </a:solidFill>
+          <a:ln>
+            <a:noFill/>
+          </a:ln>
+        </p:spPr>
+        <p:style>
+          <a:lnRef idx="1">
+            <a:schemeClr val="accent1"/>
+          </a:lnRef>
+          <a:fillRef idx="3">
+            <a:schemeClr val="accent1"/>
+          </a:fillRef>
+          <a:effectRef idx="2">
+            <a:schemeClr val="accent1"/>
+          </a:effectRef>
+          <a:fontRef idx="minor">
+            <a:schemeClr val="lt1"/>
+          </a:fontRef>
+        </p:style>
+        <p:txBody>
+          <a:bodyPr rtlCol="0" anchor="ctr"/>
+          <a:lstStyle/>
+          <a:p>
+            <a:pPr algn="ctr"/>
+          </a:p>
+        </p:txBody>
+      </p:sp>
+      <p:sp>
+        <p:nvSpPr>
+          <p:cNvPr id="126" name="TextBox 125"/>
+          <p:cNvSpPr txBox="1"/>
+          <p:nvPr/>
+        </p:nvSpPr>
+        <p:spPr>
+          <a:xfrm>
+            <a:off x="6309360" y="2999232"/>
+            <a:ext cx="1828800" cy="237744"/>
+          </a:xfrm>
+          <a:prstGeom prst="rect">
+            <a:avLst/>
+          </a:prstGeom>
+          <a:noFill/>
+        </p:spPr>
+        <p:txBody>
+          <a:bodyPr wrap="square">
+            <a:spAutoFit/>
+          </a:bodyPr>
+          <a:lstStyle/>
+          <a:p>
+            <a:pPr algn="l">
+              <a:defRPr sz="800" b="0">
+                <a:solidFill>
+                  <a:srgbClr val="333333"/>
+                </a:solidFill>
+              </a:defRPr>
+            </a:pPr>
+            <a:r>
+              <a:t>Sr Mobile Engineer</a:t>
+            </a:r>
+          </a:p>
+        </p:txBody>
+      </p:sp>
+      <p:sp>
+        <p:nvSpPr>
+          <p:cNvPr id="127" name="TextBox 126"/>
+          <p:cNvSpPr txBox="1"/>
+          <p:nvPr/>
+        </p:nvSpPr>
+        <p:spPr>
+          <a:xfrm>
+            <a:off x="8183879" y="2999232"/>
+            <a:ext cx="731520" cy="237744"/>
+          </a:xfrm>
+          <a:prstGeom prst="rect">
+            <a:avLst/>
+          </a:prstGeom>
+          <a:noFill/>
+        </p:spPr>
+        <p:txBody>
+          <a:bodyPr wrap="square">
+            <a:spAutoFit/>
+          </a:bodyPr>
+          <a:lstStyle/>
+          <a:p>
+            <a:pPr algn="l">
+              <a:defRPr sz="800" b="0">
+                <a:solidFill>
+                  <a:srgbClr val="333333"/>
+                </a:solidFill>
+              </a:defRPr>
+            </a:pPr>
+            <a:r>
+              <a:t>1</a:t>
+            </a:r>
+          </a:p>
+        </p:txBody>
+      </p:sp>
+      <p:sp>
+        <p:nvSpPr>
+          <p:cNvPr id="128" name="TextBox 127"/>
+          <p:cNvSpPr txBox="1"/>
+          <p:nvPr/>
+        </p:nvSpPr>
+        <p:spPr>
+          <a:xfrm>
+            <a:off x="8961120" y="2999232"/>
+            <a:ext cx="457200" cy="237744"/>
+          </a:xfrm>
+          <a:prstGeom prst="rect">
+            <a:avLst/>
+          </a:prstGeom>
+          <a:noFill/>
+        </p:spPr>
+        <p:txBody>
+          <a:bodyPr wrap="square">
+            <a:spAutoFit/>
+          </a:bodyPr>
+          <a:lstStyle/>
+          <a:p>
+            <a:pPr algn="l">
+              <a:defRPr sz="800" b="0">
+                <a:solidFill>
+                  <a:srgbClr val="1565C0"/>
+                </a:solidFill>
+              </a:defRPr>
+            </a:pPr>
+            <a:r>
+              <a:t>Off</a:t>
+            </a:r>
+          </a:p>
+        </p:txBody>
+      </p:sp>
+      <p:sp>
+        <p:nvSpPr>
+          <p:cNvPr id="129" name="TextBox 128"/>
+          <p:cNvSpPr txBox="1"/>
+          <p:nvPr/>
+        </p:nvSpPr>
+        <p:spPr>
+          <a:xfrm>
+            <a:off x="9464040" y="2999232"/>
+            <a:ext cx="502920" cy="237744"/>
+          </a:xfrm>
+          <a:prstGeom prst="rect">
+            <a:avLst/>
+          </a:prstGeom>
+          <a:noFill/>
+        </p:spPr>
+        <p:txBody>
+          <a:bodyPr wrap="square">
+            <a:spAutoFit/>
+          </a:bodyPr>
+          <a:lstStyle/>
+          <a:p>
+            <a:pPr algn="l">
+              <a:defRPr sz="800" b="0">
+                <a:solidFill>
+                  <a:srgbClr val="333333"/>
+                </a:solidFill>
+              </a:defRPr>
+            </a:pPr>
+            <a:r>
+              <a:t>$130</a:t>
+            </a:r>
+          </a:p>
+        </p:txBody>
+      </p:sp>
+      <p:sp>
+        <p:nvSpPr>
+          <p:cNvPr id="130" name="TextBox 129"/>
+          <p:cNvSpPr txBox="1"/>
+          <p:nvPr/>
+        </p:nvSpPr>
+        <p:spPr>
+          <a:xfrm>
+            <a:off x="10012680" y="2999232"/>
+            <a:ext cx="685800" cy="237744"/>
+          </a:xfrm>
+          <a:prstGeom prst="rect">
+            <a:avLst/>
+          </a:prstGeom>
+          <a:noFill/>
+        </p:spPr>
+        <p:txBody>
+          <a:bodyPr wrap="square">
+            <a:spAutoFit/>
+          </a:bodyPr>
+          <a:lstStyle/>
+          <a:p>
+            <a:pPr algn="l">
+              <a:defRPr sz="800" b="0">
+                <a:solidFill>
+                  <a:srgbClr val="333333"/>
+                </a:solidFill>
+              </a:defRPr>
+            </a:pPr>
+            <a:r>
+              <a:t>10 wks</a:t>
+            </a:r>
+          </a:p>
+        </p:txBody>
+      </p:sp>
+      <p:sp>
+        <p:nvSpPr>
+          <p:cNvPr id="131" name="TextBox 130"/>
+          <p:cNvSpPr txBox="1"/>
+          <p:nvPr/>
+        </p:nvSpPr>
+        <p:spPr>
+          <a:xfrm>
+            <a:off x="10744200" y="2999232"/>
+            <a:ext cx="914400" cy="237744"/>
+          </a:xfrm>
+          <a:prstGeom prst="rect">
+            <a:avLst/>
+          </a:prstGeom>
+          <a:noFill/>
+        </p:spPr>
+        <p:txBody>
+          <a:bodyPr wrap="square">
+            <a:spAutoFit/>
+          </a:bodyPr>
+          <a:lstStyle/>
+          <a:p>
+            <a:pPr algn="l">
+              <a:defRPr sz="800" b="0">
+                <a:solidFill>
+                  <a:srgbClr val="333333"/>
+                </a:solidFill>
+              </a:defRPr>
+            </a:pPr>
+            <a:r>
+              <a:t>$52K</a:t>
+            </a:r>
+          </a:p>
+        </p:txBody>
+      </p:sp>
+      <p:sp>
+        <p:nvSpPr>
+          <p:cNvPr id="132" name="Rectangle 131"/>
+          <p:cNvSpPr/>
+          <p:nvPr/>
+        </p:nvSpPr>
+        <p:spPr>
+          <a:xfrm>
+            <a:off x="6217920" y="3246120"/>
+            <a:ext cx="5486400" cy="246888"/>
+          </a:xfrm>
+          <a:prstGeom prst="rect">
+            <a:avLst/>
+          </a:prstGeom>
+          <a:solidFill>
+            <a:srgbClr val="FFFFFF"/>
+          </a:solidFill>
+          <a:ln>
+            <a:noFill/>
+          </a:ln>
+        </p:spPr>
+        <p:style>
+          <a:lnRef idx="1">
+            <a:schemeClr val="accent1"/>
+          </a:lnRef>
+          <a:fillRef idx="3">
+            <a:schemeClr val="accent1"/>
+          </a:fillRef>
+          <a:effectRef idx="2">
+            <a:schemeClr val="accent1"/>
+          </a:effectRef>
+          <a:fontRef idx="minor">
+            <a:schemeClr val="lt1"/>
+          </a:fontRef>
+        </p:style>
+        <p:txBody>
+          <a:bodyPr rtlCol="0" anchor="ctr"/>
+          <a:lstStyle/>
+          <a:p>
+            <a:pPr algn="ctr"/>
+          </a:p>
+        </p:txBody>
+      </p:sp>
+      <p:sp>
+        <p:nvSpPr>
+          <p:cNvPr id="133" name="TextBox 132"/>
+          <p:cNvSpPr txBox="1"/>
+          <p:nvPr/>
+        </p:nvSpPr>
+        <p:spPr>
+          <a:xfrm>
+            <a:off x="6309360" y="3246120"/>
+            <a:ext cx="1828800" cy="237744"/>
+          </a:xfrm>
+          <a:prstGeom prst="rect">
+            <a:avLst/>
+          </a:prstGeom>
+          <a:noFill/>
+        </p:spPr>
+        <p:txBody>
+          <a:bodyPr wrap="square">
+            <a:spAutoFit/>
+          </a:bodyPr>
+          <a:lstStyle/>
+          <a:p>
+            <a:pPr algn="l">
+              <a:defRPr sz="800" b="1">
                 <a:solidFill>
                   <a:srgbClr val="D52B1E"/>
                 </a:solidFill>
               </a:defRPr>
             </a:pPr>
             <a:r>
-              <a:t>AI Agent Cluster (Backend)</a:t>
-            </a:r>
-          </a:p>
-        </p:txBody>
-      </p:sp>
-      <p:sp>
-        <p:nvSpPr>
-          <p:cNvPr id="77" name="TextBox 76"/>
-          <p:cNvSpPr txBox="1"/>
-          <p:nvPr/>
-        </p:nvSpPr>
-        <p:spPr>
-          <a:xfrm>
-            <a:off x="8412480" y="2697480"/>
-            <a:ext cx="914400" cy="274320"/>
-          </a:xfrm>
-          <a:prstGeom prst="rect">
-            <a:avLst/>
-          </a:prstGeom>
-          <a:noFill/>
-        </p:spPr>
-        <p:txBody>
-          <a:bodyPr wrap="square">
-            <a:spAutoFit/>
-          </a:bodyPr>
-          <a:lstStyle/>
-          <a:p>
-            <a:pPr algn="l">
-              <a:defRPr sz="1000" b="0">
+              <a:t>AI Agent Cluster (Dev)</a:t>
+            </a:r>
+          </a:p>
+        </p:txBody>
+      </p:sp>
+      <p:sp>
+        <p:nvSpPr>
+          <p:cNvPr id="134" name="TextBox 133"/>
+          <p:cNvSpPr txBox="1"/>
+          <p:nvPr/>
+        </p:nvSpPr>
+        <p:spPr>
+          <a:xfrm>
+            <a:off x="8183879" y="3246120"/>
+            <a:ext cx="731520" cy="237744"/>
+          </a:xfrm>
+          <a:prstGeom prst="rect">
+            <a:avLst/>
+          </a:prstGeom>
+          <a:noFill/>
+        </p:spPr>
+        <p:txBody>
+          <a:bodyPr wrap="square">
+            <a:spAutoFit/>
+          </a:bodyPr>
+          <a:lstStyle/>
+          <a:p>
+            <a:pPr algn="l">
+              <a:defRPr sz="800" b="1">
                 <a:solidFill>
                   <a:srgbClr val="D52B1E"/>
                 </a:solidFill>
               </a:defRPr>
             </a:pPr>
             <a:r>
-              <a:t>3-5 agents</a:t>
-            </a:r>
-          </a:p>
-        </p:txBody>
-      </p:sp>
-      <p:sp>
-        <p:nvSpPr>
-          <p:cNvPr id="78" name="TextBox 77"/>
-          <p:cNvSpPr txBox="1"/>
-          <p:nvPr/>
-        </p:nvSpPr>
-        <p:spPr>
-          <a:xfrm>
-            <a:off x="9418320" y="2697480"/>
-            <a:ext cx="1005840" cy="274320"/>
-          </a:xfrm>
-          <a:prstGeom prst="rect">
-            <a:avLst/>
-          </a:prstGeom>
-          <a:noFill/>
-        </p:spPr>
-        <p:txBody>
-          <a:bodyPr wrap="square">
-            <a:spAutoFit/>
-          </a:bodyPr>
-          <a:lstStyle/>
-          <a:p>
-            <a:pPr algn="l">
-              <a:defRPr sz="1000" b="0">
+              <a:t>5-8 agents</a:t>
+            </a:r>
+          </a:p>
+        </p:txBody>
+      </p:sp>
+      <p:sp>
+        <p:nvSpPr>
+          <p:cNvPr id="135" name="TextBox 134"/>
+          <p:cNvSpPr txBox="1"/>
+          <p:nvPr/>
+        </p:nvSpPr>
+        <p:spPr>
+          <a:xfrm>
+            <a:off x="8961120" y="3246120"/>
+            <a:ext cx="457200" cy="237744"/>
+          </a:xfrm>
+          <a:prstGeom prst="rect">
+            <a:avLst/>
+          </a:prstGeom>
+          <a:noFill/>
+        </p:spPr>
+        <p:txBody>
+          <a:bodyPr wrap="square">
+            <a:spAutoFit/>
+          </a:bodyPr>
+          <a:lstStyle/>
+          <a:p>
+            <a:pPr algn="l">
+              <a:defRPr sz="800" b="1">
                 <a:solidFill>
                   <a:srgbClr val="D52B1E"/>
                 </a:solidFill>
               </a:defRPr>
             </a:pPr>
             <a:r>
-              <a:t>3-4 weeks</a:t>
-            </a:r>
-          </a:p>
-        </p:txBody>
-      </p:sp>
-      <p:sp>
-        <p:nvSpPr>
-          <p:cNvPr id="79" name="TextBox 78"/>
-          <p:cNvSpPr txBox="1"/>
-          <p:nvPr/>
-        </p:nvSpPr>
-        <p:spPr>
-          <a:xfrm>
-            <a:off x="10515600" y="2697480"/>
-            <a:ext cx="1097280" cy="274320"/>
-          </a:xfrm>
-          <a:prstGeom prst="rect">
-            <a:avLst/>
-          </a:prstGeom>
-          <a:noFill/>
-        </p:spPr>
-        <p:txBody>
-          <a:bodyPr wrap="square">
-            <a:spAutoFit/>
-          </a:bodyPr>
-          <a:lstStyle/>
-          <a:p>
-            <a:pPr algn="l">
-              <a:defRPr sz="1000" b="0">
+              <a:t>AI</a:t>
+            </a:r>
+          </a:p>
+        </p:txBody>
+      </p:sp>
+      <p:sp>
+        <p:nvSpPr>
+          <p:cNvPr id="136" name="TextBox 135"/>
+          <p:cNvSpPr txBox="1"/>
+          <p:nvPr/>
+        </p:nvSpPr>
+        <p:spPr>
+          <a:xfrm>
+            <a:off x="9464040" y="3246120"/>
+            <a:ext cx="502920" cy="237744"/>
+          </a:xfrm>
+          <a:prstGeom prst="rect">
+            <a:avLst/>
+          </a:prstGeom>
+          <a:noFill/>
+        </p:spPr>
+        <p:txBody>
+          <a:bodyPr wrap="square">
+            <a:spAutoFit/>
+          </a:bodyPr>
+          <a:lstStyle/>
+          <a:p>
+            <a:pPr algn="l">
+              <a:defRPr sz="800" b="1">
+                <a:solidFill>
+                  <a:srgbClr val="333333"/>
+                </a:solidFill>
+              </a:defRPr>
+            </a:pPr>
+            <a:r>
+              <a:t>—</a:t>
+            </a:r>
+          </a:p>
+        </p:txBody>
+      </p:sp>
+      <p:sp>
+        <p:nvSpPr>
+          <p:cNvPr id="137" name="TextBox 136"/>
+          <p:cNvSpPr txBox="1"/>
+          <p:nvPr/>
+        </p:nvSpPr>
+        <p:spPr>
+          <a:xfrm>
+            <a:off x="10012680" y="3246120"/>
+            <a:ext cx="685800" cy="237744"/>
+          </a:xfrm>
+          <a:prstGeom prst="rect">
+            <a:avLst/>
+          </a:prstGeom>
+          <a:noFill/>
+        </p:spPr>
+        <p:txBody>
+          <a:bodyPr wrap="square">
+            <a:spAutoFit/>
+          </a:bodyPr>
+          <a:lstStyle/>
+          <a:p>
+            <a:pPr algn="l">
+              <a:defRPr sz="800" b="1">
+                <a:solidFill>
+                  <a:srgbClr val="333333"/>
+                </a:solidFill>
+              </a:defRPr>
+            </a:pPr>
+            <a:r>
+              <a:t>4-6 wks</a:t>
+            </a:r>
+          </a:p>
+        </p:txBody>
+      </p:sp>
+      <p:sp>
+        <p:nvSpPr>
+          <p:cNvPr id="138" name="TextBox 137"/>
+          <p:cNvSpPr txBox="1"/>
+          <p:nvPr/>
+        </p:nvSpPr>
+        <p:spPr>
+          <a:xfrm>
+            <a:off x="10744200" y="3246120"/>
+            <a:ext cx="914400" cy="237744"/>
+          </a:xfrm>
+          <a:prstGeom prst="rect">
+            <a:avLst/>
+          </a:prstGeom>
+          <a:noFill/>
+        </p:spPr>
+        <p:txBody>
+          <a:bodyPr wrap="square">
+            <a:spAutoFit/>
+          </a:bodyPr>
+          <a:lstStyle/>
+          <a:p>
+            <a:pPr algn="l">
+              <a:defRPr sz="800" b="1">
+                <a:solidFill>
+                  <a:srgbClr val="333333"/>
+                </a:solidFill>
+              </a:defRPr>
+            </a:pPr>
+            <a:r>
+              <a:t>$45K</a:t>
+            </a:r>
+          </a:p>
+        </p:txBody>
+      </p:sp>
+      <p:sp>
+        <p:nvSpPr>
+          <p:cNvPr id="139" name="Rectangle 138"/>
+          <p:cNvSpPr/>
+          <p:nvPr/>
+        </p:nvSpPr>
+        <p:spPr>
+          <a:xfrm>
+            <a:off x="6217920" y="3493008"/>
+            <a:ext cx="5486400" cy="246888"/>
+          </a:xfrm>
+          <a:prstGeom prst="rect">
+            <a:avLst/>
+          </a:prstGeom>
+          <a:solidFill>
+            <a:srgbClr val="F5F5F5"/>
+          </a:solidFill>
+          <a:ln>
+            <a:noFill/>
+          </a:ln>
+        </p:spPr>
+        <p:style>
+          <a:lnRef idx="1">
+            <a:schemeClr val="accent1"/>
+          </a:lnRef>
+          <a:fillRef idx="3">
+            <a:schemeClr val="accent1"/>
+          </a:fillRef>
+          <a:effectRef idx="2">
+            <a:schemeClr val="accent1"/>
+          </a:effectRef>
+          <a:fontRef idx="minor">
+            <a:schemeClr val="lt1"/>
+          </a:fontRef>
+        </p:style>
+        <p:txBody>
+          <a:bodyPr rtlCol="0" anchor="ctr"/>
+          <a:lstStyle/>
+          <a:p>
+            <a:pPr algn="ctr"/>
+          </a:p>
+        </p:txBody>
+      </p:sp>
+      <p:sp>
+        <p:nvSpPr>
+          <p:cNvPr id="140" name="TextBox 139"/>
+          <p:cNvSpPr txBox="1"/>
+          <p:nvPr/>
+        </p:nvSpPr>
+        <p:spPr>
+          <a:xfrm>
+            <a:off x="6309360" y="3493008"/>
+            <a:ext cx="1828800" cy="237744"/>
+          </a:xfrm>
+          <a:prstGeom prst="rect">
+            <a:avLst/>
+          </a:prstGeom>
+          <a:noFill/>
+        </p:spPr>
+        <p:txBody>
+          <a:bodyPr wrap="square">
+            <a:spAutoFit/>
+          </a:bodyPr>
+          <a:lstStyle/>
+          <a:p>
+            <a:pPr algn="l">
+              <a:defRPr sz="800" b="1">
                 <a:solidFill>
                   <a:srgbClr val="D52B1E"/>
                 </a:solidFill>
               </a:defRPr>
             </a:pPr>
             <a:r>
-              <a:t>$60K-100K</a:t>
-            </a:r>
-          </a:p>
-        </p:txBody>
-      </p:sp>
-      <p:sp>
-        <p:nvSpPr>
-          <p:cNvPr id="80" name="TextBox 79"/>
-          <p:cNvSpPr txBox="1"/>
-          <p:nvPr/>
-        </p:nvSpPr>
-        <p:spPr>
-          <a:xfrm>
-            <a:off x="6309360" y="3017520"/>
-            <a:ext cx="2011680" cy="274320"/>
-          </a:xfrm>
-          <a:prstGeom prst="rect">
-            <a:avLst/>
-          </a:prstGeom>
-          <a:noFill/>
-        </p:spPr>
-        <p:txBody>
-          <a:bodyPr wrap="square">
-            <a:spAutoFit/>
-          </a:bodyPr>
-          <a:lstStyle/>
-          <a:p>
-            <a:pPr algn="l">
-              <a:defRPr sz="1000" b="0">
+              <a:t>AI Agent Cluster (QA)</a:t>
+            </a:r>
+          </a:p>
+        </p:txBody>
+      </p:sp>
+      <p:sp>
+        <p:nvSpPr>
+          <p:cNvPr id="141" name="TextBox 140"/>
+          <p:cNvSpPr txBox="1"/>
+          <p:nvPr/>
+        </p:nvSpPr>
+        <p:spPr>
+          <a:xfrm>
+            <a:off x="8183879" y="3493008"/>
+            <a:ext cx="731520" cy="237744"/>
+          </a:xfrm>
+          <a:prstGeom prst="rect">
+            <a:avLst/>
+          </a:prstGeom>
+          <a:noFill/>
+        </p:spPr>
+        <p:txBody>
+          <a:bodyPr wrap="square">
+            <a:spAutoFit/>
+          </a:bodyPr>
+          <a:lstStyle/>
+          <a:p>
+            <a:pPr algn="l">
+              <a:defRPr sz="800" b="1">
                 <a:solidFill>
                   <a:srgbClr val="D52B1E"/>
                 </a:solidFill>
               </a:defRPr>
             </a:pPr>
             <a:r>
-              <a:t>AI Agent Cluster (Mobile)</a:t>
-            </a:r>
-          </a:p>
-        </p:txBody>
-      </p:sp>
-      <p:sp>
-        <p:nvSpPr>
-          <p:cNvPr id="81" name="TextBox 80"/>
-          <p:cNvSpPr txBox="1"/>
-          <p:nvPr/>
-        </p:nvSpPr>
-        <p:spPr>
-          <a:xfrm>
-            <a:off x="8412480" y="3017520"/>
-            <a:ext cx="914400" cy="274320"/>
-          </a:xfrm>
-          <a:prstGeom prst="rect">
-            <a:avLst/>
-          </a:prstGeom>
-          <a:noFill/>
-        </p:spPr>
-        <p:txBody>
-          <a:bodyPr wrap="square">
-            <a:spAutoFit/>
-          </a:bodyPr>
-          <a:lstStyle/>
-          <a:p>
-            <a:pPr algn="l">
-              <a:defRPr sz="1000" b="0">
+              <a:t>2-3 agents</a:t>
+            </a:r>
+          </a:p>
+        </p:txBody>
+      </p:sp>
+      <p:sp>
+        <p:nvSpPr>
+          <p:cNvPr id="142" name="TextBox 141"/>
+          <p:cNvSpPr txBox="1"/>
+          <p:nvPr/>
+        </p:nvSpPr>
+        <p:spPr>
+          <a:xfrm>
+            <a:off x="8961120" y="3493008"/>
+            <a:ext cx="457200" cy="237744"/>
+          </a:xfrm>
+          <a:prstGeom prst="rect">
+            <a:avLst/>
+          </a:prstGeom>
+          <a:noFill/>
+        </p:spPr>
+        <p:txBody>
+          <a:bodyPr wrap="square">
+            <a:spAutoFit/>
+          </a:bodyPr>
+          <a:lstStyle/>
+          <a:p>
+            <a:pPr algn="l">
+              <a:defRPr sz="800" b="1">
                 <a:solidFill>
                   <a:srgbClr val="D52B1E"/>
                 </a:solidFill>
               </a:defRPr>
             </a:pPr>
             <a:r>
-              <a:t>3-5 agents</a:t>
-            </a:r>
-          </a:p>
-        </p:txBody>
-      </p:sp>
-      <p:sp>
-        <p:nvSpPr>
-          <p:cNvPr id="82" name="TextBox 81"/>
-          <p:cNvSpPr txBox="1"/>
-          <p:nvPr/>
-        </p:nvSpPr>
-        <p:spPr>
-          <a:xfrm>
-            <a:off x="9418320" y="3017520"/>
-            <a:ext cx="1005840" cy="274320"/>
-          </a:xfrm>
-          <a:prstGeom prst="rect">
-            <a:avLst/>
-          </a:prstGeom>
-          <a:noFill/>
-        </p:spPr>
-        <p:txBody>
-          <a:bodyPr wrap="square">
-            <a:spAutoFit/>
-          </a:bodyPr>
-          <a:lstStyle/>
-          <a:p>
-            <a:pPr algn="l">
-              <a:defRPr sz="1000" b="0">
-                <a:solidFill>
-                  <a:srgbClr val="D52B1E"/>
-                </a:solidFill>
-              </a:defRPr>
-            </a:pPr>
-            <a:r>
-              <a:t>3-4 weeks</a:t>
-            </a:r>
-          </a:p>
-        </p:txBody>
-      </p:sp>
-      <p:sp>
-        <p:nvSpPr>
-          <p:cNvPr id="83" name="TextBox 82"/>
-          <p:cNvSpPr txBox="1"/>
-          <p:nvPr/>
-        </p:nvSpPr>
-        <p:spPr>
-          <a:xfrm>
-            <a:off x="10515600" y="3017520"/>
-            <a:ext cx="1097280" cy="274320"/>
-          </a:xfrm>
-          <a:prstGeom prst="rect">
-            <a:avLst/>
-          </a:prstGeom>
-          <a:noFill/>
-        </p:spPr>
-        <p:txBody>
-          <a:bodyPr wrap="square">
-            <a:spAutoFit/>
-          </a:bodyPr>
-          <a:lstStyle/>
-          <a:p>
-            <a:pPr algn="l">
-              <a:defRPr sz="1000" b="0">
-                <a:solidFill>
-                  <a:srgbClr val="D52B1E"/>
-                </a:solidFill>
-              </a:defRPr>
-            </a:pPr>
-            <a:r>
-              <a:t>$50K-80K</a:t>
-            </a:r>
-          </a:p>
-        </p:txBody>
-      </p:sp>
-      <p:sp>
-        <p:nvSpPr>
-          <p:cNvPr id="84" name="TextBox 83"/>
-          <p:cNvSpPr txBox="1"/>
-          <p:nvPr/>
-        </p:nvSpPr>
-        <p:spPr>
-          <a:xfrm>
-            <a:off x="6309360" y="3337560"/>
-            <a:ext cx="2011680" cy="274320"/>
-          </a:xfrm>
-          <a:prstGeom prst="rect">
-            <a:avLst/>
-          </a:prstGeom>
-          <a:noFill/>
-        </p:spPr>
-        <p:txBody>
-          <a:bodyPr wrap="square">
-            <a:spAutoFit/>
-          </a:bodyPr>
-          <a:lstStyle/>
-          <a:p>
-            <a:pPr algn="l">
-              <a:defRPr sz="1000" b="0">
-                <a:solidFill>
-                  <a:srgbClr val="D52B1E"/>
-                </a:solidFill>
-              </a:defRPr>
-            </a:pPr>
-            <a:r>
-              <a:t>AI Agent Cluster (QA/Test)</a:t>
-            </a:r>
-          </a:p>
-        </p:txBody>
-      </p:sp>
-      <p:sp>
-        <p:nvSpPr>
-          <p:cNvPr id="85" name="TextBox 84"/>
-          <p:cNvSpPr txBox="1"/>
-          <p:nvPr/>
-        </p:nvSpPr>
-        <p:spPr>
-          <a:xfrm>
-            <a:off x="8412480" y="3337560"/>
-            <a:ext cx="914400" cy="274320"/>
-          </a:xfrm>
-          <a:prstGeom prst="rect">
-            <a:avLst/>
-          </a:prstGeom>
-          <a:noFill/>
-        </p:spPr>
-        <p:txBody>
-          <a:bodyPr wrap="square">
-            <a:spAutoFit/>
-          </a:bodyPr>
-          <a:lstStyle/>
-          <a:p>
-            <a:pPr algn="l">
-              <a:defRPr sz="1000" b="0">
-                <a:solidFill>
-                  <a:srgbClr val="D52B1E"/>
-                </a:solidFill>
-              </a:defRPr>
-            </a:pPr>
-            <a:r>
-              <a:t>2-3 agents</a:t>
-            </a:r>
-          </a:p>
-        </p:txBody>
-      </p:sp>
-      <p:sp>
-        <p:nvSpPr>
-          <p:cNvPr id="86" name="TextBox 85"/>
-          <p:cNvSpPr txBox="1"/>
-          <p:nvPr/>
-        </p:nvSpPr>
-        <p:spPr>
-          <a:xfrm>
-            <a:off x="9418320" y="3337560"/>
-            <a:ext cx="1005840" cy="274320"/>
-          </a:xfrm>
-          <a:prstGeom prst="rect">
-            <a:avLst/>
-          </a:prstGeom>
-          <a:noFill/>
-        </p:spPr>
-        <p:txBody>
-          <a:bodyPr wrap="square">
-            <a:spAutoFit/>
-          </a:bodyPr>
-          <a:lstStyle/>
-          <a:p>
-            <a:pPr algn="l">
-              <a:defRPr sz="1000" b="0">
-                <a:solidFill>
-                  <a:srgbClr val="D52B1E"/>
-                </a:solidFill>
-              </a:defRPr>
-            </a:pPr>
-            <a:r>
-              <a:t>1-2 weeks</a:t>
-            </a:r>
-          </a:p>
-        </p:txBody>
-      </p:sp>
-      <p:sp>
-        <p:nvSpPr>
-          <p:cNvPr id="87" name="TextBox 86"/>
-          <p:cNvSpPr txBox="1"/>
-          <p:nvPr/>
-        </p:nvSpPr>
-        <p:spPr>
-          <a:xfrm>
-            <a:off x="10515600" y="3337560"/>
-            <a:ext cx="1097280" cy="274320"/>
-          </a:xfrm>
-          <a:prstGeom prst="rect">
-            <a:avLst/>
-          </a:prstGeom>
-          <a:noFill/>
-        </p:spPr>
-        <p:txBody>
-          <a:bodyPr wrap="square">
-            <a:spAutoFit/>
-          </a:bodyPr>
-          <a:lstStyle/>
-          <a:p>
-            <a:pPr algn="l">
-              <a:defRPr sz="1000" b="0">
-                <a:solidFill>
-                  <a:srgbClr val="D52B1E"/>
-                </a:solidFill>
-              </a:defRPr>
-            </a:pPr>
-            <a:r>
-              <a:t>$30K-50K</a:t>
-            </a:r>
-          </a:p>
-        </p:txBody>
-      </p:sp>
-      <p:sp>
-        <p:nvSpPr>
-          <p:cNvPr id="88" name="TextBox 87"/>
-          <p:cNvSpPr txBox="1"/>
-          <p:nvPr/>
-        </p:nvSpPr>
-        <p:spPr>
-          <a:xfrm>
-            <a:off x="6309360" y="3657600"/>
-            <a:ext cx="2011680" cy="274320"/>
-          </a:xfrm>
-          <a:prstGeom prst="rect">
-            <a:avLst/>
-          </a:prstGeom>
-          <a:noFill/>
-        </p:spPr>
-        <p:txBody>
-          <a:bodyPr wrap="square">
-            <a:spAutoFit/>
-          </a:bodyPr>
-          <a:lstStyle/>
-          <a:p>
-            <a:pPr algn="l">
-              <a:defRPr sz="1000" b="0">
-                <a:solidFill>
-                  <a:srgbClr val="D52B1E"/>
-                </a:solidFill>
-              </a:defRPr>
-            </a:pPr>
-            <a:r>
-              <a:t>AI Agent (Docs/Arch)</a:t>
-            </a:r>
-          </a:p>
-        </p:txBody>
-      </p:sp>
-      <p:sp>
-        <p:nvSpPr>
-          <p:cNvPr id="89" name="TextBox 88"/>
-          <p:cNvSpPr txBox="1"/>
-          <p:nvPr/>
-        </p:nvSpPr>
-        <p:spPr>
-          <a:xfrm>
-            <a:off x="8412480" y="3657600"/>
-            <a:ext cx="914400" cy="274320"/>
-          </a:xfrm>
-          <a:prstGeom prst="rect">
-            <a:avLst/>
-          </a:prstGeom>
-          <a:noFill/>
-        </p:spPr>
-        <p:txBody>
-          <a:bodyPr wrap="square">
-            <a:spAutoFit/>
-          </a:bodyPr>
-          <a:lstStyle/>
-          <a:p>
-            <a:pPr algn="l">
-              <a:defRPr sz="1000" b="0">
-                <a:solidFill>
-                  <a:srgbClr val="D52B1E"/>
-                </a:solidFill>
-              </a:defRPr>
-            </a:pPr>
-            <a:r>
-              <a:t>1 agent</a:t>
-            </a:r>
-          </a:p>
-        </p:txBody>
-      </p:sp>
-      <p:sp>
-        <p:nvSpPr>
-          <p:cNvPr id="90" name="TextBox 89"/>
-          <p:cNvSpPr txBox="1"/>
-          <p:nvPr/>
-        </p:nvSpPr>
-        <p:spPr>
-          <a:xfrm>
-            <a:off x="9418320" y="3657600"/>
-            <a:ext cx="1005840" cy="274320"/>
-          </a:xfrm>
-          <a:prstGeom prst="rect">
-            <a:avLst/>
-          </a:prstGeom>
-          <a:noFill/>
-        </p:spPr>
-        <p:txBody>
-          <a:bodyPr wrap="square">
-            <a:spAutoFit/>
-          </a:bodyPr>
-          <a:lstStyle/>
-          <a:p>
-            <a:pPr algn="l">
-              <a:defRPr sz="1000" b="0">
-                <a:solidFill>
-                  <a:srgbClr val="D52B1E"/>
-                </a:solidFill>
-              </a:defRPr>
-            </a:pPr>
-            <a:r>
-              <a:t>Continuous</a:t>
-            </a:r>
-          </a:p>
-        </p:txBody>
-      </p:sp>
-      <p:sp>
-        <p:nvSpPr>
-          <p:cNvPr id="91" name="TextBox 90"/>
-          <p:cNvSpPr txBox="1"/>
-          <p:nvPr/>
-        </p:nvSpPr>
-        <p:spPr>
-          <a:xfrm>
-            <a:off x="10515600" y="3657600"/>
-            <a:ext cx="1097280" cy="274320"/>
-          </a:xfrm>
-          <a:prstGeom prst="rect">
-            <a:avLst/>
-          </a:prstGeom>
-          <a:noFill/>
-        </p:spPr>
-        <p:txBody>
-          <a:bodyPr wrap="square">
-            <a:spAutoFit/>
-          </a:bodyPr>
-          <a:lstStyle/>
-          <a:p>
-            <a:pPr algn="l">
-              <a:defRPr sz="1000" b="0">
-                <a:solidFill>
-                  <a:srgbClr val="D52B1E"/>
-                </a:solidFill>
-              </a:defRPr>
-            </a:pPr>
-            <a:r>
-              <a:t>Included</a:t>
-            </a:r>
-          </a:p>
-        </p:txBody>
-      </p:sp>
-      <p:sp>
-        <p:nvSpPr>
-          <p:cNvPr id="92" name="TextBox 91"/>
-          <p:cNvSpPr txBox="1"/>
-          <p:nvPr/>
-        </p:nvSpPr>
-        <p:spPr>
-          <a:xfrm>
-            <a:off x="6309360" y="3977639"/>
-            <a:ext cx="2011680" cy="274320"/>
-          </a:xfrm>
-          <a:prstGeom prst="rect">
-            <a:avLst/>
-          </a:prstGeom>
-          <a:noFill/>
-        </p:spPr>
-        <p:txBody>
-          <a:bodyPr wrap="square">
-            <a:spAutoFit/>
-          </a:bodyPr>
-          <a:lstStyle/>
-          <a:p>
-            <a:pPr algn="l">
-              <a:defRPr sz="1000" b="0">
+              <a:t>AI</a:t>
+            </a:r>
+          </a:p>
+        </p:txBody>
+      </p:sp>
+      <p:sp>
+        <p:nvSpPr>
+          <p:cNvPr id="143" name="TextBox 142"/>
+          <p:cNvSpPr txBox="1"/>
+          <p:nvPr/>
+        </p:nvSpPr>
+        <p:spPr>
+          <a:xfrm>
+            <a:off x="9464040" y="3493008"/>
+            <a:ext cx="502920" cy="237744"/>
+          </a:xfrm>
+          <a:prstGeom prst="rect">
+            <a:avLst/>
+          </a:prstGeom>
+          <a:noFill/>
+        </p:spPr>
+        <p:txBody>
+          <a:bodyPr wrap="square">
+            <a:spAutoFit/>
+          </a:bodyPr>
+          <a:lstStyle/>
+          <a:p>
+            <a:pPr algn="l">
+              <a:defRPr sz="800" b="1">
                 <a:solidFill>
                   <a:srgbClr val="333333"/>
                 </a:solidFill>
               </a:defRPr>
             </a:pPr>
             <a:r>
+              <a:t>—</a:t>
+            </a:r>
+          </a:p>
+        </p:txBody>
+      </p:sp>
+      <p:sp>
+        <p:nvSpPr>
+          <p:cNvPr id="144" name="TextBox 143"/>
+          <p:cNvSpPr txBox="1"/>
+          <p:nvPr/>
+        </p:nvSpPr>
+        <p:spPr>
+          <a:xfrm>
+            <a:off x="10012680" y="3493008"/>
+            <a:ext cx="685800" cy="237744"/>
+          </a:xfrm>
+          <a:prstGeom prst="rect">
+            <a:avLst/>
+          </a:prstGeom>
+          <a:noFill/>
+        </p:spPr>
+        <p:txBody>
+          <a:bodyPr wrap="square">
+            <a:spAutoFit/>
+          </a:bodyPr>
+          <a:lstStyle/>
+          <a:p>
+            <a:pPr algn="l">
+              <a:defRPr sz="800" b="1">
+                <a:solidFill>
+                  <a:srgbClr val="333333"/>
+                </a:solidFill>
+              </a:defRPr>
+            </a:pPr>
+            <a:r>
+              <a:t>2-3 wks</a:t>
+            </a:r>
+          </a:p>
+        </p:txBody>
+      </p:sp>
+      <p:sp>
+        <p:nvSpPr>
+          <p:cNvPr id="145" name="TextBox 144"/>
+          <p:cNvSpPr txBox="1"/>
+          <p:nvPr/>
+        </p:nvSpPr>
+        <p:spPr>
+          <a:xfrm>
+            <a:off x="10744200" y="3493008"/>
+            <a:ext cx="914400" cy="237744"/>
+          </a:xfrm>
+          <a:prstGeom prst="rect">
+            <a:avLst/>
+          </a:prstGeom>
+          <a:noFill/>
+        </p:spPr>
+        <p:txBody>
+          <a:bodyPr wrap="square">
+            <a:spAutoFit/>
+          </a:bodyPr>
+          <a:lstStyle/>
+          <a:p>
+            <a:pPr algn="l">
+              <a:defRPr sz="800" b="1">
+                <a:solidFill>
+                  <a:srgbClr val="333333"/>
+                </a:solidFill>
+              </a:defRPr>
+            </a:pPr>
+            <a:r>
+              <a:t>$20K</a:t>
+            </a:r>
+          </a:p>
+        </p:txBody>
+      </p:sp>
+      <p:sp>
+        <p:nvSpPr>
+          <p:cNvPr id="146" name="Rectangle 145"/>
+          <p:cNvSpPr/>
+          <p:nvPr/>
+        </p:nvSpPr>
+        <p:spPr>
+          <a:xfrm>
+            <a:off x="6217920" y="3739896"/>
+            <a:ext cx="5486400" cy="246888"/>
+          </a:xfrm>
+          <a:prstGeom prst="rect">
+            <a:avLst/>
+          </a:prstGeom>
+          <a:solidFill>
+            <a:srgbClr val="FFFFFF"/>
+          </a:solidFill>
+          <a:ln>
+            <a:noFill/>
+          </a:ln>
+        </p:spPr>
+        <p:style>
+          <a:lnRef idx="1">
+            <a:schemeClr val="accent1"/>
+          </a:lnRef>
+          <a:fillRef idx="3">
+            <a:schemeClr val="accent1"/>
+          </a:fillRef>
+          <a:effectRef idx="2">
+            <a:schemeClr val="accent1"/>
+          </a:effectRef>
+          <a:fontRef idx="minor">
+            <a:schemeClr val="lt1"/>
+          </a:fontRef>
+        </p:style>
+        <p:txBody>
+          <a:bodyPr rtlCol="0" anchor="ctr"/>
+          <a:lstStyle/>
+          <a:p>
+            <a:pPr algn="ctr"/>
+          </a:p>
+        </p:txBody>
+      </p:sp>
+      <p:sp>
+        <p:nvSpPr>
+          <p:cNvPr id="147" name="TextBox 146"/>
+          <p:cNvSpPr txBox="1"/>
+          <p:nvPr/>
+        </p:nvSpPr>
+        <p:spPr>
+          <a:xfrm>
+            <a:off x="6309360" y="3739896"/>
+            <a:ext cx="1828800" cy="237744"/>
+          </a:xfrm>
+          <a:prstGeom prst="rect">
+            <a:avLst/>
+          </a:prstGeom>
+          <a:noFill/>
+        </p:spPr>
+        <p:txBody>
+          <a:bodyPr wrap="square">
+            <a:spAutoFit/>
+          </a:bodyPr>
+          <a:lstStyle/>
+          <a:p>
+            <a:pPr algn="l">
+              <a:defRPr sz="800" b="0">
+                <a:solidFill>
+                  <a:srgbClr val="333333"/>
+                </a:solidFill>
+              </a:defRPr>
+            </a:pPr>
+            <a:r>
               <a:t>Human QA Reviewer</a:t>
             </a:r>
           </a:p>
@@ -8372,259 +10425,442 @@
       </p:sp>
       <p:sp>
         <p:nvSpPr>
-          <p:cNvPr id="93" name="TextBox 92"/>
-          <p:cNvSpPr txBox="1"/>
-          <p:nvPr/>
-        </p:nvSpPr>
-        <p:spPr>
-          <a:xfrm>
-            <a:off x="8412480" y="3977639"/>
-            <a:ext cx="914400" cy="274320"/>
-          </a:xfrm>
-          <a:prstGeom prst="rect">
-            <a:avLst/>
-          </a:prstGeom>
-          <a:noFill/>
-        </p:spPr>
-        <p:txBody>
-          <a:bodyPr wrap="square">
-            <a:spAutoFit/>
-          </a:bodyPr>
-          <a:lstStyle/>
-          <a:p>
-            <a:pPr algn="l">
-              <a:defRPr sz="1000" b="0">
+          <p:cNvPr id="148" name="TextBox 147"/>
+          <p:cNvSpPr txBox="1"/>
+          <p:nvPr/>
+        </p:nvSpPr>
+        <p:spPr>
+          <a:xfrm>
+            <a:off x="8183879" y="3739896"/>
+            <a:ext cx="731520" cy="237744"/>
+          </a:xfrm>
+          <a:prstGeom prst="rect">
+            <a:avLst/>
+          </a:prstGeom>
+          <a:noFill/>
+        </p:spPr>
+        <p:txBody>
+          <a:bodyPr wrap="square">
+            <a:spAutoFit/>
+          </a:bodyPr>
+          <a:lstStyle/>
+          <a:p>
+            <a:pPr algn="l">
+              <a:defRPr sz="800" b="0">
                 <a:solidFill>
                   <a:srgbClr val="333333"/>
                 </a:solidFill>
               </a:defRPr>
             </a:pPr>
             <a:r>
-              <a:t>1 (part-time)</a:t>
-            </a:r>
-          </a:p>
-        </p:txBody>
-      </p:sp>
-      <p:sp>
-        <p:nvSpPr>
-          <p:cNvPr id="94" name="TextBox 93"/>
-          <p:cNvSpPr txBox="1"/>
-          <p:nvPr/>
-        </p:nvSpPr>
-        <p:spPr>
-          <a:xfrm>
-            <a:off x="9418320" y="3977639"/>
-            <a:ext cx="1005840" cy="274320"/>
-          </a:xfrm>
-          <a:prstGeom prst="rect">
-            <a:avLst/>
-          </a:prstGeom>
-          <a:noFill/>
-        </p:spPr>
-        <p:txBody>
-          <a:bodyPr wrap="square">
-            <a:spAutoFit/>
-          </a:bodyPr>
-          <a:lstStyle/>
-          <a:p>
-            <a:pPr algn="l">
-              <a:defRPr sz="1000" b="0">
+              <a:t>1 (PT)</a:t>
+            </a:r>
+          </a:p>
+        </p:txBody>
+      </p:sp>
+      <p:sp>
+        <p:nvSpPr>
+          <p:cNvPr id="149" name="TextBox 148"/>
+          <p:cNvSpPr txBox="1"/>
+          <p:nvPr/>
+        </p:nvSpPr>
+        <p:spPr>
+          <a:xfrm>
+            <a:off x="8961120" y="3739896"/>
+            <a:ext cx="457200" cy="237744"/>
+          </a:xfrm>
+          <a:prstGeom prst="rect">
+            <a:avLst/>
+          </a:prstGeom>
+          <a:noFill/>
+        </p:spPr>
+        <p:txBody>
+          <a:bodyPr wrap="square">
+            <a:spAutoFit/>
+          </a:bodyPr>
+          <a:lstStyle/>
+          <a:p>
+            <a:pPr algn="l">
+              <a:defRPr sz="800" b="0">
+                <a:solidFill>
+                  <a:srgbClr val="1565C0"/>
+                </a:solidFill>
+              </a:defRPr>
+            </a:pPr>
+            <a:r>
+              <a:t>Off</a:t>
+            </a:r>
+          </a:p>
+        </p:txBody>
+      </p:sp>
+      <p:sp>
+        <p:nvSpPr>
+          <p:cNvPr id="150" name="TextBox 149"/>
+          <p:cNvSpPr txBox="1"/>
+          <p:nvPr/>
+        </p:nvSpPr>
+        <p:spPr>
+          <a:xfrm>
+            <a:off x="9464040" y="3739896"/>
+            <a:ext cx="502920" cy="237744"/>
+          </a:xfrm>
+          <a:prstGeom prst="rect">
+            <a:avLst/>
+          </a:prstGeom>
+          <a:noFill/>
+        </p:spPr>
+        <p:txBody>
+          <a:bodyPr wrap="square">
+            <a:spAutoFit/>
+          </a:bodyPr>
+          <a:lstStyle/>
+          <a:p>
+            <a:pPr algn="l">
+              <a:defRPr sz="800" b="0">
                 <a:solidFill>
                   <a:srgbClr val="333333"/>
                 </a:solidFill>
               </a:defRPr>
             </a:pPr>
             <a:r>
-              <a:t>4 weeks</a:t>
-            </a:r>
-          </a:p>
-        </p:txBody>
-      </p:sp>
-      <p:sp>
-        <p:nvSpPr>
-          <p:cNvPr id="95" name="TextBox 94"/>
-          <p:cNvSpPr txBox="1"/>
-          <p:nvPr/>
-        </p:nvSpPr>
-        <p:spPr>
-          <a:xfrm>
-            <a:off x="10515600" y="3977639"/>
-            <a:ext cx="1097280" cy="274320"/>
-          </a:xfrm>
-          <a:prstGeom prst="rect">
-            <a:avLst/>
-          </a:prstGeom>
-          <a:noFill/>
-        </p:spPr>
-        <p:txBody>
-          <a:bodyPr wrap="square">
-            <a:spAutoFit/>
-          </a:bodyPr>
-          <a:lstStyle/>
-          <a:p>
-            <a:pPr algn="l">
-              <a:defRPr sz="1000" b="0">
+              <a:t>$100</a:t>
+            </a:r>
+          </a:p>
+        </p:txBody>
+      </p:sp>
+      <p:sp>
+        <p:nvSpPr>
+          <p:cNvPr id="151" name="TextBox 150"/>
+          <p:cNvSpPr txBox="1"/>
+          <p:nvPr/>
+        </p:nvSpPr>
+        <p:spPr>
+          <a:xfrm>
+            <a:off x="10012680" y="3739896"/>
+            <a:ext cx="685800" cy="237744"/>
+          </a:xfrm>
+          <a:prstGeom prst="rect">
+            <a:avLst/>
+          </a:prstGeom>
+          <a:noFill/>
+        </p:spPr>
+        <p:txBody>
+          <a:bodyPr wrap="square">
+            <a:spAutoFit/>
+          </a:bodyPr>
+          <a:lstStyle/>
+          <a:p>
+            <a:pPr algn="l">
+              <a:defRPr sz="800" b="0">
                 <a:solidFill>
                   <a:srgbClr val="333333"/>
                 </a:solidFill>
               </a:defRPr>
             </a:pPr>
             <a:r>
-              <a:t>$40K-60K</a:t>
-            </a:r>
-          </a:p>
-        </p:txBody>
-      </p:sp>
-      <p:sp>
-        <p:nvSpPr>
-          <p:cNvPr id="96" name="TextBox 95"/>
-          <p:cNvSpPr txBox="1"/>
-          <p:nvPr/>
-        </p:nvSpPr>
-        <p:spPr>
-          <a:xfrm>
-            <a:off x="6309360" y="4297679"/>
-            <a:ext cx="2011680" cy="274320"/>
-          </a:xfrm>
-          <a:prstGeom prst="rect">
-            <a:avLst/>
-          </a:prstGeom>
-          <a:noFill/>
-        </p:spPr>
-        <p:txBody>
-          <a:bodyPr wrap="square">
-            <a:spAutoFit/>
-          </a:bodyPr>
-          <a:lstStyle/>
-          <a:p>
-            <a:pPr algn="l">
-              <a:defRPr sz="1000" b="0">
-                <a:solidFill>
-                  <a:srgbClr val="D52B1E"/>
-                </a:solidFill>
-              </a:defRPr>
-            </a:pPr>
-            <a:r>
-              <a:t>DevOps / CI-CD</a:t>
-            </a:r>
-          </a:p>
-        </p:txBody>
-      </p:sp>
-      <p:sp>
-        <p:nvSpPr>
-          <p:cNvPr id="97" name="TextBox 96"/>
-          <p:cNvSpPr txBox="1"/>
-          <p:nvPr/>
-        </p:nvSpPr>
-        <p:spPr>
-          <a:xfrm>
-            <a:off x="8412480" y="4297679"/>
-            <a:ext cx="914400" cy="274320"/>
-          </a:xfrm>
-          <a:prstGeom prst="rect">
-            <a:avLst/>
-          </a:prstGeom>
-          <a:noFill/>
-        </p:spPr>
-        <p:txBody>
-          <a:bodyPr wrap="square">
-            <a:spAutoFit/>
-          </a:bodyPr>
-          <a:lstStyle/>
-          <a:p>
-            <a:pPr algn="l">
-              <a:defRPr sz="1000" b="0">
-                <a:solidFill>
-                  <a:srgbClr val="D52B1E"/>
-                </a:solidFill>
-              </a:defRPr>
-            </a:pPr>
-            <a:r>
-              <a:t>1 agent + human</a:t>
-            </a:r>
-          </a:p>
-        </p:txBody>
-      </p:sp>
-      <p:sp>
-        <p:nvSpPr>
-          <p:cNvPr id="98" name="TextBox 97"/>
-          <p:cNvSpPr txBox="1"/>
-          <p:nvPr/>
-        </p:nvSpPr>
-        <p:spPr>
-          <a:xfrm>
-            <a:off x="9418320" y="4297679"/>
-            <a:ext cx="1005840" cy="274320"/>
-          </a:xfrm>
-          <a:prstGeom prst="rect">
-            <a:avLst/>
-          </a:prstGeom>
-          <a:noFill/>
-        </p:spPr>
-        <p:txBody>
-          <a:bodyPr wrap="square">
-            <a:spAutoFit/>
-          </a:bodyPr>
-          <a:lstStyle/>
-          <a:p>
-            <a:pPr algn="l">
-              <a:defRPr sz="1000" b="0">
-                <a:solidFill>
-                  <a:srgbClr val="D52B1E"/>
-                </a:solidFill>
-              </a:defRPr>
-            </a:pPr>
-            <a:r>
-              <a:t>2 weeks</a:t>
-            </a:r>
-          </a:p>
-        </p:txBody>
-      </p:sp>
-      <p:sp>
-        <p:nvSpPr>
-          <p:cNvPr id="99" name="TextBox 98"/>
-          <p:cNvSpPr txBox="1"/>
-          <p:nvPr/>
-        </p:nvSpPr>
-        <p:spPr>
-          <a:xfrm>
-            <a:off x="10515600" y="4297679"/>
-            <a:ext cx="1097280" cy="274320"/>
-          </a:xfrm>
-          <a:prstGeom prst="rect">
-            <a:avLst/>
-          </a:prstGeom>
-          <a:noFill/>
-        </p:spPr>
-        <p:txBody>
-          <a:bodyPr wrap="square">
-            <a:spAutoFit/>
-          </a:bodyPr>
-          <a:lstStyle/>
-          <a:p>
-            <a:pPr algn="l">
-              <a:defRPr sz="1000" b="0">
-                <a:solidFill>
-                  <a:srgbClr val="D52B1E"/>
-                </a:solidFill>
-              </a:defRPr>
-            </a:pPr>
-            <a:r>
-              <a:t>$30K-50K</a:t>
-            </a:r>
-          </a:p>
-        </p:txBody>
-      </p:sp>
-      <p:sp>
-        <p:nvSpPr>
-          <p:cNvPr id="100" name="Rectangle 99"/>
+              <a:t>5 wks</a:t>
+            </a:r>
+          </a:p>
+        </p:txBody>
+      </p:sp>
+      <p:sp>
+        <p:nvSpPr>
+          <p:cNvPr id="152" name="TextBox 151"/>
+          <p:cNvSpPr txBox="1"/>
+          <p:nvPr/>
+        </p:nvSpPr>
+        <p:spPr>
+          <a:xfrm>
+            <a:off x="10744200" y="3739896"/>
+            <a:ext cx="914400" cy="237744"/>
+          </a:xfrm>
+          <a:prstGeom prst="rect">
+            <a:avLst/>
+          </a:prstGeom>
+          <a:noFill/>
+        </p:spPr>
+        <p:txBody>
+          <a:bodyPr wrap="square">
+            <a:spAutoFit/>
+          </a:bodyPr>
+          <a:lstStyle/>
+          <a:p>
+            <a:pPr algn="l">
+              <a:defRPr sz="800" b="0">
+                <a:solidFill>
+                  <a:srgbClr val="333333"/>
+                </a:solidFill>
+              </a:defRPr>
+            </a:pPr>
+            <a:r>
+              <a:t>$20K</a:t>
+            </a:r>
+          </a:p>
+        </p:txBody>
+      </p:sp>
+      <p:sp>
+        <p:nvSpPr>
+          <p:cNvPr id="153" name="Rectangle 152"/>
           <p:cNvSpPr/>
           <p:nvPr/>
         </p:nvSpPr>
         <p:spPr>
           <a:xfrm>
-            <a:off x="6217920" y="4663440"/>
-            <a:ext cx="5486400" cy="411480"/>
+            <a:off x="6217920" y="3986784"/>
+            <a:ext cx="5486400" cy="246888"/>
+          </a:xfrm>
+          <a:prstGeom prst="rect">
+            <a:avLst/>
+          </a:prstGeom>
+          <a:solidFill>
+            <a:srgbClr val="F5F5F5"/>
+          </a:solidFill>
+          <a:ln>
+            <a:noFill/>
+          </a:ln>
+        </p:spPr>
+        <p:style>
+          <a:lnRef idx="1">
+            <a:schemeClr val="accent1"/>
+          </a:lnRef>
+          <a:fillRef idx="3">
+            <a:schemeClr val="accent1"/>
+          </a:fillRef>
+          <a:effectRef idx="2">
+            <a:schemeClr val="accent1"/>
+          </a:effectRef>
+          <a:fontRef idx="minor">
+            <a:schemeClr val="lt1"/>
+          </a:fontRef>
+        </p:style>
+        <p:txBody>
+          <a:bodyPr rtlCol="0" anchor="ctr"/>
+          <a:lstStyle/>
+          <a:p>
+            <a:pPr algn="ctr"/>
+          </a:p>
+        </p:txBody>
+      </p:sp>
+      <p:sp>
+        <p:nvSpPr>
+          <p:cNvPr id="154" name="TextBox 153"/>
+          <p:cNvSpPr txBox="1"/>
+          <p:nvPr/>
+        </p:nvSpPr>
+        <p:spPr>
+          <a:xfrm>
+            <a:off x="6309360" y="3986784"/>
+            <a:ext cx="1828800" cy="237744"/>
+          </a:xfrm>
+          <a:prstGeom prst="rect">
+            <a:avLst/>
+          </a:prstGeom>
+          <a:noFill/>
+        </p:spPr>
+        <p:txBody>
+          <a:bodyPr wrap="square">
+            <a:spAutoFit/>
+          </a:bodyPr>
+          <a:lstStyle/>
+          <a:p>
+            <a:pPr algn="l">
+              <a:defRPr sz="800" b="0">
+                <a:solidFill>
+                  <a:srgbClr val="333333"/>
+                </a:solidFill>
+              </a:defRPr>
+            </a:pPr>
+            <a:r>
+              <a:t>DevOps (human + AI)</a:t>
+            </a:r>
+          </a:p>
+        </p:txBody>
+      </p:sp>
+      <p:sp>
+        <p:nvSpPr>
+          <p:cNvPr id="155" name="TextBox 154"/>
+          <p:cNvSpPr txBox="1"/>
+          <p:nvPr/>
+        </p:nvSpPr>
+        <p:spPr>
+          <a:xfrm>
+            <a:off x="8183879" y="3986784"/>
+            <a:ext cx="731520" cy="237744"/>
+          </a:xfrm>
+          <a:prstGeom prst="rect">
+            <a:avLst/>
+          </a:prstGeom>
+          <a:noFill/>
+        </p:spPr>
+        <p:txBody>
+          <a:bodyPr wrap="square">
+            <a:spAutoFit/>
+          </a:bodyPr>
+          <a:lstStyle/>
+          <a:p>
+            <a:pPr algn="l">
+              <a:defRPr sz="800" b="0">
+                <a:solidFill>
+                  <a:srgbClr val="333333"/>
+                </a:solidFill>
+              </a:defRPr>
+            </a:pPr>
+            <a:r>
+              <a:t>0.5 + AI</a:t>
+            </a:r>
+          </a:p>
+        </p:txBody>
+      </p:sp>
+      <p:sp>
+        <p:nvSpPr>
+          <p:cNvPr id="156" name="TextBox 155"/>
+          <p:cNvSpPr txBox="1"/>
+          <p:nvPr/>
+        </p:nvSpPr>
+        <p:spPr>
+          <a:xfrm>
+            <a:off x="8961120" y="3986784"/>
+            <a:ext cx="457200" cy="237744"/>
+          </a:xfrm>
+          <a:prstGeom prst="rect">
+            <a:avLst/>
+          </a:prstGeom>
+          <a:noFill/>
+        </p:spPr>
+        <p:txBody>
+          <a:bodyPr wrap="square">
+            <a:spAutoFit/>
+          </a:bodyPr>
+          <a:lstStyle/>
+          <a:p>
+            <a:pPr algn="l">
+              <a:defRPr sz="800" b="0">
+                <a:solidFill>
+                  <a:srgbClr val="1565C0"/>
+                </a:solidFill>
+              </a:defRPr>
+            </a:pPr>
+            <a:r>
+              <a:t>Off</a:t>
+            </a:r>
+          </a:p>
+        </p:txBody>
+      </p:sp>
+      <p:sp>
+        <p:nvSpPr>
+          <p:cNvPr id="157" name="TextBox 156"/>
+          <p:cNvSpPr txBox="1"/>
+          <p:nvPr/>
+        </p:nvSpPr>
+        <p:spPr>
+          <a:xfrm>
+            <a:off x="9464040" y="3986784"/>
+            <a:ext cx="502920" cy="237744"/>
+          </a:xfrm>
+          <a:prstGeom prst="rect">
+            <a:avLst/>
+          </a:prstGeom>
+          <a:noFill/>
+        </p:spPr>
+        <p:txBody>
+          <a:bodyPr wrap="square">
+            <a:spAutoFit/>
+          </a:bodyPr>
+          <a:lstStyle/>
+          <a:p>
+            <a:pPr algn="l">
+              <a:defRPr sz="800" b="0">
+                <a:solidFill>
+                  <a:srgbClr val="333333"/>
+                </a:solidFill>
+              </a:defRPr>
+            </a:pPr>
+            <a:r>
+              <a:t>$140</a:t>
+            </a:r>
+          </a:p>
+        </p:txBody>
+      </p:sp>
+      <p:sp>
+        <p:nvSpPr>
+          <p:cNvPr id="158" name="TextBox 157"/>
+          <p:cNvSpPr txBox="1"/>
+          <p:nvPr/>
+        </p:nvSpPr>
+        <p:spPr>
+          <a:xfrm>
+            <a:off x="10012680" y="3986784"/>
+            <a:ext cx="685800" cy="237744"/>
+          </a:xfrm>
+          <a:prstGeom prst="rect">
+            <a:avLst/>
+          </a:prstGeom>
+          <a:noFill/>
+        </p:spPr>
+        <p:txBody>
+          <a:bodyPr wrap="square">
+            <a:spAutoFit/>
+          </a:bodyPr>
+          <a:lstStyle/>
+          <a:p>
+            <a:pPr algn="l">
+              <a:defRPr sz="800" b="0">
+                <a:solidFill>
+                  <a:srgbClr val="333333"/>
+                </a:solidFill>
+              </a:defRPr>
+            </a:pPr>
+            <a:r>
+              <a:t>3 wks</a:t>
+            </a:r>
+          </a:p>
+        </p:txBody>
+      </p:sp>
+      <p:sp>
+        <p:nvSpPr>
+          <p:cNvPr id="159" name="TextBox 158"/>
+          <p:cNvSpPr txBox="1"/>
+          <p:nvPr/>
+        </p:nvSpPr>
+        <p:spPr>
+          <a:xfrm>
+            <a:off x="10744200" y="3986784"/>
+            <a:ext cx="914400" cy="237744"/>
+          </a:xfrm>
+          <a:prstGeom prst="rect">
+            <a:avLst/>
+          </a:prstGeom>
+          <a:noFill/>
+        </p:spPr>
+        <p:txBody>
+          <a:bodyPr wrap="square">
+            <a:spAutoFit/>
+          </a:bodyPr>
+          <a:lstStyle/>
+          <a:p>
+            <a:pPr algn="l">
+              <a:defRPr sz="800" b="0">
+                <a:solidFill>
+                  <a:srgbClr val="333333"/>
+                </a:solidFill>
+              </a:defRPr>
+            </a:pPr>
+            <a:r>
+              <a:t>$17K</a:t>
+            </a:r>
+          </a:p>
+        </p:txBody>
+      </p:sp>
+      <p:sp>
+        <p:nvSpPr>
+          <p:cNvPr id="160" name="Rectangle 159"/>
+          <p:cNvSpPr/>
+          <p:nvPr/>
+        </p:nvSpPr>
+        <p:spPr>
+          <a:xfrm>
+            <a:off x="6217920" y="4251960"/>
+            <a:ext cx="5486400" cy="365760"/>
           </a:xfrm>
           <a:prstGeom prst="rect">
             <a:avLst/>
@@ -8660,154 +10896,189 @@
       </p:sp>
       <p:sp>
         <p:nvSpPr>
-          <p:cNvPr id="101" name="TextBox 100"/>
-          <p:cNvSpPr txBox="1"/>
-          <p:nvPr/>
-        </p:nvSpPr>
-        <p:spPr>
-          <a:xfrm>
-            <a:off x="6309360" y="4681728"/>
-            <a:ext cx="2011680" cy="365760"/>
-          </a:xfrm>
-          <a:prstGeom prst="rect">
-            <a:avLst/>
-          </a:prstGeom>
-          <a:noFill/>
-        </p:spPr>
-        <p:txBody>
-          <a:bodyPr wrap="square">
-            <a:spAutoFit/>
-          </a:bodyPr>
-          <a:lstStyle/>
-          <a:p>
-            <a:pPr algn="l">
-              <a:defRPr sz="1200" b="1">
+          <p:cNvPr id="161" name="TextBox 160"/>
+          <p:cNvSpPr txBox="1"/>
+          <p:nvPr/>
+        </p:nvSpPr>
+        <p:spPr>
+          <a:xfrm>
+            <a:off x="6309360" y="4270248"/>
+            <a:ext cx="1645920" cy="320040"/>
+          </a:xfrm>
+          <a:prstGeom prst="rect">
+            <a:avLst/>
+          </a:prstGeom>
+          <a:noFill/>
+        </p:spPr>
+        <p:txBody>
+          <a:bodyPr wrap="square">
+            <a:spAutoFit/>
+          </a:bodyPr>
+          <a:lstStyle/>
+          <a:p>
+            <a:pPr algn="l">
+              <a:defRPr sz="1100" b="1">
                 <a:solidFill>
                   <a:srgbClr val="FFFFFF"/>
                 </a:solidFill>
               </a:defRPr>
             </a:pPr>
             <a:r>
-              <a:t>2 humans + AI cluster</a:t>
-            </a:r>
-          </a:p>
-        </p:txBody>
-      </p:sp>
-      <p:sp>
-        <p:nvSpPr>
-          <p:cNvPr id="102" name="TextBox 101"/>
-          <p:cNvSpPr txBox="1"/>
-          <p:nvPr/>
-        </p:nvSpPr>
-        <p:spPr>
-          <a:xfrm>
-            <a:off x="9418320" y="4681728"/>
-            <a:ext cx="1005840" cy="365760"/>
-          </a:xfrm>
-          <a:prstGeom prst="rect">
-            <a:avLst/>
-          </a:prstGeom>
-          <a:noFill/>
-        </p:spPr>
-        <p:txBody>
-          <a:bodyPr wrap="square">
-            <a:spAutoFit/>
-          </a:bodyPr>
-          <a:lstStyle/>
-          <a:p>
-            <a:pPr algn="l">
-              <a:defRPr sz="1200" b="1">
+              <a:t>5 humans + AI</a:t>
+            </a:r>
+          </a:p>
+        </p:txBody>
+      </p:sp>
+      <p:sp>
+        <p:nvSpPr>
+          <p:cNvPr id="162" name="TextBox 161"/>
+          <p:cNvSpPr txBox="1"/>
+          <p:nvPr/>
+        </p:nvSpPr>
+        <p:spPr>
+          <a:xfrm>
+            <a:off x="7955279" y="4270248"/>
+            <a:ext cx="1371600" cy="320040"/>
+          </a:xfrm>
+          <a:prstGeom prst="rect">
+            <a:avLst/>
+          </a:prstGeom>
+          <a:noFill/>
+        </p:spPr>
+        <p:txBody>
+          <a:bodyPr wrap="square">
+            <a:spAutoFit/>
+          </a:bodyPr>
+          <a:lstStyle/>
+          <a:p>
+            <a:pPr algn="l">
+              <a:defRPr sz="900" b="0">
+                <a:solidFill>
+                  <a:srgbClr val="FFCCCC"/>
+                </a:solidFill>
+              </a:defRPr>
+            </a:pPr>
+            <a:r>
+              <a:t>3 onshore + 2 offshore</a:t>
+            </a:r>
+          </a:p>
+        </p:txBody>
+      </p:sp>
+      <p:sp>
+        <p:nvSpPr>
+          <p:cNvPr id="163" name="TextBox 162"/>
+          <p:cNvSpPr txBox="1"/>
+          <p:nvPr/>
+        </p:nvSpPr>
+        <p:spPr>
+          <a:xfrm>
+            <a:off x="10012680" y="4270248"/>
+            <a:ext cx="685800" cy="320040"/>
+          </a:xfrm>
+          <a:prstGeom prst="rect">
+            <a:avLst/>
+          </a:prstGeom>
+          <a:noFill/>
+        </p:spPr>
+        <p:txBody>
+          <a:bodyPr wrap="square">
+            <a:spAutoFit/>
+          </a:bodyPr>
+          <a:lstStyle/>
+          <a:p>
+            <a:pPr algn="l">
+              <a:defRPr sz="1100" b="1">
                 <a:solidFill>
                   <a:srgbClr val="FFFFFF"/>
                 </a:solidFill>
               </a:defRPr>
             </a:pPr>
             <a:r>
-              <a:t>8-13 weeks</a:t>
-            </a:r>
-          </a:p>
-        </p:txBody>
-      </p:sp>
-      <p:sp>
-        <p:nvSpPr>
-          <p:cNvPr id="103" name="TextBox 102"/>
-          <p:cNvSpPr txBox="1"/>
-          <p:nvPr/>
-        </p:nvSpPr>
-        <p:spPr>
-          <a:xfrm>
-            <a:off x="10515600" y="4681728"/>
-            <a:ext cx="1097280" cy="365760"/>
-          </a:xfrm>
-          <a:prstGeom prst="rect">
-            <a:avLst/>
-          </a:prstGeom>
-          <a:noFill/>
-        </p:spPr>
-        <p:txBody>
-          <a:bodyPr wrap="square">
-            <a:spAutoFit/>
-          </a:bodyPr>
-          <a:lstStyle/>
-          <a:p>
-            <a:pPr algn="l">
-              <a:defRPr sz="1200" b="1">
+              <a:t>8-15 wks</a:t>
+            </a:r>
+          </a:p>
+        </p:txBody>
+      </p:sp>
+      <p:sp>
+        <p:nvSpPr>
+          <p:cNvPr id="164" name="TextBox 163"/>
+          <p:cNvSpPr txBox="1"/>
+          <p:nvPr/>
+        </p:nvSpPr>
+        <p:spPr>
+          <a:xfrm>
+            <a:off x="10744200" y="4270248"/>
+            <a:ext cx="914400" cy="320040"/>
+          </a:xfrm>
+          <a:prstGeom prst="rect">
+            <a:avLst/>
+          </a:prstGeom>
+          <a:noFill/>
+        </p:spPr>
+        <p:txBody>
+          <a:bodyPr wrap="square">
+            <a:spAutoFit/>
+          </a:bodyPr>
+          <a:lstStyle/>
+          <a:p>
+            <a:pPr algn="l">
+              <a:defRPr sz="1100" b="1">
                 <a:solidFill>
                   <a:srgbClr val="FFFFFF"/>
                 </a:solidFill>
               </a:defRPr>
             </a:pPr>
             <a:r>
-              <a:t>$470K-760K</a:t>
-            </a:r>
-          </a:p>
-        </p:txBody>
-      </p:sp>
-      <p:sp>
-        <p:nvSpPr>
-          <p:cNvPr id="104" name="TextBox 103"/>
-          <p:cNvSpPr txBox="1"/>
-          <p:nvPr/>
-        </p:nvSpPr>
-        <p:spPr>
-          <a:xfrm>
-            <a:off x="6309360" y="5212080"/>
-            <a:ext cx="5029200" cy="274320"/>
-          </a:xfrm>
-          <a:prstGeom prst="rect">
-            <a:avLst/>
-          </a:prstGeom>
-          <a:noFill/>
-        </p:spPr>
-        <p:txBody>
-          <a:bodyPr wrap="square">
-            <a:spAutoFit/>
-          </a:bodyPr>
-          <a:lstStyle/>
-          <a:p>
-            <a:pPr algn="l">
-              <a:defRPr sz="1000" b="0">
+              <a:t>$408K</a:t>
+            </a:r>
+          </a:p>
+        </p:txBody>
+      </p:sp>
+      <p:sp>
+        <p:nvSpPr>
+          <p:cNvPr id="165" name="TextBox 164"/>
+          <p:cNvSpPr txBox="1"/>
+          <p:nvPr/>
+        </p:nvSpPr>
+        <p:spPr>
+          <a:xfrm>
+            <a:off x="6309360" y="4754880"/>
+            <a:ext cx="5029200" cy="228600"/>
+          </a:xfrm>
+          <a:prstGeom prst="rect">
+            <a:avLst/>
+          </a:prstGeom>
+          <a:noFill/>
+        </p:spPr>
+        <p:txBody>
+          <a:bodyPr wrap="square">
+            <a:spAutoFit/>
+          </a:bodyPr>
+          <a:lstStyle/>
+          <a:p>
+            <a:pPr algn="l">
+              <a:defRPr sz="900" b="0">
                 <a:solidFill>
                   <a:srgbClr val="666666"/>
                 </a:solidFill>
               </a:defRPr>
             </a:pPr>
             <a:r>
-              <a:t>Parallel execution — AI agents run concurrently:</a:t>
-            </a:r>
-          </a:p>
-        </p:txBody>
-      </p:sp>
-      <p:sp>
-        <p:nvSpPr>
-          <p:cNvPr id="105" name="Rectangle 104"/>
+              <a:t>Parallel — AI agents run concurrently with human supervision:</a:t>
+            </a:r>
+          </a:p>
+        </p:txBody>
+      </p:sp>
+      <p:sp>
+        <p:nvSpPr>
+          <p:cNvPr id="166" name="Rectangle 165"/>
           <p:cNvSpPr/>
           <p:nvPr/>
         </p:nvSpPr>
         <p:spPr>
           <a:xfrm>
-            <a:off x="6309360" y="5532120"/>
-            <a:ext cx="640080" cy="320040"/>
+            <a:off x="6309360" y="5029200"/>
+            <a:ext cx="594360" cy="274320"/>
           </a:xfrm>
           <a:prstGeom prst="rect">
             <a:avLst/>
@@ -8843,14 +11114,14 @@
       </p:sp>
       <p:sp>
         <p:nvSpPr>
-          <p:cNvPr id="106" name="TextBox 105"/>
-          <p:cNvSpPr txBox="1"/>
-          <p:nvPr/>
-        </p:nvSpPr>
-        <p:spPr>
-          <a:xfrm>
-            <a:off x="6309360" y="5541264"/>
-            <a:ext cx="640080" cy="301752"/>
+          <p:cNvPr id="167" name="TextBox 166"/>
+          <p:cNvSpPr txBox="1"/>
+          <p:nvPr/>
+        </p:nvSpPr>
+        <p:spPr>
+          <a:xfrm>
+            <a:off x="6309360" y="5029200"/>
+            <a:ext cx="594360" cy="274320"/>
           </a:xfrm>
           <a:prstGeom prst="rect">
             <a:avLst/>
@@ -8864,7 +11135,7 @@
           <a:lstStyle/>
           <a:p>
             <a:pPr algn="ctr">
-              <a:defRPr sz="900" b="1">
+              <a:defRPr sz="800" b="1">
                 <a:solidFill>
                   <a:srgbClr val="FFFFFF"/>
                 </a:solidFill>
@@ -8878,14 +11149,14 @@
       </p:sp>
       <p:sp>
         <p:nvSpPr>
-          <p:cNvPr id="107" name="Rectangle 106"/>
+          <p:cNvPr id="168" name="Rectangle 167"/>
           <p:cNvSpPr/>
           <p:nvPr/>
         </p:nvSpPr>
         <p:spPr>
           <a:xfrm>
-            <a:off x="6995160" y="5532120"/>
-            <a:ext cx="2926080" cy="320040"/>
+            <a:off x="6940296" y="5029200"/>
+            <a:ext cx="2743200" cy="274320"/>
           </a:xfrm>
           <a:prstGeom prst="rect">
             <a:avLst/>
@@ -8921,14 +11192,14 @@
       </p:sp>
       <p:sp>
         <p:nvSpPr>
-          <p:cNvPr id="108" name="TextBox 107"/>
-          <p:cNvSpPr txBox="1"/>
-          <p:nvPr/>
-        </p:nvSpPr>
-        <p:spPr>
-          <a:xfrm>
-            <a:off x="6995160" y="5541264"/>
-            <a:ext cx="2926080" cy="301752"/>
+          <p:cNvPr id="169" name="TextBox 168"/>
+          <p:cNvSpPr txBox="1"/>
+          <p:nvPr/>
+        </p:nvSpPr>
+        <p:spPr>
+          <a:xfrm>
+            <a:off x="6940296" y="5029200"/>
+            <a:ext cx="2743200" cy="274320"/>
           </a:xfrm>
           <a:prstGeom prst="rect">
             <a:avLst/>
@@ -8942,7 +11213,7 @@
           <a:lstStyle/>
           <a:p>
             <a:pPr algn="ctr">
-              <a:defRPr sz="900" b="1">
+              <a:defRPr sz="800" b="1">
                 <a:solidFill>
                   <a:srgbClr val="FFFFFF"/>
                 </a:solidFill>
@@ -8956,14 +11227,14 @@
       </p:sp>
       <p:sp>
         <p:nvSpPr>
-          <p:cNvPr id="109" name="Rectangle 108"/>
+          <p:cNvPr id="170" name="Rectangle 169"/>
           <p:cNvSpPr/>
           <p:nvPr/>
         </p:nvSpPr>
         <p:spPr>
           <a:xfrm>
-            <a:off x="9966960" y="5532120"/>
-            <a:ext cx="914400" cy="320040"/>
+            <a:off x="9720072" y="5029200"/>
+            <a:ext cx="822960" cy="274320"/>
           </a:xfrm>
           <a:prstGeom prst="rect">
             <a:avLst/>
@@ -8999,14 +11270,14 @@
       </p:sp>
       <p:sp>
         <p:nvSpPr>
-          <p:cNvPr id="110" name="TextBox 109"/>
-          <p:cNvSpPr txBox="1"/>
-          <p:nvPr/>
-        </p:nvSpPr>
-        <p:spPr>
-          <a:xfrm>
-            <a:off x="9966960" y="5541264"/>
-            <a:ext cx="914400" cy="301752"/>
+          <p:cNvPr id="171" name="TextBox 170"/>
+          <p:cNvSpPr txBox="1"/>
+          <p:nvPr/>
+        </p:nvSpPr>
+        <p:spPr>
+          <a:xfrm>
+            <a:off x="9720072" y="5029200"/>
+            <a:ext cx="822960" cy="274320"/>
           </a:xfrm>
           <a:prstGeom prst="rect">
             <a:avLst/>
@@ -9020,7 +11291,7 @@
           <a:lstStyle/>
           <a:p>
             <a:pPr algn="ctr">
-              <a:defRPr sz="900" b="1">
+              <a:defRPr sz="800" b="1">
                 <a:solidFill>
                   <a:srgbClr val="FFFFFF"/>
                 </a:solidFill>
@@ -9034,14 +11305,14 @@
       </p:sp>
       <p:sp>
         <p:nvSpPr>
-          <p:cNvPr id="111" name="Rectangle 110"/>
+          <p:cNvPr id="172" name="Rectangle 171"/>
           <p:cNvSpPr/>
           <p:nvPr/>
         </p:nvSpPr>
         <p:spPr>
           <a:xfrm>
-            <a:off x="10927080" y="5532120"/>
-            <a:ext cx="548640" cy="320040"/>
+            <a:off x="10579608" y="5029200"/>
+            <a:ext cx="502920" cy="274320"/>
           </a:xfrm>
           <a:prstGeom prst="rect">
             <a:avLst/>
@@ -9077,14 +11348,14 @@
       </p:sp>
       <p:sp>
         <p:nvSpPr>
-          <p:cNvPr id="112" name="TextBox 111"/>
-          <p:cNvSpPr txBox="1"/>
-          <p:nvPr/>
-        </p:nvSpPr>
-        <p:spPr>
-          <a:xfrm>
-            <a:off x="10927080" y="5541264"/>
-            <a:ext cx="548640" cy="301752"/>
+          <p:cNvPr id="173" name="TextBox 172"/>
+          <p:cNvSpPr txBox="1"/>
+          <p:nvPr/>
+        </p:nvSpPr>
+        <p:spPr>
+          <a:xfrm>
+            <a:off x="10579608" y="5029200"/>
+            <a:ext cx="502920" cy="274320"/>
           </a:xfrm>
           <a:prstGeom prst="rect">
             <a:avLst/>
@@ -9098,7 +11369,7 @@
           <a:lstStyle/>
           <a:p>
             <a:pPr algn="ctr">
-              <a:defRPr sz="900" b="1">
+              <a:defRPr sz="800" b="1">
                 <a:solidFill>
                   <a:srgbClr val="FFFFFF"/>
                 </a:solidFill>
@@ -9112,14 +11383,14 @@
       </p:sp>
       <p:sp>
         <p:nvSpPr>
-          <p:cNvPr id="113" name="Rectangle 112"/>
+          <p:cNvPr id="174" name="Rectangle 173"/>
           <p:cNvSpPr/>
           <p:nvPr/>
         </p:nvSpPr>
         <p:spPr>
           <a:xfrm>
-            <a:off x="457200" y="6035040"/>
-            <a:ext cx="11247120" cy="457200"/>
+            <a:off x="457200" y="5486400"/>
+            <a:ext cx="11247120" cy="320040"/>
           </a:xfrm>
           <a:prstGeom prst="rect">
             <a:avLst/>
@@ -9155,14 +11426,14 @@
       </p:sp>
       <p:sp>
         <p:nvSpPr>
-          <p:cNvPr id="114" name="TextBox 113"/>
-          <p:cNvSpPr txBox="1"/>
-          <p:nvPr/>
-        </p:nvSpPr>
-        <p:spPr>
-          <a:xfrm>
-            <a:off x="640080" y="6053328"/>
-            <a:ext cx="10789920" cy="411480"/>
+          <p:cNvPr id="175" name="TextBox 174"/>
+          <p:cNvSpPr txBox="1"/>
+          <p:nvPr/>
+        </p:nvSpPr>
+        <p:spPr>
+          <a:xfrm>
+            <a:off x="640080" y="5486400"/>
+            <a:ext cx="10789920" cy="301752"/>
           </a:xfrm>
           <a:prstGeom prst="rect">
             <a:avLst/>
@@ -9176,14 +11447,49 @@
           <a:lstStyle/>
           <a:p>
             <a:pPr algn="ctr">
-              <a:defRPr sz="1300" b="1">
+              <a:defRPr sz="1100" b="1">
                 <a:solidFill>
                   <a:srgbClr val="D52B1E"/>
                 </a:solidFill>
               </a:defRPr>
             </a:pPr>
             <a:r>
-              <a:t>EliteA: 82% fewer human FTEs (2 vs 11)  |  60% lower cost  |  50% faster  |  AI handles ~70% of code, tests, and docs</a:t>
+              <a:t>EliteA saves $500K-770K CAD (55-65%)  |  50% fewer human FTEs (5 vs 10)  |  4-6 months faster  |  AI handles ~70% of code, tests, and docs</a:t>
+            </a:r>
+          </a:p>
+        </p:txBody>
+      </p:sp>
+      <p:sp>
+        <p:nvSpPr>
+          <p:cNvPr id="176" name="TextBox 175"/>
+          <p:cNvSpPr txBox="1"/>
+          <p:nvPr/>
+        </p:nvSpPr>
+        <p:spPr>
+          <a:xfrm>
+            <a:off x="640080" y="5897880"/>
+            <a:ext cx="10789920" cy="320040"/>
+          </a:xfrm>
+          <a:prstGeom prst="rect">
+            <a:avLst/>
+          </a:prstGeom>
+          <a:noFill/>
+        </p:spPr>
+        <p:txBody>
+          <a:bodyPr wrap="square">
+            <a:spAutoFit/>
+          </a:bodyPr>
+          <a:lstStyle/>
+          <a:p>
+            <a:pPr algn="ctr">
+              <a:defRPr sz="900" b="0">
+                <a:solidFill>
+                  <a:srgbClr val="666666"/>
+                </a:solidFill>
+              </a:defRPr>
+            </a:pPr>
+            <a:r>
+              <a:t>On = Onshore (Canada)  |  Off = Offshore/Nearshore  |  AI = EPAM EliteA agent compute  |  PT = Part-time  |  All rates in CAD/hour</a:t>
             </a:r>
           </a:p>
         </p:txBody>
@@ -9322,7 +11628,7 @@
               </a:defRPr>
             </a:pPr>
             <a:r>
-              <a:t>Agentic AI SDLC reduces cost by ~60% and timeline by ~50% vs. traditional</a:t>
+              <a:t>All amounts in CAD  |  Agentic AI SDLC reduces cost by ~60% and timeline by ~50%</a:t>
             </a:r>
           </a:p>
         </p:txBody>
@@ -9427,7 +11733,7 @@
               </a:defRPr>
             </a:pPr>
             <a:r>
-              <a:t>Implementation Cost Comparison</a:t>
+              <a:t>Implementation Cost Comparison (CAD)</a:t>
             </a:r>
           </a:p>
         </p:txBody>
@@ -9476,7 +11782,7 @@
         <p:spPr>
           <a:xfrm>
             <a:off x="731520" y="2103120"/>
-            <a:ext cx="2286000" cy="320040"/>
+            <a:ext cx="2286000" cy="292608"/>
           </a:xfrm>
           <a:prstGeom prst="rect">
             <a:avLst/>
@@ -9511,7 +11817,7 @@
         <p:spPr>
           <a:xfrm>
             <a:off x="3017520" y="2103120"/>
-            <a:ext cx="1097280" cy="320040"/>
+            <a:ext cx="1097280" cy="292608"/>
           </a:xfrm>
           <a:prstGeom prst="rect">
             <a:avLst/>
@@ -9532,7 +11838,7 @@
               </a:defRPr>
             </a:pPr>
             <a:r>
-              <a:t>$200K-300K</a:t>
+              <a:t>$142K-199K</a:t>
             </a:r>
           </a:p>
         </p:txBody>
@@ -9546,7 +11852,7 @@
         <p:spPr>
           <a:xfrm>
             <a:off x="4206240" y="2103120"/>
-            <a:ext cx="1097280" cy="320040"/>
+            <a:ext cx="1097280" cy="292608"/>
           </a:xfrm>
           <a:prstGeom prst="rect">
             <a:avLst/>
@@ -9580,8 +11886,8 @@
         </p:nvSpPr>
         <p:spPr>
           <a:xfrm>
-            <a:off x="731520" y="2450591"/>
-            <a:ext cx="2286000" cy="320040"/>
+            <a:off x="731520" y="2423160"/>
+            <a:ext cx="2286000" cy="292608"/>
           </a:xfrm>
           <a:prstGeom prst="rect">
             <a:avLst/>
@@ -9615,8 +11921,8 @@
         </p:nvSpPr>
         <p:spPr>
           <a:xfrm>
-            <a:off x="3017520" y="2450591"/>
-            <a:ext cx="1097280" cy="320040"/>
+            <a:off x="3017520" y="2423160"/>
+            <a:ext cx="1097280" cy="292608"/>
           </a:xfrm>
           <a:prstGeom prst="rect">
             <a:avLst/>
@@ -9637,7 +11943,7 @@
               </a:defRPr>
             </a:pPr>
             <a:r>
-              <a:t>$500K-800K</a:t>
+              <a:t>$264K-317K</a:t>
             </a:r>
           </a:p>
         </p:txBody>
@@ -9650,8 +11956,8 @@
         </p:nvSpPr>
         <p:spPr>
           <a:xfrm>
-            <a:off x="4206240" y="2450591"/>
-            <a:ext cx="1097280" cy="320040"/>
+            <a:off x="4206240" y="2423160"/>
+            <a:ext cx="1097280" cy="292608"/>
           </a:xfrm>
           <a:prstGeom prst="rect">
             <a:avLst/>
@@ -9685,8 +11991,8 @@
         </p:nvSpPr>
         <p:spPr>
           <a:xfrm>
-            <a:off x="731520" y="2798063"/>
-            <a:ext cx="2286000" cy="320040"/>
+            <a:off x="731520" y="2743200"/>
+            <a:ext cx="2286000" cy="292608"/>
           </a:xfrm>
           <a:prstGeom prst="rect">
             <a:avLst/>
@@ -9720,8 +12026,8 @@
         </p:nvSpPr>
         <p:spPr>
           <a:xfrm>
-            <a:off x="3017520" y="2798063"/>
-            <a:ext cx="1097280" cy="320040"/>
+            <a:off x="3017520" y="2743200"/>
+            <a:ext cx="1097280" cy="292608"/>
           </a:xfrm>
           <a:prstGeom prst="rect">
             <a:avLst/>
@@ -9742,7 +12048,7 @@
               </a:defRPr>
             </a:pPr>
             <a:r>
-              <a:t>$400K-600K</a:t>
+              <a:t>$264K-317K</a:t>
             </a:r>
           </a:p>
         </p:txBody>
@@ -9755,8 +12061,8 @@
         </p:nvSpPr>
         <p:spPr>
           <a:xfrm>
-            <a:off x="4206240" y="2798063"/>
-            <a:ext cx="1097280" cy="320040"/>
+            <a:off x="4206240" y="2743200"/>
+            <a:ext cx="1097280" cy="292608"/>
           </a:xfrm>
           <a:prstGeom prst="rect">
             <a:avLst/>
@@ -9790,8 +12096,8 @@
         </p:nvSpPr>
         <p:spPr>
           <a:xfrm>
-            <a:off x="731520" y="3145536"/>
-            <a:ext cx="2286000" cy="320040"/>
+            <a:off x="731520" y="3063239"/>
+            <a:ext cx="2286000" cy="292608"/>
           </a:xfrm>
           <a:prstGeom prst="rect">
             <a:avLst/>
@@ -9812,7 +12118,7 @@
               </a:defRPr>
             </a:pPr>
             <a:r>
-              <a:t>QA &amp; Security</a:t>
+              <a:t>QA (Functional + Automation)</a:t>
             </a:r>
           </a:p>
         </p:txBody>
@@ -9825,8 +12131,8 @@
         </p:nvSpPr>
         <p:spPr>
           <a:xfrm>
-            <a:off x="3017520" y="3145536"/>
-            <a:ext cx="1097280" cy="320040"/>
+            <a:off x="3017520" y="3063239"/>
+            <a:ext cx="1097280" cy="292608"/>
           </a:xfrm>
           <a:prstGeom prst="rect">
             <a:avLst/>
@@ -9847,7 +12153,7 @@
               </a:defRPr>
             </a:pPr>
             <a:r>
-              <a:t>$200K-300K</a:t>
+              <a:t>$99K-131K</a:t>
             </a:r>
           </a:p>
         </p:txBody>
@@ -9860,8 +12166,8 @@
         </p:nvSpPr>
         <p:spPr>
           <a:xfrm>
-            <a:off x="4206240" y="3145536"/>
-            <a:ext cx="1097280" cy="320040"/>
+            <a:off x="4206240" y="3063239"/>
+            <a:ext cx="1097280" cy="292608"/>
           </a:xfrm>
           <a:prstGeom prst="rect">
             <a:avLst/>
@@ -9895,8 +12201,8 @@
         </p:nvSpPr>
         <p:spPr>
           <a:xfrm>
-            <a:off x="731520" y="3493008"/>
-            <a:ext cx="2286000" cy="320040"/>
+            <a:off x="731520" y="3383279"/>
+            <a:ext cx="2286000" cy="292608"/>
           </a:xfrm>
           <a:prstGeom prst="rect">
             <a:avLst/>
@@ -9917,7 +12223,7 @@
               </a:defRPr>
             </a:pPr>
             <a:r>
-              <a:t>Launch &amp; Monitoring</a:t>
+              <a:t>DevOps / Launch</a:t>
             </a:r>
           </a:p>
         </p:txBody>
@@ -9930,8 +12236,8 @@
         </p:nvSpPr>
         <p:spPr>
           <a:xfrm>
-            <a:off x="3017520" y="3493008"/>
-            <a:ext cx="1097280" cy="320040"/>
+            <a:off x="3017520" y="3383279"/>
+            <a:ext cx="1097280" cy="292608"/>
           </a:xfrm>
           <a:prstGeom prst="rect">
             <a:avLst/>
@@ -9952,7 +12258,7 @@
               </a:defRPr>
             </a:pPr>
             <a:r>
-              <a:t>$100K-150K</a:t>
+              <a:t>$56K-67K</a:t>
             </a:r>
           </a:p>
         </p:txBody>
@@ -9965,8 +12271,8 @@
         </p:nvSpPr>
         <p:spPr>
           <a:xfrm>
-            <a:off x="4206240" y="3493008"/>
-            <a:ext cx="1097280" cy="320040"/>
+            <a:off x="4206240" y="3383279"/>
+            <a:ext cx="1097280" cy="292608"/>
           </a:xfrm>
           <a:prstGeom prst="rect">
             <a:avLst/>
@@ -9994,13 +12300,118 @@
       </p:sp>
       <p:sp>
         <p:nvSpPr>
-          <p:cNvPr id="24" name="Rectangle 23"/>
+          <p:cNvPr id="24" name="TextBox 23"/>
+          <p:cNvSpPr txBox="1"/>
+          <p:nvPr/>
+        </p:nvSpPr>
+        <p:spPr>
+          <a:xfrm>
+            <a:off x="731520" y="3703320"/>
+            <a:ext cx="2286000" cy="292608"/>
+          </a:xfrm>
+          <a:prstGeom prst="rect">
+            <a:avLst/>
+          </a:prstGeom>
+          <a:noFill/>
+        </p:spPr>
+        <p:txBody>
+          <a:bodyPr wrap="square">
+            <a:spAutoFit/>
+          </a:bodyPr>
+          <a:lstStyle/>
+          <a:p>
+            <a:pPr algn="l">
+              <a:defRPr sz="1100" b="0">
+                <a:solidFill>
+                  <a:srgbClr val="333333"/>
+                </a:solidFill>
+              </a:defRPr>
+            </a:pPr>
+            <a:r>
+              <a:t>DM + BA Oversight</a:t>
+            </a:r>
+          </a:p>
+        </p:txBody>
+      </p:sp>
+      <p:sp>
+        <p:nvSpPr>
+          <p:cNvPr id="25" name="TextBox 24"/>
+          <p:cNvSpPr txBox="1"/>
+          <p:nvPr/>
+        </p:nvSpPr>
+        <p:spPr>
+          <a:xfrm>
+            <a:off x="3017520" y="3703320"/>
+            <a:ext cx="1097280" cy="292608"/>
+          </a:xfrm>
+          <a:prstGeom prst="rect">
+            <a:avLst/>
+          </a:prstGeom>
+          <a:noFill/>
+        </p:spPr>
+        <p:txBody>
+          <a:bodyPr wrap="square">
+            <a:spAutoFit/>
+          </a:bodyPr>
+          <a:lstStyle/>
+          <a:p>
+            <a:pPr algn="r">
+              <a:defRPr sz="1100" b="0">
+                <a:solidFill>
+                  <a:srgbClr val="666666"/>
+                </a:solidFill>
+              </a:defRPr>
+            </a:pPr>
+            <a:r>
+              <a:t>$243K-365K</a:t>
+            </a:r>
+          </a:p>
+        </p:txBody>
+      </p:sp>
+      <p:sp>
+        <p:nvSpPr>
+          <p:cNvPr id="26" name="TextBox 25"/>
+          <p:cNvSpPr txBox="1"/>
+          <p:nvPr/>
+        </p:nvSpPr>
+        <p:spPr>
+          <a:xfrm>
+            <a:off x="4206240" y="3703320"/>
+            <a:ext cx="1097280" cy="292608"/>
+          </a:xfrm>
+          <a:prstGeom prst="rect">
+            <a:avLst/>
+          </a:prstGeom>
+          <a:noFill/>
+        </p:spPr>
+        <p:txBody>
+          <a:bodyPr wrap="square">
+            <a:spAutoFit/>
+          </a:bodyPr>
+          <a:lstStyle/>
+          <a:p>
+            <a:pPr algn="l">
+              <a:defRPr sz="1100" b="0">
+                <a:solidFill>
+                  <a:srgbClr val="666666"/>
+                </a:solidFill>
+              </a:defRPr>
+            </a:pPr>
+            <a:r>
+              <a:t>Full duration</a:t>
+            </a:r>
+          </a:p>
+        </p:txBody>
+      </p:sp>
+      <p:sp>
+        <p:nvSpPr>
+          <p:cNvPr id="27" name="Rectangle 26"/>
           <p:cNvSpPr/>
           <p:nvPr/>
         </p:nvSpPr>
         <p:spPr>
           <a:xfrm>
-            <a:off x="731520" y="3931920"/>
+            <a:off x="731520" y="4069080"/>
             <a:ext cx="4572000" cy="365760"/>
           </a:xfrm>
           <a:prstGeom prst="rect">
@@ -10037,13 +12448,13 @@
       </p:sp>
       <p:sp>
         <p:nvSpPr>
-          <p:cNvPr id="25" name="TextBox 24"/>
-          <p:cNvSpPr txBox="1"/>
-          <p:nvPr/>
-        </p:nvSpPr>
-        <p:spPr>
-          <a:xfrm>
-            <a:off x="731520" y="3950208"/>
+          <p:cNvPr id="28" name="TextBox 27"/>
+          <p:cNvSpPr txBox="1"/>
+          <p:nvPr/>
+        </p:nvSpPr>
+        <p:spPr>
+          <a:xfrm>
+            <a:off x="731520" y="4087368"/>
             <a:ext cx="2286000" cy="320040"/>
           </a:xfrm>
           <a:prstGeom prst="rect">
@@ -10072,13 +12483,13 @@
       </p:sp>
       <p:sp>
         <p:nvSpPr>
-          <p:cNvPr id="26" name="TextBox 25"/>
-          <p:cNvSpPr txBox="1"/>
-          <p:nvPr/>
-        </p:nvSpPr>
-        <p:spPr>
-          <a:xfrm>
-            <a:off x="3017520" y="3950208"/>
+          <p:cNvPr id="29" name="TextBox 28"/>
+          <p:cNvSpPr txBox="1"/>
+          <p:nvPr/>
+        </p:nvSpPr>
+        <p:spPr>
+          <a:xfrm>
+            <a:off x="3017520" y="4087368"/>
             <a:ext cx="1097280" cy="320040"/>
           </a:xfrm>
           <a:prstGeom prst="rect">
@@ -10100,20 +12511,20 @@
               </a:defRPr>
             </a:pPr>
             <a:r>
-              <a:t>$1.4M-2.2M</a:t>
-            </a:r>
-          </a:p>
-        </p:txBody>
-      </p:sp>
-      <p:sp>
-        <p:nvSpPr>
-          <p:cNvPr id="27" name="TextBox 26"/>
-          <p:cNvSpPr txBox="1"/>
-          <p:nvPr/>
-        </p:nvSpPr>
-        <p:spPr>
-          <a:xfrm>
-            <a:off x="4206240" y="3950208"/>
+              <a:t>$905K-1.18M</a:t>
+            </a:r>
+          </a:p>
+        </p:txBody>
+      </p:sp>
+      <p:sp>
+        <p:nvSpPr>
+          <p:cNvPr id="30" name="TextBox 29"/>
+          <p:cNvSpPr txBox="1"/>
+          <p:nvPr/>
+        </p:nvSpPr>
+        <p:spPr>
+          <a:xfrm>
+            <a:off x="4206240" y="4087368"/>
             <a:ext cx="1097280" cy="320040"/>
           </a:xfrm>
           <a:prstGeom prst="rect">
@@ -10142,13 +12553,13 @@
       </p:sp>
       <p:sp>
         <p:nvSpPr>
-          <p:cNvPr id="28" name="TextBox 27"/>
-          <p:cNvSpPr txBox="1"/>
-          <p:nvPr/>
-        </p:nvSpPr>
-        <p:spPr>
-          <a:xfrm>
-            <a:off x="731520" y="4572000"/>
+          <p:cNvPr id="31" name="TextBox 30"/>
+          <p:cNvSpPr txBox="1"/>
+          <p:nvPr/>
+        </p:nvSpPr>
+        <p:spPr>
+          <a:xfrm>
+            <a:off x="731520" y="4663440"/>
             <a:ext cx="5029200" cy="320040"/>
           </a:xfrm>
           <a:prstGeom prst="rect">
@@ -10177,13 +12588,13 @@
       </p:sp>
       <p:sp>
         <p:nvSpPr>
-          <p:cNvPr id="29" name="TextBox 28"/>
-          <p:cNvSpPr txBox="1"/>
-          <p:nvPr/>
-        </p:nvSpPr>
-        <p:spPr>
-          <a:xfrm>
-            <a:off x="731520" y="4937760"/>
+          <p:cNvPr id="32" name="TextBox 31"/>
+          <p:cNvSpPr txBox="1"/>
+          <p:nvPr/>
+        </p:nvSpPr>
+        <p:spPr>
+          <a:xfrm>
+            <a:off x="731520" y="5029200"/>
             <a:ext cx="2286000" cy="274320"/>
           </a:xfrm>
           <a:prstGeom prst="rect">
@@ -10205,20 +12616,20 @@
               </a:defRPr>
             </a:pPr>
             <a:r>
-              <a:t>AI Requirements + Architecture</a:t>
-            </a:r>
-          </a:p>
-        </p:txBody>
-      </p:sp>
-      <p:sp>
-        <p:nvSpPr>
-          <p:cNvPr id="30" name="TextBox 29"/>
-          <p:cNvSpPr txBox="1"/>
-          <p:nvPr/>
-        </p:nvSpPr>
-        <p:spPr>
-          <a:xfrm>
-            <a:off x="3017520" y="4937760"/>
+              <a:t>Onshore (DM + BA + SA)</a:t>
+            </a:r>
+          </a:p>
+        </p:txBody>
+      </p:sp>
+      <p:sp>
+        <p:nvSpPr>
+          <p:cNvPr id="33" name="TextBox 32"/>
+          <p:cNvSpPr txBox="1"/>
+          <p:nvPr/>
+        </p:nvSpPr>
+        <p:spPr>
+          <a:xfrm>
+            <a:off x="3017520" y="5029200"/>
             <a:ext cx="1097280" cy="274320"/>
           </a:xfrm>
           <a:prstGeom prst="rect">
@@ -10240,20 +12651,20 @@
               </a:defRPr>
             </a:pPr>
             <a:r>
-              <a:t>$60K-90K</a:t>
-            </a:r>
-          </a:p>
-        </p:txBody>
-      </p:sp>
-      <p:sp>
-        <p:nvSpPr>
-          <p:cNvPr id="31" name="TextBox 30"/>
-          <p:cNvSpPr txBox="1"/>
-          <p:nvPr/>
-        </p:nvSpPr>
-        <p:spPr>
-          <a:xfrm>
-            <a:off x="4206240" y="4937760"/>
+              <a:t>$192K</a:t>
+            </a:r>
+          </a:p>
+        </p:txBody>
+      </p:sp>
+      <p:sp>
+        <p:nvSpPr>
+          <p:cNvPr id="34" name="TextBox 33"/>
+          <p:cNvSpPr txBox="1"/>
+          <p:nvPr/>
+        </p:nvSpPr>
+        <p:spPr>
+          <a:xfrm>
+            <a:off x="4206240" y="5029200"/>
             <a:ext cx="1097280" cy="274320"/>
           </a:xfrm>
           <a:prstGeom prst="rect">
@@ -10275,20 +12686,20 @@
               </a:defRPr>
             </a:pPr>
             <a:r>
-              <a:t>1-2 weeks</a:t>
-            </a:r>
-          </a:p>
-        </p:txBody>
-      </p:sp>
-      <p:sp>
-        <p:nvSpPr>
-          <p:cNvPr id="32" name="TextBox 31"/>
-          <p:cNvSpPr txBox="1"/>
-          <p:nvPr/>
-        </p:nvSpPr>
-        <p:spPr>
-          <a:xfrm>
-            <a:off x="731520" y="5230368"/>
+              <a:t>Full / partial</a:t>
+            </a:r>
+          </a:p>
+        </p:txBody>
+      </p:sp>
+      <p:sp>
+        <p:nvSpPr>
+          <p:cNvPr id="35" name="TextBox 34"/>
+          <p:cNvSpPr txBox="1"/>
+          <p:nvPr/>
+        </p:nvSpPr>
+        <p:spPr>
+          <a:xfrm>
+            <a:off x="731520" y="5321808"/>
             <a:ext cx="2286000" cy="274320"/>
           </a:xfrm>
           <a:prstGeom prst="rect">
@@ -10310,20 +12721,20 @@
               </a:defRPr>
             </a:pPr>
             <a:r>
-              <a:t>Agentic Backend Dev</a:t>
-            </a:r>
-          </a:p>
-        </p:txBody>
-      </p:sp>
-      <p:sp>
-        <p:nvSpPr>
-          <p:cNvPr id="33" name="TextBox 32"/>
-          <p:cNvSpPr txBox="1"/>
-          <p:nvPr/>
-        </p:nvSpPr>
-        <p:spPr>
-          <a:xfrm>
-            <a:off x="3017520" y="5230368"/>
+              <a:t>Offshore Engineers (2)</a:t>
+            </a:r>
+          </a:p>
+        </p:txBody>
+      </p:sp>
+      <p:sp>
+        <p:nvSpPr>
+          <p:cNvPr id="36" name="TextBox 35"/>
+          <p:cNvSpPr txBox="1"/>
+          <p:nvPr/>
+        </p:nvSpPr>
+        <p:spPr>
+          <a:xfrm>
+            <a:off x="3017520" y="5321808"/>
             <a:ext cx="1097280" cy="274320"/>
           </a:xfrm>
           <a:prstGeom prst="rect">
@@ -10345,20 +12756,20 @@
               </a:defRPr>
             </a:pPr>
             <a:r>
-              <a:t>$150K-250K</a:t>
-            </a:r>
-          </a:p>
-        </p:txBody>
-      </p:sp>
-      <p:sp>
-        <p:nvSpPr>
-          <p:cNvPr id="34" name="TextBox 33"/>
-          <p:cNvSpPr txBox="1"/>
-          <p:nvPr/>
-        </p:nvSpPr>
-        <p:spPr>
-          <a:xfrm>
-            <a:off x="4206240" y="5230368"/>
+              <a:t>$114K</a:t>
+            </a:r>
+          </a:p>
+        </p:txBody>
+      </p:sp>
+      <p:sp>
+        <p:nvSpPr>
+          <p:cNvPr id="37" name="TextBox 36"/>
+          <p:cNvSpPr txBox="1"/>
+          <p:nvPr/>
+        </p:nvSpPr>
+        <p:spPr>
+          <a:xfrm>
+            <a:off x="4206240" y="5321808"/>
             <a:ext cx="1097280" cy="274320"/>
           </a:xfrm>
           <a:prstGeom prst="rect">
@@ -10380,20 +12791,20 @@
               </a:defRPr>
             </a:pPr>
             <a:r>
-              <a:t>3-4 weeks</a:t>
-            </a:r>
-          </a:p>
-        </p:txBody>
-      </p:sp>
-      <p:sp>
-        <p:nvSpPr>
-          <p:cNvPr id="35" name="TextBox 34"/>
-          <p:cNvSpPr txBox="1"/>
-          <p:nvPr/>
-        </p:nvSpPr>
-        <p:spPr>
-          <a:xfrm>
-            <a:off x="731520" y="5522976"/>
+              <a:t>10-12 weeks</a:t>
+            </a:r>
+          </a:p>
+        </p:txBody>
+      </p:sp>
+      <p:sp>
+        <p:nvSpPr>
+          <p:cNvPr id="38" name="TextBox 37"/>
+          <p:cNvSpPr txBox="1"/>
+          <p:nvPr/>
+        </p:nvSpPr>
+        <p:spPr>
+          <a:xfrm>
+            <a:off x="731520" y="5614416"/>
             <a:ext cx="2286000" cy="274320"/>
           </a:xfrm>
           <a:prstGeom prst="rect">
@@ -10415,20 +12826,20 @@
               </a:defRPr>
             </a:pPr>
             <a:r>
-              <a:t>Agentic Mobile Dev</a:t>
-            </a:r>
-          </a:p>
-        </p:txBody>
-      </p:sp>
-      <p:sp>
-        <p:nvSpPr>
-          <p:cNvPr id="36" name="TextBox 35"/>
-          <p:cNvSpPr txBox="1"/>
-          <p:nvPr/>
-        </p:nvSpPr>
-        <p:spPr>
-          <a:xfrm>
-            <a:off x="3017520" y="5522976"/>
+              <a:t>AI Agent Compute</a:t>
+            </a:r>
+          </a:p>
+        </p:txBody>
+      </p:sp>
+      <p:sp>
+        <p:nvSpPr>
+          <p:cNvPr id="39" name="TextBox 38"/>
+          <p:cNvSpPr txBox="1"/>
+          <p:nvPr/>
+        </p:nvSpPr>
+        <p:spPr>
+          <a:xfrm>
+            <a:off x="3017520" y="5614416"/>
             <a:ext cx="1097280" cy="274320"/>
           </a:xfrm>
           <a:prstGeom prst="rect">
@@ -10450,20 +12861,20 @@
               </a:defRPr>
             </a:pPr>
             <a:r>
-              <a:t>$120K-200K</a:t>
-            </a:r>
-          </a:p>
-        </p:txBody>
-      </p:sp>
-      <p:sp>
-        <p:nvSpPr>
-          <p:cNvPr id="37" name="TextBox 36"/>
-          <p:cNvSpPr txBox="1"/>
-          <p:nvPr/>
-        </p:nvSpPr>
-        <p:spPr>
-          <a:xfrm>
-            <a:off x="4206240" y="5522976"/>
+              <a:t>$65K</a:t>
+            </a:r>
+          </a:p>
+        </p:txBody>
+      </p:sp>
+      <p:sp>
+        <p:nvSpPr>
+          <p:cNvPr id="40" name="TextBox 39"/>
+          <p:cNvSpPr txBox="1"/>
+          <p:nvPr/>
+        </p:nvSpPr>
+        <p:spPr>
+          <a:xfrm>
+            <a:off x="4206240" y="5614416"/>
             <a:ext cx="1097280" cy="274320"/>
           </a:xfrm>
           <a:prstGeom prst="rect">
@@ -10485,20 +12896,20 @@
               </a:defRPr>
             </a:pPr>
             <a:r>
-              <a:t>3-4 weeks</a:t>
-            </a:r>
-          </a:p>
-        </p:txBody>
-      </p:sp>
-      <p:sp>
-        <p:nvSpPr>
-          <p:cNvPr id="38" name="TextBox 37"/>
-          <p:cNvSpPr txBox="1"/>
-          <p:nvPr/>
-        </p:nvSpPr>
-        <p:spPr>
-          <a:xfrm>
-            <a:off x="731520" y="5815584"/>
+              <a:t>4-6 weeks</a:t>
+            </a:r>
+          </a:p>
+        </p:txBody>
+      </p:sp>
+      <p:sp>
+        <p:nvSpPr>
+          <p:cNvPr id="41" name="TextBox 40"/>
+          <p:cNvSpPr txBox="1"/>
+          <p:nvPr/>
+        </p:nvSpPr>
+        <p:spPr>
+          <a:xfrm>
+            <a:off x="731520" y="5907024"/>
             <a:ext cx="2286000" cy="274320"/>
           </a:xfrm>
           <a:prstGeom prst="rect">
@@ -10520,20 +12931,20 @@
               </a:defRPr>
             </a:pPr>
             <a:r>
-              <a:t>AI-Assisted QA</a:t>
-            </a:r>
-          </a:p>
-        </p:txBody>
-      </p:sp>
-      <p:sp>
-        <p:nvSpPr>
-          <p:cNvPr id="39" name="TextBox 38"/>
-          <p:cNvSpPr txBox="1"/>
-          <p:nvPr/>
-        </p:nvSpPr>
-        <p:spPr>
-          <a:xfrm>
-            <a:off x="3017520" y="5815584"/>
+              <a:t>Human QA + DevOps</a:t>
+            </a:r>
+          </a:p>
+        </p:txBody>
+      </p:sp>
+      <p:sp>
+        <p:nvSpPr>
+          <p:cNvPr id="42" name="TextBox 41"/>
+          <p:cNvSpPr txBox="1"/>
+          <p:nvPr/>
+        </p:nvSpPr>
+        <p:spPr>
+          <a:xfrm>
+            <a:off x="3017520" y="5907024"/>
             <a:ext cx="1097280" cy="274320"/>
           </a:xfrm>
           <a:prstGeom prst="rect">
@@ -10555,20 +12966,20 @@
               </a:defRPr>
             </a:pPr>
             <a:r>
-              <a:t>$60K-100K</a:t>
-            </a:r>
-          </a:p>
-        </p:txBody>
-      </p:sp>
-      <p:sp>
-        <p:nvSpPr>
-          <p:cNvPr id="40" name="TextBox 39"/>
-          <p:cNvSpPr txBox="1"/>
-          <p:nvPr/>
-        </p:nvSpPr>
-        <p:spPr>
-          <a:xfrm>
-            <a:off x="4206240" y="5815584"/>
+              <a:t>$37K</a:t>
+            </a:r>
+          </a:p>
+        </p:txBody>
+      </p:sp>
+      <p:sp>
+        <p:nvSpPr>
+          <p:cNvPr id="43" name="TextBox 42"/>
+          <p:cNvSpPr txBox="1"/>
+          <p:nvPr/>
+        </p:nvSpPr>
+        <p:spPr>
+          <a:xfrm>
+            <a:off x="4206240" y="5907024"/>
             <a:ext cx="1097280" cy="274320"/>
           </a:xfrm>
           <a:prstGeom prst="rect">
@@ -10590,112 +13001,7 @@
               </a:defRPr>
             </a:pPr>
             <a:r>
-              <a:t>1-2 weeks</a:t>
-            </a:r>
-          </a:p>
-        </p:txBody>
-      </p:sp>
-      <p:sp>
-        <p:nvSpPr>
-          <p:cNvPr id="41" name="TextBox 40"/>
-          <p:cNvSpPr txBox="1"/>
-          <p:nvPr/>
-        </p:nvSpPr>
-        <p:spPr>
-          <a:xfrm>
-            <a:off x="731520" y="6108192"/>
-            <a:ext cx="2286000" cy="274320"/>
-          </a:xfrm>
-          <a:prstGeom prst="rect">
-            <a:avLst/>
-          </a:prstGeom>
-          <a:noFill/>
-        </p:spPr>
-        <p:txBody>
-          <a:bodyPr wrap="square">
-            <a:spAutoFit/>
-          </a:bodyPr>
-          <a:lstStyle/>
-          <a:p>
-            <a:pPr algn="l">
-              <a:defRPr sz="1100" b="0">
-                <a:solidFill>
-                  <a:srgbClr val="333333"/>
-                </a:solidFill>
-              </a:defRPr>
-            </a:pPr>
-            <a:r>
-              <a:t>Launch &amp; Monitoring</a:t>
-            </a:r>
-          </a:p>
-        </p:txBody>
-      </p:sp>
-      <p:sp>
-        <p:nvSpPr>
-          <p:cNvPr id="42" name="TextBox 41"/>
-          <p:cNvSpPr txBox="1"/>
-          <p:nvPr/>
-        </p:nvSpPr>
-        <p:spPr>
-          <a:xfrm>
-            <a:off x="3017520" y="6108192"/>
-            <a:ext cx="1097280" cy="274320"/>
-          </a:xfrm>
-          <a:prstGeom prst="rect">
-            <a:avLst/>
-          </a:prstGeom>
-          <a:noFill/>
-        </p:spPr>
-        <p:txBody>
-          <a:bodyPr wrap="square">
-            <a:spAutoFit/>
-          </a:bodyPr>
-          <a:lstStyle/>
-          <a:p>
-            <a:pPr algn="r">
-              <a:defRPr sz="1100" b="0">
-                <a:solidFill>
-                  <a:srgbClr val="2E7D32"/>
-                </a:solidFill>
-              </a:defRPr>
-            </a:pPr>
-            <a:r>
-              <a:t>$80K-120K</a:t>
-            </a:r>
-          </a:p>
-        </p:txBody>
-      </p:sp>
-      <p:sp>
-        <p:nvSpPr>
-          <p:cNvPr id="43" name="TextBox 42"/>
-          <p:cNvSpPr txBox="1"/>
-          <p:nvPr/>
-        </p:nvSpPr>
-        <p:spPr>
-          <a:xfrm>
-            <a:off x="4206240" y="6108192"/>
-            <a:ext cx="1097280" cy="274320"/>
-          </a:xfrm>
-          <a:prstGeom prst="rect">
-            <a:avLst/>
-          </a:prstGeom>
-          <a:noFill/>
-        </p:spPr>
-        <p:txBody>
-          <a:bodyPr wrap="square">
-            <a:spAutoFit/>
-          </a:bodyPr>
-          <a:lstStyle/>
-          <a:p>
-            <a:pPr algn="l">
-              <a:defRPr sz="1100" b="0">
-                <a:solidFill>
-                  <a:srgbClr val="2E7D32"/>
-                </a:solidFill>
-              </a:defRPr>
-            </a:pPr>
-            <a:r>
-              <a:t>1-2 weeks</a:t>
+              <a:t>3-5 weeks</a:t>
             </a:r>
           </a:p>
         </p:txBody>
@@ -10708,7 +13014,7 @@
         </p:nvSpPr>
         <p:spPr>
           <a:xfrm>
-            <a:off x="731520" y="6035040"/>
+            <a:off x="731520" y="6217920"/>
             <a:ext cx="4572000" cy="365760"/>
           </a:xfrm>
           <a:prstGeom prst="rect">
@@ -10751,7 +13057,7 @@
         </p:nvSpPr>
         <p:spPr>
           <a:xfrm>
-            <a:off x="731520" y="6053328"/>
+            <a:off x="731520" y="6236208"/>
             <a:ext cx="2286000" cy="320040"/>
           </a:xfrm>
           <a:prstGeom prst="rect">
@@ -10786,7 +13092,7 @@
         </p:nvSpPr>
         <p:spPr>
           <a:xfrm>
-            <a:off x="3017520" y="6053328"/>
+            <a:off x="3017520" y="6236208"/>
             <a:ext cx="1097280" cy="320040"/>
           </a:xfrm>
           <a:prstGeom prst="rect">
@@ -10808,7 +13114,7 @@
               </a:defRPr>
             </a:pPr>
             <a:r>
-              <a:t>$470K-760K</a:t>
+              <a:t>$408K</a:t>
             </a:r>
           </a:p>
         </p:txBody>
@@ -10821,7 +13127,7 @@
         </p:nvSpPr>
         <p:spPr>
           <a:xfrm>
-            <a:off x="4206240" y="6053328"/>
+            <a:off x="4206240" y="6236208"/>
             <a:ext cx="1097280" cy="320040"/>
           </a:xfrm>
           <a:prstGeom prst="rect">
@@ -10843,7 +13149,7 @@
               </a:defRPr>
             </a:pPr>
             <a:r>
-              <a:t>8-13 weeks</a:t>
+              <a:t>8-15 weeks</a:t>
             </a:r>
           </a:p>
         </p:txBody>
@@ -10878,7 +13184,7 @@
               </a:defRPr>
             </a:pPr>
             <a:r>
-              <a:t>ROI Analysis (Moderate Scenario)</a:t>
+              <a:t>ROI Analysis — Moderate Scenario (CAD)</a:t>
             </a:r>
           </a:p>
         </p:txBody>
@@ -10948,7 +13254,7 @@
               </a:defRPr>
             </a:pPr>
             <a:r>
-              <a:t>$189.5M</a:t>
+              <a:t>$189.5M CAD</a:t>
             </a:r>
           </a:p>
         </p:txBody>
@@ -11088,7 +13394,7 @@
               </a:defRPr>
             </a:pPr>
             <a:r>
-              <a:t>$66.3M</a:t>
+              <a:t>$66.3M CAD</a:t>
             </a:r>
           </a:p>
         </p:txBody>
@@ -11158,7 +13464,7 @@
               </a:defRPr>
             </a:pPr>
             <a:r>
-              <a:t>$615K</a:t>
+              <a:t>$408K CAD</a:t>
             </a:r>
           </a:p>
         </p:txBody>
@@ -11228,7 +13534,7 @@
               </a:defRPr>
             </a:pPr>
             <a:r>
-              <a:t>&lt; 1 week</a:t>
+              <a:t>&lt; 1 day</a:t>
             </a:r>
           </a:p>
         </p:txBody>
@@ -11298,7 +13604,7 @@
               </a:defRPr>
             </a:pPr>
             <a:r>
-              <a:t>10,680%</a:t>
+              <a:t>16,150%</a:t>
             </a:r>
           </a:p>
         </p:txBody>
@@ -11376,7 +13682,7 @@
               </a:defRPr>
             </a:pPr>
             <a:r>
-              <a:t>EliteA saves ~$1M and 4+ months vs. traditional development</a:t>
+              <a:t>EliteA saves $500K-770K CAD and 4+ months vs. traditional</a:t>
             </a:r>
           </a:p>
         </p:txBody>
@@ -11515,7 +13821,7 @@
               </a:defRPr>
             </a:pPr>
             <a:r>
-              <a:t>EliteA agentic AI SDLC cost and timeline estimates</a:t>
+              <a:t>All amounts in CAD  |  EliteA agentic AI SDLC cost and timeline estimates</a:t>
             </a:r>
           </a:p>
         </p:txBody>
@@ -11727,7 +14033,7 @@
               </a:defRPr>
             </a:pPr>
             <a:r>
-              <a:t>  Blended rate: $85-120/hr for EliteA teams (AI + human combined)</a:t>
+              <a:t>  Onshore rates (CAD/h): DM $200, BA $160, SA $190</a:t>
             </a:r>
           </a:p>
           <a:p>
@@ -11742,7 +14048,7 @@
               </a:defRPr>
             </a:pPr>
             <a:r>
-              <a:t>  Team composition: 2 senior engineers + AI agent cluster per workstream</a:t>
+              <a:t>  Offshore rates (CAD/h): Sr Dev $130, QA $95-110, DevOps $140</a:t>
             </a:r>
           </a:p>
           <a:p>
@@ -11757,7 +14063,7 @@
               </a:defRPr>
             </a:pPr>
             <a:r>
-              <a:t>  Parallel workstreams: backend + mobile + QA run concurrently, not sequentially</a:t>
+              <a:t>  Team: 3 onshore (DM, BA, SA) + 2 offshore engineers + AI agent cluster</a:t>
             </a:r>
           </a:p>
           <a:p>
@@ -11772,75 +14078,8 @@
               </a:defRPr>
             </a:pPr>
             <a:r>
-              <a:t>  CTC provides API access, design assets, and Triangle sandbox within 2 weeks</a:t>
-            </a:r>
-          </a:p>
-        </p:txBody>
-      </p:sp>
-      <p:sp>
-        <p:nvSpPr>
-          <p:cNvPr id="9" name="TextBox 8"/>
-          <p:cNvSpPr txBox="1"/>
-          <p:nvPr/>
-        </p:nvSpPr>
-        <p:spPr>
-          <a:xfrm>
-            <a:off x="6400800" y="1188720"/>
-            <a:ext cx="5029200" cy="457200"/>
-          </a:xfrm>
-          <a:prstGeom prst="rect">
-            <a:avLst/>
-          </a:prstGeom>
-          <a:noFill/>
-        </p:spPr>
-        <p:txBody>
-          <a:bodyPr wrap="square">
-            <a:spAutoFit/>
-          </a:bodyPr>
-          <a:lstStyle/>
-          <a:p>
-            <a:pPr algn="l">
-              <a:defRPr sz="1800" b="1">
-                <a:solidFill>
-                  <a:srgbClr val="D52B1E"/>
-                </a:solidFill>
-              </a:defRPr>
-            </a:pPr>
-            <a:r>
-              <a:t>Revenue Model Assumptions</a:t>
-            </a:r>
-          </a:p>
-        </p:txBody>
-      </p:sp>
-      <p:sp>
-        <p:nvSpPr>
-          <p:cNvPr id="10" name="TextBox 9"/>
-          <p:cNvSpPr txBox="1"/>
-          <p:nvPr/>
-        </p:nvSpPr>
-        <p:spPr>
-          <a:xfrm>
-            <a:off x="6400800" y="1737360"/>
-            <a:ext cx="5029200" cy="4572000"/>
-          </a:xfrm>
-          <a:prstGeom prst="rect">
-            <a:avLst/>
-          </a:prstGeom>
-          <a:noFill/>
-        </p:spPr>
-        <p:txBody>
-          <a:bodyPr wrap="square">
-            <a:spAutoFit/>
-          </a:bodyPr>
-          <a:lstStyle/>
-          <a:p>
-            <a:pPr algn="l">
-              <a:defRPr sz="1200" b="0">
-                <a:solidFill>
-                  <a:srgbClr val="333333"/>
-                </a:solidFill>
-              </a:defRPr>
-            </a:pPr>
+              <a:t>  Parallel workstreams: backend + mobile + QA run concurrently</a:t>
+            </a:r>
           </a:p>
           <a:p>
             <a:pPr algn="l">
@@ -11854,8 +14093,75 @@
               </a:defRPr>
             </a:pPr>
             <a:r>
-              <a:t>  Mobile MAU baseline: 4M across all CTC banners</a:t>
-            </a:r>
+              <a:t>  CTC provides API access, design assets, and Triangle sandbox within 2 weeks</a:t>
+            </a:r>
+          </a:p>
+        </p:txBody>
+      </p:sp>
+      <p:sp>
+        <p:nvSpPr>
+          <p:cNvPr id="9" name="TextBox 8"/>
+          <p:cNvSpPr txBox="1"/>
+          <p:nvPr/>
+        </p:nvSpPr>
+        <p:spPr>
+          <a:xfrm>
+            <a:off x="6400800" y="1188720"/>
+            <a:ext cx="5029200" cy="457200"/>
+          </a:xfrm>
+          <a:prstGeom prst="rect">
+            <a:avLst/>
+          </a:prstGeom>
+          <a:noFill/>
+        </p:spPr>
+        <p:txBody>
+          <a:bodyPr wrap="square">
+            <a:spAutoFit/>
+          </a:bodyPr>
+          <a:lstStyle/>
+          <a:p>
+            <a:pPr algn="l">
+              <a:defRPr sz="1800" b="1">
+                <a:solidFill>
+                  <a:srgbClr val="D52B1E"/>
+                </a:solidFill>
+              </a:defRPr>
+            </a:pPr>
+            <a:r>
+              <a:t>Revenue Model Assumptions</a:t>
+            </a:r>
+          </a:p>
+        </p:txBody>
+      </p:sp>
+      <p:sp>
+        <p:nvSpPr>
+          <p:cNvPr id="10" name="TextBox 9"/>
+          <p:cNvSpPr txBox="1"/>
+          <p:nvPr/>
+        </p:nvSpPr>
+        <p:spPr>
+          <a:xfrm>
+            <a:off x="6400800" y="1737360"/>
+            <a:ext cx="5029200" cy="4572000"/>
+          </a:xfrm>
+          <a:prstGeom prst="rect">
+            <a:avLst/>
+          </a:prstGeom>
+          <a:noFill/>
+        </p:spPr>
+        <p:txBody>
+          <a:bodyPr wrap="square">
+            <a:spAutoFit/>
+          </a:bodyPr>
+          <a:lstStyle/>
+          <a:p>
+            <a:pPr algn="l">
+              <a:defRPr sz="1200" b="0">
+                <a:solidFill>
+                  <a:srgbClr val="333333"/>
+                </a:solidFill>
+              </a:defRPr>
+            </a:pPr>
           </a:p>
           <a:p>
             <a:pPr algn="l">
@@ -11869,7 +14175,7 @@
               </a:defRPr>
             </a:pPr>
             <a:r>
-              <a:t>  Wishlist adoption: 25% of MAU (1M users) within Year 1</a:t>
+              <a:t>  Mobile MAU baseline: 4M across all CTC banners</a:t>
             </a:r>
           </a:p>
           <a:p>
@@ -11884,7 +14190,7 @@
               </a:defRPr>
             </a:pPr>
             <a:r>
-              <a:t>  Incremental AOV lift: +$12 per transaction for wishlist users</a:t>
+              <a:t>  Wishlist adoption: 25% of MAU (1M users) within Year 1</a:t>
             </a:r>
           </a:p>
           <a:p>
@@ -11899,7 +14205,7 @@
               </a:defRPr>
             </a:pPr>
             <a:r>
-              <a:t>  Average 8 transactions/year for engaged wishlist users</a:t>
+              <a:t>  Incremental AOV lift: +$12 CAD per transaction for wishlist users</a:t>
             </a:r>
           </a:p>
           <a:p>
@@ -11914,7 +14220,7 @@
               </a:defRPr>
             </a:pPr>
             <a:r>
-              <a:t>  Gift sharing: 30% of wishlist users share at least one list</a:t>
+              <a:t>  Average 8 transactions/year for engaged wishlist users</a:t>
             </a:r>
           </a:p>
           <a:p>
@@ -11929,7 +14235,22 @@
               </a:defRPr>
             </a:pPr>
             <a:r>
-              <a:t>  Average fulfilled gift value: $150 per shared wishlist</a:t>
+              <a:t>  Gift sharing: 30% of wishlist users share at least one list</a:t>
+            </a:r>
+          </a:p>
+          <a:p>
+            <a:pPr algn="l">
+              <a:spcBef>
+                <a:spcPts val="800"/>
+              </a:spcBef>
+              <a:defRPr sz="1200" b="0">
+                <a:solidFill>
+                  <a:srgbClr val="333333"/>
+                </a:solidFill>
+              </a:defRPr>
+            </a:pPr>
+            <a:r>
+              <a:t>  Average fulfilled gift value: $150 CAD per shared wishlist</a:t>
             </a:r>
           </a:p>
           <a:p>
@@ -16536,7 +18857,7 @@
               </a:defRPr>
             </a:pPr>
             <a:r>
-              <a:t>revenue uplift/yr</a:t>
+              <a:t>CAD revenue uplift/yr</a:t>
             </a:r>
           </a:p>
         </p:txBody>
@@ -16571,7 +18892,7 @@
               </a:defRPr>
             </a:pPr>
             <a:r>
-              <a:t>$615K</a:t>
+              <a:t>$408K</a:t>
             </a:r>
           </a:p>
         </p:txBody>
@@ -16606,7 +18927,7 @@
               </a:defRPr>
             </a:pPr>
             <a:r>
-              <a:t>EliteA investment</a:t>
+              <a:t>CAD EliteA investment</a:t>
             </a:r>
           </a:p>
         </p:txBody>
@@ -16711,7 +19032,7 @@
               </a:defRPr>
             </a:pPr>
             <a:r>
-              <a:t>10,680%</a:t>
+              <a:t>16,150%</a:t>
             </a:r>
           </a:p>
         </p:txBody>
@@ -25321,7 +27642,7 @@
               </a:defRPr>
             </a:pPr>
             <a:r>
-              <a:t>Moderate scenario = ~1.3% lift on $14.5B retail revenue. Conservative assumptions: 25% adoption, $12 AOV lift, 8 transactions/year.</a:t>
+              <a:t>All amounts in CAD. Moderate scenario = ~1.3% lift on $14.5B retail revenue. Assumptions: 25% adoption, +$12 AOV, 8 txn/year.</a:t>
             </a:r>
           </a:p>
         </p:txBody>

--- a/docs/CTC_Mobile_Wishlist_Business_Case.pptx
+++ b/docs/CTC_Mobile_Wishlist_Business_Case.pptx
@@ -6548,7 +6548,7 @@
               </a:defRPr>
             </a:pPr>
             <a:r>
-              <a:t>$130</a:t>
+              <a:t>$72</a:t>
             </a:r>
           </a:p>
         </p:txBody>
@@ -6618,7 +6618,7 @@
               </a:defRPr>
             </a:pPr>
             <a:r>
-              <a:t>$208K-250K</a:t>
+              <a:t>$115K-138K</a:t>
             </a:r>
           </a:p>
         </p:txBody>
@@ -6801,7 +6801,7 @@
               </a:defRPr>
             </a:pPr>
             <a:r>
-              <a:t>$130</a:t>
+              <a:t>$72</a:t>
             </a:r>
           </a:p>
         </p:txBody>
@@ -6871,7 +6871,7 @@
               </a:defRPr>
             </a:pPr>
             <a:r>
-              <a:t>$208K-250K</a:t>
+              <a:t>$115K-138K</a:t>
             </a:r>
           </a:p>
         </p:txBody>
@@ -7054,7 +7054,7 @@
               </a:defRPr>
             </a:pPr>
             <a:r>
-              <a:t>$95</a:t>
+              <a:t>$72</a:t>
             </a:r>
           </a:p>
         </p:txBody>
@@ -7124,7 +7124,7 @@
               </a:defRPr>
             </a:pPr>
             <a:r>
-              <a:t>$46K-61K</a:t>
+              <a:t>$35K-46K</a:t>
             </a:r>
           </a:p>
         </p:txBody>
@@ -7307,7 +7307,7 @@
               </a:defRPr>
             </a:pPr>
             <a:r>
-              <a:t>$110</a:t>
+              <a:t>$72</a:t>
             </a:r>
           </a:p>
         </p:txBody>
@@ -7377,7 +7377,7 @@
               </a:defRPr>
             </a:pPr>
             <a:r>
-              <a:t>$53K-70K</a:t>
+              <a:t>$35K-46K</a:t>
             </a:r>
           </a:p>
         </p:txBody>
@@ -7560,7 +7560,7 @@
               </a:defRPr>
             </a:pPr>
             <a:r>
-              <a:t>$140</a:t>
+              <a:t>$72</a:t>
             </a:r>
           </a:p>
         </p:txBody>
@@ -7630,7 +7630,7 @@
               </a:defRPr>
             </a:pPr>
             <a:r>
-              <a:t>$56K-67K</a:t>
+              <a:t>$29K-35K</a:t>
             </a:r>
           </a:p>
         </p:txBody>
@@ -7813,7 +7813,7 @@
               </a:defRPr>
             </a:pPr>
             <a:r>
-              <a:t>$905K-1.18M</a:t>
+              <a:t>$663K-890K</a:t>
             </a:r>
           </a:p>
         </p:txBody>
@@ -9511,7 +9511,7 @@
               </a:defRPr>
             </a:pPr>
             <a:r>
-              <a:t>$130</a:t>
+              <a:t>$72</a:t>
             </a:r>
           </a:p>
         </p:txBody>
@@ -9581,7 +9581,7 @@
               </a:defRPr>
             </a:pPr>
             <a:r>
-              <a:t>$62K</a:t>
+              <a:t>$35K</a:t>
             </a:r>
           </a:p>
         </p:txBody>
@@ -9764,7 +9764,7 @@
               </a:defRPr>
             </a:pPr>
             <a:r>
-              <a:t>$130</a:t>
+              <a:t>$72</a:t>
             </a:r>
           </a:p>
         </p:txBody>
@@ -9834,7 +9834,7 @@
               </a:defRPr>
             </a:pPr>
             <a:r>
-              <a:t>$52K</a:t>
+              <a:t>$29K</a:t>
             </a:r>
           </a:p>
         </p:txBody>
@@ -10523,7 +10523,7 @@
               </a:defRPr>
             </a:pPr>
             <a:r>
-              <a:t>$100</a:t>
+              <a:t>$72</a:t>
             </a:r>
           </a:p>
         </p:txBody>
@@ -10593,7 +10593,7 @@
               </a:defRPr>
             </a:pPr>
             <a:r>
-              <a:t>$20K</a:t>
+              <a:t>$14K</a:t>
             </a:r>
           </a:p>
         </p:txBody>
@@ -10776,7 +10776,7 @@
               </a:defRPr>
             </a:pPr>
             <a:r>
-              <a:t>$140</a:t>
+              <a:t>$72</a:t>
             </a:r>
           </a:p>
         </p:txBody>
@@ -10846,7 +10846,7 @@
               </a:defRPr>
             </a:pPr>
             <a:r>
-              <a:t>$17K</a:t>
+              <a:t>$9K</a:t>
             </a:r>
           </a:p>
         </p:txBody>
@@ -11029,7 +11029,7 @@
               </a:defRPr>
             </a:pPr>
             <a:r>
-              <a:t>$408K</a:t>
+              <a:t>$344K</a:t>
             </a:r>
           </a:p>
         </p:txBody>
@@ -11454,7 +11454,7 @@
               </a:defRPr>
             </a:pPr>
             <a:r>
-              <a:t>EliteA saves $500K-770K CAD (55-65%)  |  50% fewer human FTEs (5 vs 10)  |  4-6 months faster  |  AI handles ~70% of code, tests, and docs</a:t>
+              <a:t>EliteA saves $320K-550K CAD (48-61%)  |  50% fewer human FTEs (5 vs 10)  |  4-6 months faster  |  AI handles ~70% of code, tests, and docs</a:t>
             </a:r>
           </a:p>
         </p:txBody>
@@ -11628,7 +11628,7 @@
               </a:defRPr>
             </a:pPr>
             <a:r>
-              <a:t>All amounts in CAD  |  Agentic AI SDLC reduces cost by ~60% and timeline by ~50%</a:t>
+              <a:t>All amounts in CAD  |  Agentic AI SDLC reduces cost by ~50% and timeline by ~50%</a:t>
             </a:r>
           </a:p>
         </p:txBody>
@@ -11943,7 +11943,7 @@
               </a:defRPr>
             </a:pPr>
             <a:r>
-              <a:t>$264K-317K</a:t>
+              <a:t>$146K-176K</a:t>
             </a:r>
           </a:p>
         </p:txBody>
@@ -12048,7 +12048,7 @@
               </a:defRPr>
             </a:pPr>
             <a:r>
-              <a:t>$264K-317K</a:t>
+              <a:t>$146K-176K</a:t>
             </a:r>
           </a:p>
         </p:txBody>
@@ -12153,7 +12153,7 @@
               </a:defRPr>
             </a:pPr>
             <a:r>
-              <a:t>$99K-131K</a:t>
+              <a:t>$70K-92K</a:t>
             </a:r>
           </a:p>
         </p:txBody>
@@ -12258,7 +12258,7 @@
               </a:defRPr>
             </a:pPr>
             <a:r>
-              <a:t>$56K-67K</a:t>
+              <a:t>$29K-35K</a:t>
             </a:r>
           </a:p>
         </p:txBody>
@@ -12511,7 +12511,7 @@
               </a:defRPr>
             </a:pPr>
             <a:r>
-              <a:t>$905K-1.18M</a:t>
+              <a:t>$663K-890K</a:t>
             </a:r>
           </a:p>
         </p:txBody>
@@ -12756,7 +12756,7 @@
               </a:defRPr>
             </a:pPr>
             <a:r>
-              <a:t>$114K</a:t>
+              <a:t>$64K</a:t>
             </a:r>
           </a:p>
         </p:txBody>
@@ -12966,7 +12966,7 @@
               </a:defRPr>
             </a:pPr>
             <a:r>
-              <a:t>$37K</a:t>
+              <a:t>$23K</a:t>
             </a:r>
           </a:p>
         </p:txBody>
@@ -13114,7 +13114,7 @@
               </a:defRPr>
             </a:pPr>
             <a:r>
-              <a:t>$408K</a:t>
+              <a:t>$344K</a:t>
             </a:r>
           </a:p>
         </p:txBody>
@@ -13464,7 +13464,7 @@
               </a:defRPr>
             </a:pPr>
             <a:r>
-              <a:t>$408K CAD</a:t>
+              <a:t>$344K CAD</a:t>
             </a:r>
           </a:p>
         </p:txBody>
@@ -13604,7 +13604,7 @@
               </a:defRPr>
             </a:pPr>
             <a:r>
-              <a:t>16,150%</a:t>
+              <a:t>19,270%</a:t>
             </a:r>
           </a:p>
         </p:txBody>
@@ -13682,7 +13682,7 @@
               </a:defRPr>
             </a:pPr>
             <a:r>
-              <a:t>EliteA saves $500K-770K CAD and 4+ months vs. traditional</a:t>
+              <a:t>EliteA saves $320K-550K CAD and 4+ months vs. traditional</a:t>
             </a:r>
           </a:p>
         </p:txBody>
@@ -14048,7 +14048,7 @@
               </a:defRPr>
             </a:pPr>
             <a:r>
-              <a:t>  Offshore rates (CAD/h): Sr Dev $130, QA $95-110, DevOps $140</a:t>
+              <a:t>  Offshore rates (CAD/h): All resources $72</a:t>
             </a:r>
           </a:p>
           <a:p>
@@ -18892,7 +18892,7 @@
               </a:defRPr>
             </a:pPr>
             <a:r>
-              <a:t>$408K</a:t>
+              <a:t>$344K</a:t>
             </a:r>
           </a:p>
         </p:txBody>
@@ -19032,7 +19032,7 @@
               </a:defRPr>
             </a:pPr>
             <a:r>
-              <a:t>16,150%</a:t>
+              <a:t>19,270%</a:t>
             </a:r>
           </a:p>
         </p:txBody>
